--- a/protected-downloads/praesentation/M03.pptx
+++ b/protected-downloads/praesentation/M03.pptx
@@ -8,12 +8,13 @@
     <p:sldId id="256" r:id="rId7"/>
     <p:sldId id="257" r:id="rId8"/>
     <p:sldId id="258" r:id="rId9"/>
-    <p:sldId id="259" r:id="rId10"/>
-    <p:sldId id="260" r:id="rId11"/>
-    <p:sldId id="261" r:id="rId12"/>
-    <p:sldId id="262" r:id="rId13"/>
-    <p:sldId id="263" r:id="rId14"/>
-    <p:sldId id="264" r:id="rId15"/>
+    <p:sldId id="259" r:id="rId11"/>
+    <p:sldId id="260" r:id="rId12"/>
+    <p:sldId id="261" r:id="rId13"/>
+    <p:sldId id="262" r:id="rId14"/>
+    <p:sldId id="263" r:id="rId15"/>
+    <p:sldId id="264" r:id="rId16"/>
+    <p:sldId id="265" r:id="rId17"/>
   </p:sldIdLst>
   <p:sldSz cx="12188952" cy="6858000" type="screen4x3"/>
   <p:notesSz cx="6858000" cy="9144000"/>
@@ -113,6 +114,791 @@
     </a:lvl9pPr>
   </p:defaultTextStyle>
 </p:presentation>
+</file>
+
+<file path=ppt/notesMasters/notesMaster1.xml><?xml version="1.0" encoding="utf-8"?>
+<p:notesMaster xmlns:a="http://schemas.openxmlformats.org/drawingml/2006/main" xmlns:p="http://schemas.openxmlformats.org/presentationml/2006/main" xmlns:r="http://schemas.openxmlformats.org/officeDocument/2006/relationships">
+  <p:cSld>
+    <p:bg>
+      <p:bgRef idx="1001">
+        <a:schemeClr val="bg1"/>
+      </p:bgRef>
+    </p:bg>
+    <p:spTree>
+      <p:nvGrpSpPr>
+        <p:cNvPr id="1" name=""/>
+        <p:cNvGrpSpPr/>
+        <p:nvPr/>
+      </p:nvGrpSpPr>
+      <p:grpSpPr>
+        <a:xfrm>
+          <a:off x="0" y="0"/>
+          <a:ext cx="0" cy="0"/>
+          <a:chOff x="0" y="0"/>
+          <a:chExt cx="0" cy="0"/>
+        </a:xfrm>
+      </p:grpSpPr>
+      <p:sp>
+        <p:nvSpPr>
+          <p:cNvPr id="2" name="Header Placeholder 1"/>
+          <p:cNvSpPr>
+            <a:spLocks noGrp="1"/>
+          </p:cNvSpPr>
+          <p:nvPr>
+            <p:ph type="hdr" sz="quarter"/>
+          </p:nvPr>
+        </p:nvSpPr>
+        <p:spPr>
+          <a:xfrm>
+            <a:off x="0" y="0"/>
+            <a:ext cx="2971800" cy="457200"/>
+          </a:xfrm>
+          <a:prstGeom prst="rect">
+            <a:avLst/>
+          </a:prstGeom>
+        </p:spPr>
+        <p:txBody>
+          <a:bodyPr vert="horz" lIns="91440" tIns="45720" rIns="91440" bIns="45720" rtlCol="0"/>
+          <a:lstStyle>
+            <a:lvl1pPr algn="l">
+              <a:defRPr sz="1200"/>
+            </a:lvl1pPr>
+          </a:lstStyle>
+          <a:p>
+            <a:endParaRPr lang="en-US"/>
+          </a:p>
+        </p:txBody>
+      </p:sp>
+      <p:sp>
+        <p:nvSpPr>
+          <p:cNvPr id="3" name="Date Placeholder 2"/>
+          <p:cNvSpPr>
+            <a:spLocks noGrp="1"/>
+          </p:cNvSpPr>
+          <p:nvPr>
+            <p:ph type="dt" idx="1"/>
+          </p:nvPr>
+        </p:nvSpPr>
+        <p:spPr>
+          <a:xfrm>
+            <a:off x="3884613" y="0"/>
+            <a:ext cx="2971800" cy="457200"/>
+          </a:xfrm>
+          <a:prstGeom prst="rect">
+            <a:avLst/>
+          </a:prstGeom>
+        </p:spPr>
+        <p:txBody>
+          <a:bodyPr vert="horz" lIns="91440" tIns="45720" rIns="91440" bIns="45720" rtlCol="0"/>
+          <a:lstStyle>
+            <a:lvl1pPr algn="r">
+              <a:defRPr sz="1200"/>
+            </a:lvl1pPr>
+          </a:lstStyle>
+          <a:p>
+            <a:fld id="{0F89C1C7-3DCD-1040-A9CF-14679D8B5DDD}" type="datetimeFigureOut">
+              <a:rPr lang="en-US" smtClean="0"/>
+              <a:t>10/17/16</a:t>
+            </a:fld>
+            <a:endParaRPr lang="en-US"/>
+          </a:p>
+        </p:txBody>
+      </p:sp>
+      <p:sp>
+        <p:nvSpPr>
+          <p:cNvPr id="4" name="Slide Image Placeholder 3"/>
+          <p:cNvSpPr>
+            <a:spLocks noGrp="1" noRot="1" noChangeAspect="1"/>
+          </p:cNvSpPr>
+          <p:nvPr>
+            <p:ph type="sldImg" idx="2"/>
+          </p:nvPr>
+        </p:nvSpPr>
+        <p:spPr>
+          <a:xfrm>
+            <a:off x="1143000" y="685800"/>
+            <a:ext cx="4572000" cy="3429000"/>
+          </a:xfrm>
+          <a:prstGeom prst="rect">
+            <a:avLst/>
+          </a:prstGeom>
+          <a:noFill/>
+          <a:ln w="12700">
+            <a:solidFill>
+              <a:prstClr val="black"/>
+            </a:solidFill>
+          </a:ln>
+        </p:spPr>
+        <p:txBody>
+          <a:bodyPr vert="horz" lIns="91440" tIns="45720" rIns="91440" bIns="45720" rtlCol="0" anchor="ctr"/>
+          <a:lstStyle/>
+          <a:p>
+            <a:endParaRPr lang="en-US"/>
+          </a:p>
+        </p:txBody>
+      </p:sp>
+      <p:sp>
+        <p:nvSpPr>
+          <p:cNvPr id="5" name="Notes Placeholder 4"/>
+          <p:cNvSpPr>
+            <a:spLocks noGrp="1"/>
+          </p:cNvSpPr>
+          <p:nvPr>
+            <p:ph type="body" sz="quarter" idx="3"/>
+          </p:nvPr>
+        </p:nvSpPr>
+        <p:spPr>
+          <a:xfrm>
+            <a:off x="685800" y="4343400"/>
+            <a:ext cx="5486400" cy="4114800"/>
+          </a:xfrm>
+          <a:prstGeom prst="rect">
+            <a:avLst/>
+          </a:prstGeom>
+        </p:spPr>
+        <p:txBody>
+          <a:bodyPr vert="horz" lIns="91440" tIns="45720" rIns="91440" bIns="45720" rtlCol="0"/>
+          <a:lstStyle/>
+          <a:p>
+            <a:pPr lvl="0"/>
+            <a:r>
+              <a:rPr lang="en-US" smtClean="0"/>
+              <a:t>Click to edit Master text styles</a:t>
+            </a:r>
+          </a:p>
+          <a:p>
+            <a:pPr lvl="1"/>
+            <a:r>
+              <a:rPr lang="en-US" smtClean="0"/>
+              <a:t>Second level</a:t>
+            </a:r>
+          </a:p>
+          <a:p>
+            <a:pPr lvl="2"/>
+            <a:r>
+              <a:rPr lang="en-US" smtClean="0"/>
+              <a:t>Third level</a:t>
+            </a:r>
+          </a:p>
+          <a:p>
+            <a:pPr lvl="3"/>
+            <a:r>
+              <a:rPr lang="en-US" smtClean="0"/>
+              <a:t>Fourth level</a:t>
+            </a:r>
+          </a:p>
+          <a:p>
+            <a:pPr lvl="4"/>
+            <a:r>
+              <a:rPr lang="en-US" smtClean="0"/>
+              <a:t>Fifth level</a:t>
+            </a:r>
+            <a:endParaRPr lang="en-US"/>
+          </a:p>
+        </p:txBody>
+      </p:sp>
+      <p:sp>
+        <p:nvSpPr>
+          <p:cNvPr id="6" name="Footer Placeholder 5"/>
+          <p:cNvSpPr>
+            <a:spLocks noGrp="1"/>
+          </p:cNvSpPr>
+          <p:nvPr>
+            <p:ph type="ftr" sz="quarter" idx="4"/>
+          </p:nvPr>
+        </p:nvSpPr>
+        <p:spPr>
+          <a:xfrm>
+            <a:off x="0" y="8685213"/>
+            <a:ext cx="2971800" cy="457200"/>
+          </a:xfrm>
+          <a:prstGeom prst="rect">
+            <a:avLst/>
+          </a:prstGeom>
+        </p:spPr>
+        <p:txBody>
+          <a:bodyPr vert="horz" lIns="91440" tIns="45720" rIns="91440" bIns="45720" rtlCol="0" anchor="b"/>
+          <a:lstStyle>
+            <a:lvl1pPr algn="l">
+              <a:defRPr sz="1200"/>
+            </a:lvl1pPr>
+          </a:lstStyle>
+          <a:p>
+            <a:endParaRPr lang="en-US"/>
+          </a:p>
+        </p:txBody>
+      </p:sp>
+      <p:sp>
+        <p:nvSpPr>
+          <p:cNvPr id="7" name="Slide Number Placeholder 6"/>
+          <p:cNvSpPr>
+            <a:spLocks noGrp="1"/>
+          </p:cNvSpPr>
+          <p:nvPr>
+            <p:ph type="sldNum" sz="quarter" idx="5"/>
+          </p:nvPr>
+        </p:nvSpPr>
+        <p:spPr>
+          <a:xfrm>
+            <a:off x="3884613" y="8685213"/>
+            <a:ext cx="2971800" cy="457200"/>
+          </a:xfrm>
+          <a:prstGeom prst="rect">
+            <a:avLst/>
+          </a:prstGeom>
+        </p:spPr>
+        <p:txBody>
+          <a:bodyPr vert="horz" lIns="91440" tIns="45720" rIns="91440" bIns="45720" rtlCol="0" anchor="b"/>
+          <a:lstStyle>
+            <a:lvl1pPr algn="r">
+              <a:defRPr sz="1200"/>
+            </a:lvl1pPr>
+          </a:lstStyle>
+          <a:p>
+            <a:fld id="{BB5E49A5-4136-284D-997B-48E1D791AD67}" type="slidenum">
+              <a:rPr lang="en-US" smtClean="0"/>
+              <a:t>‹#›</a:t>
+            </a:fld>
+            <a:endParaRPr lang="en-US"/>
+          </a:p>
+        </p:txBody>
+      </p:sp>
+    </p:spTree>
+    <p:extLst>
+      <p:ext uri="{BB962C8B-B14F-4D97-AF65-F5344CB8AC3E}">
+        <p14:creationId xmlns:p14="http://schemas.microsoft.com/office/powerpoint/2010/main" val="2623252185"/>
+      </p:ext>
+    </p:extLst>
+  </p:cSld>
+  <p:clrMap bg1="lt1" tx1="dk1" bg2="lt2" tx2="dk2" accent1="accent1" accent2="accent2" accent3="accent3" accent4="accent4" accent5="accent5" accent6="accent6" hlink="hlink" folHlink="folHlink"/>
+  <p:notesStyle>
+    <a:lvl1pPr marL="0" algn="l" defTabSz="457200" rtl="0" eaLnBrk="1" latinLnBrk="0" hangingPunct="1">
+      <a:defRPr sz="1200" kern="1200">
+        <a:solidFill>
+          <a:schemeClr val="tx1"/>
+        </a:solidFill>
+        <a:latin typeface="+mn-lt"/>
+        <a:ea typeface="+mn-ea"/>
+        <a:cs typeface="+mn-cs"/>
+      </a:defRPr>
+    </a:lvl1pPr>
+    <a:lvl2pPr marL="457200" algn="l" defTabSz="457200" rtl="0" eaLnBrk="1" latinLnBrk="0" hangingPunct="1">
+      <a:defRPr sz="1200" kern="1200">
+        <a:solidFill>
+          <a:schemeClr val="tx1"/>
+        </a:solidFill>
+        <a:latin typeface="+mn-lt"/>
+        <a:ea typeface="+mn-ea"/>
+        <a:cs typeface="+mn-cs"/>
+      </a:defRPr>
+    </a:lvl2pPr>
+    <a:lvl3pPr marL="914400" algn="l" defTabSz="457200" rtl="0" eaLnBrk="1" latinLnBrk="0" hangingPunct="1">
+      <a:defRPr sz="1200" kern="1200">
+        <a:solidFill>
+          <a:schemeClr val="tx1"/>
+        </a:solidFill>
+        <a:latin typeface="+mn-lt"/>
+        <a:ea typeface="+mn-ea"/>
+        <a:cs typeface="+mn-cs"/>
+      </a:defRPr>
+    </a:lvl3pPr>
+    <a:lvl4pPr marL="1371600" algn="l" defTabSz="457200" rtl="0" eaLnBrk="1" latinLnBrk="0" hangingPunct="1">
+      <a:defRPr sz="1200" kern="1200">
+        <a:solidFill>
+          <a:schemeClr val="tx1"/>
+        </a:solidFill>
+        <a:latin typeface="+mn-lt"/>
+        <a:ea typeface="+mn-ea"/>
+        <a:cs typeface="+mn-cs"/>
+      </a:defRPr>
+    </a:lvl4pPr>
+    <a:lvl5pPr marL="1828800" algn="l" defTabSz="457200" rtl="0" eaLnBrk="1" latinLnBrk="0" hangingPunct="1">
+      <a:defRPr sz="1200" kern="1200">
+        <a:solidFill>
+          <a:schemeClr val="tx1"/>
+        </a:solidFill>
+        <a:latin typeface="+mn-lt"/>
+        <a:ea typeface="+mn-ea"/>
+        <a:cs typeface="+mn-cs"/>
+      </a:defRPr>
+    </a:lvl5pPr>
+    <a:lvl6pPr marL="2286000" algn="l" defTabSz="457200" rtl="0" eaLnBrk="1" latinLnBrk="0" hangingPunct="1">
+      <a:defRPr sz="1200" kern="1200">
+        <a:solidFill>
+          <a:schemeClr val="tx1"/>
+        </a:solidFill>
+        <a:latin typeface="+mn-lt"/>
+        <a:ea typeface="+mn-ea"/>
+        <a:cs typeface="+mn-cs"/>
+      </a:defRPr>
+    </a:lvl6pPr>
+    <a:lvl7pPr marL="2743200" algn="l" defTabSz="457200" rtl="0" eaLnBrk="1" latinLnBrk="0" hangingPunct="1">
+      <a:defRPr sz="1200" kern="1200">
+        <a:solidFill>
+          <a:schemeClr val="tx1"/>
+        </a:solidFill>
+        <a:latin typeface="+mn-lt"/>
+        <a:ea typeface="+mn-ea"/>
+        <a:cs typeface="+mn-cs"/>
+      </a:defRPr>
+    </a:lvl7pPr>
+    <a:lvl8pPr marL="3200400" algn="l" defTabSz="457200" rtl="0" eaLnBrk="1" latinLnBrk="0" hangingPunct="1">
+      <a:defRPr sz="1200" kern="1200">
+        <a:solidFill>
+          <a:schemeClr val="tx1"/>
+        </a:solidFill>
+        <a:latin typeface="+mn-lt"/>
+        <a:ea typeface="+mn-ea"/>
+        <a:cs typeface="+mn-cs"/>
+      </a:defRPr>
+    </a:lvl8pPr>
+    <a:lvl9pPr marL="3657600" algn="l" defTabSz="457200" rtl="0" eaLnBrk="1" latinLnBrk="0" hangingPunct="1">
+      <a:defRPr sz="1200" kern="1200">
+        <a:solidFill>
+          <a:schemeClr val="tx1"/>
+        </a:solidFill>
+        <a:latin typeface="+mn-lt"/>
+        <a:ea typeface="+mn-ea"/>
+        <a:cs typeface="+mn-cs"/>
+      </a:defRPr>
+    </a:lvl9pPr>
+  </p:notesStyle>
+</p:notesMaster>
+</file>
+
+<file path=ppt/notesSlides/notesSlide1.xml><?xml version="1.0" encoding="utf-8"?>
+<p:notes xmlns:a="http://schemas.openxmlformats.org/drawingml/2006/main" xmlns:p="http://schemas.openxmlformats.org/presentationml/2006/main" xmlns:r="http://schemas.openxmlformats.org/officeDocument/2006/relationships">
+  <p:cSld>
+    <p:spTree>
+      <p:nvGrpSpPr>
+        <p:cNvPr id="1" name=""/>
+        <p:cNvGrpSpPr/>
+        <p:nvPr/>
+      </p:nvGrpSpPr>
+      <p:grpSpPr>
+        <a:xfrm>
+          <a:off x="0" y="0"/>
+          <a:ext cx="0" cy="0"/>
+          <a:chOff x="0" y="0"/>
+          <a:chExt cx="0" cy="0"/>
+        </a:xfrm>
+      </p:grpSpPr>
+      <p:sp>
+        <p:nvSpPr>
+          <p:cNvPr id="2" name="Slide Image Placeholder 1"/>
+          <p:cNvSpPr>
+            <a:spLocks noGrp="1"/>
+          </p:cNvSpPr>
+          <p:nvPr>
+            <p:ph type="sldImg" idx="2"/>
+          </p:nvPr>
+        </p:nvSpPr>
+        <p:spPr/>
+      </p:sp>
+      <p:sp>
+        <p:nvSpPr>
+          <p:cNvPr id="3" name="Notes Placeholder 2"/>
+          <p:cNvSpPr>
+            <a:spLocks noGrp="1"/>
+          </p:cNvSpPr>
+          <p:nvPr>
+            <p:ph type="body" idx="3" sz="quarter"/>
+          </p:nvPr>
+        </p:nvSpPr>
+        <p:spPr/>
+        <p:txBody>
+          <a:bodyPr/>
+          <a:lstStyle/>
+          <a:p>
+            <a:r>
+              <a:t>Agenda-Überblick. Timing und Pausen siehe Ablaufplan im Trainerhandbuch (Sektion 3).</a:t>
+            </a:r>
+          </a:p>
+        </p:txBody>
+      </p:sp>
+      <p:sp>
+        <p:nvSpPr>
+          <p:cNvPr id="4" name="Slide Number Placeholder 3"/>
+          <p:cNvSpPr>
+            <a:spLocks noGrp="1"/>
+          </p:cNvSpPr>
+          <p:nvPr>
+            <p:ph type="sldNum" idx="5" sz="quarter"/>
+          </p:nvPr>
+        </p:nvSpPr>
+        <p:spPr/>
+      </p:sp>
+    </p:spTree>
+  </p:cSld>
+  <p:clrMapOvr>
+    <a:masterClrMapping/>
+  </p:clrMapOvr>
+</p:notes>
+</file>
+
+<file path=ppt/notesSlides/notesSlide2.xml><?xml version="1.0" encoding="utf-8"?>
+<p:notes xmlns:a="http://schemas.openxmlformats.org/drawingml/2006/main" xmlns:p="http://schemas.openxmlformats.org/presentationml/2006/main" xmlns:r="http://schemas.openxmlformats.org/officeDocument/2006/relationships">
+  <p:cSld>
+    <p:spTree>
+      <p:nvGrpSpPr>
+        <p:cNvPr id="1" name=""/>
+        <p:cNvGrpSpPr/>
+        <p:nvPr/>
+      </p:nvGrpSpPr>
+      <p:grpSpPr>
+        <a:xfrm>
+          <a:off x="0" y="0"/>
+          <a:ext cx="0" cy="0"/>
+          <a:chOff x="0" y="0"/>
+          <a:chExt cx="0" cy="0"/>
+        </a:xfrm>
+      </p:grpSpPr>
+      <p:sp>
+        <p:nvSpPr>
+          <p:cNvPr id="2" name="Slide Image Placeholder 1"/>
+          <p:cNvSpPr>
+            <a:spLocks noGrp="1"/>
+          </p:cNvSpPr>
+          <p:nvPr>
+            <p:ph type="sldImg" idx="2"/>
+          </p:nvPr>
+        </p:nvSpPr>
+        <p:spPr/>
+      </p:sp>
+      <p:sp>
+        <p:nvSpPr>
+          <p:cNvPr id="3" name="Notes Placeholder 2"/>
+          <p:cNvSpPr>
+            <a:spLocks noGrp="1"/>
+          </p:cNvSpPr>
+          <p:nvPr>
+            <p:ph type="body" idx="3" sz="quarter"/>
+          </p:nvPr>
+        </p:nvSpPr>
+        <p:spPr/>
+        <p:txBody>
+          <a:bodyPr/>
+          <a:lstStyle/>
+          <a:p>
+            <a:r>
+              <a:t>Siehe Trainerhandbuch (Sektion 3) für Moderationshinweise, Timing und erwartete Teilnehmerreaktionen.</a:t>
+            </a:r>
+          </a:p>
+        </p:txBody>
+      </p:sp>
+      <p:sp>
+        <p:nvSpPr>
+          <p:cNvPr id="4" name="Slide Number Placeholder 3"/>
+          <p:cNvSpPr>
+            <a:spLocks noGrp="1"/>
+          </p:cNvSpPr>
+          <p:nvPr>
+            <p:ph type="sldNum" idx="5" sz="quarter"/>
+          </p:nvPr>
+        </p:nvSpPr>
+        <p:spPr/>
+      </p:sp>
+    </p:spTree>
+  </p:cSld>
+  <p:clrMapOvr>
+    <a:masterClrMapping/>
+  </p:clrMapOvr>
+</p:notes>
+</file>
+
+<file path=ppt/notesSlides/notesSlide3.xml><?xml version="1.0" encoding="utf-8"?>
+<p:notes xmlns:a="http://schemas.openxmlformats.org/drawingml/2006/main" xmlns:p="http://schemas.openxmlformats.org/presentationml/2006/main" xmlns:r="http://schemas.openxmlformats.org/officeDocument/2006/relationships">
+  <p:cSld>
+    <p:spTree>
+      <p:nvGrpSpPr>
+        <p:cNvPr id="1" name=""/>
+        <p:cNvGrpSpPr/>
+        <p:nvPr/>
+      </p:nvGrpSpPr>
+      <p:grpSpPr>
+        <a:xfrm>
+          <a:off x="0" y="0"/>
+          <a:ext cx="0" cy="0"/>
+          <a:chOff x="0" y="0"/>
+          <a:chExt cx="0" cy="0"/>
+        </a:xfrm>
+      </p:grpSpPr>
+      <p:sp>
+        <p:nvSpPr>
+          <p:cNvPr id="2" name="Slide Image Placeholder 1"/>
+          <p:cNvSpPr>
+            <a:spLocks noGrp="1"/>
+          </p:cNvSpPr>
+          <p:nvPr>
+            <p:ph type="sldImg" idx="2"/>
+          </p:nvPr>
+        </p:nvSpPr>
+        <p:spPr/>
+      </p:sp>
+      <p:sp>
+        <p:nvSpPr>
+          <p:cNvPr id="3" name="Notes Placeholder 2"/>
+          <p:cNvSpPr>
+            <a:spLocks noGrp="1"/>
+          </p:cNvSpPr>
+          <p:nvPr>
+            <p:ph type="body" idx="3" sz="quarter"/>
+          </p:nvPr>
+        </p:nvSpPr>
+        <p:spPr/>
+        <p:txBody>
+          <a:bodyPr/>
+          <a:lstStyle/>
+          <a:p>
+            <a:r>
+              <a:t>Siehe Trainerhandbuch (Sektion 3) für Moderationshinweise, Timing und erwartete Teilnehmerreaktionen.</a:t>
+            </a:r>
+          </a:p>
+        </p:txBody>
+      </p:sp>
+      <p:sp>
+        <p:nvSpPr>
+          <p:cNvPr id="4" name="Slide Number Placeholder 3"/>
+          <p:cNvSpPr>
+            <a:spLocks noGrp="1"/>
+          </p:cNvSpPr>
+          <p:nvPr>
+            <p:ph type="sldNum" idx="5" sz="quarter"/>
+          </p:nvPr>
+        </p:nvSpPr>
+        <p:spPr/>
+      </p:sp>
+    </p:spTree>
+  </p:cSld>
+  <p:clrMapOvr>
+    <a:masterClrMapping/>
+  </p:clrMapOvr>
+</p:notes>
+</file>
+
+<file path=ppt/notesSlides/notesSlide4.xml><?xml version="1.0" encoding="utf-8"?>
+<p:notes xmlns:a="http://schemas.openxmlformats.org/drawingml/2006/main" xmlns:p="http://schemas.openxmlformats.org/presentationml/2006/main" xmlns:r="http://schemas.openxmlformats.org/officeDocument/2006/relationships">
+  <p:cSld>
+    <p:spTree>
+      <p:nvGrpSpPr>
+        <p:cNvPr id="1" name=""/>
+        <p:cNvGrpSpPr/>
+        <p:nvPr/>
+      </p:nvGrpSpPr>
+      <p:grpSpPr>
+        <a:xfrm>
+          <a:off x="0" y="0"/>
+          <a:ext cx="0" cy="0"/>
+          <a:chOff x="0" y="0"/>
+          <a:chExt cx="0" cy="0"/>
+        </a:xfrm>
+      </p:grpSpPr>
+      <p:sp>
+        <p:nvSpPr>
+          <p:cNvPr id="2" name="Slide Image Placeholder 1"/>
+          <p:cNvSpPr>
+            <a:spLocks noGrp="1"/>
+          </p:cNvSpPr>
+          <p:nvPr>
+            <p:ph type="sldImg" idx="2"/>
+          </p:nvPr>
+        </p:nvSpPr>
+        <p:spPr/>
+      </p:sp>
+      <p:sp>
+        <p:nvSpPr>
+          <p:cNvPr id="3" name="Notes Placeholder 2"/>
+          <p:cNvSpPr>
+            <a:spLocks noGrp="1"/>
+          </p:cNvSpPr>
+          <p:nvPr>
+            <p:ph type="body" idx="3" sz="quarter"/>
+          </p:nvPr>
+        </p:nvSpPr>
+        <p:spPr/>
+        <p:txBody>
+          <a:bodyPr/>
+          <a:lstStyle/>
+          <a:p>
+            <a:r>
+              <a:t>Moderation (HB Sec 3): Trainer-Regieanweisung: Nach 20 min Gruppenarbeit stoppt der Trainer die Diskussion (Handzeichen + „Freeze!") und fragt jede Gruppe: „Welche Option würden Sie Stefan Habermaier jetzt empfehlen – und welchen einen Grund nennen Sie zuerst?" Keine Diskussion in dieser Runde, nur Statements. Erst danach: Debriefing im Plenum. Zweck der Freeze-Technik: Erzwingt Entscheidungsbereitschaft unter Unsicherheit – Kernkompetenz Dreyfus-Stufe 4. TN, die noch keine Meinung haben, werden sichtbar; das erzeugt produktiven Lerndruck ohne Bloßstellung.</a:t>
+            </a:r>
+          </a:p>
+        </p:txBody>
+      </p:sp>
+      <p:sp>
+        <p:nvSpPr>
+          <p:cNvPr id="4" name="Slide Number Placeholder 3"/>
+          <p:cNvSpPr>
+            <a:spLocks noGrp="1"/>
+          </p:cNvSpPr>
+          <p:nvPr>
+            <p:ph type="sldNum" idx="5" sz="quarter"/>
+          </p:nvPr>
+        </p:nvSpPr>
+        <p:spPr/>
+      </p:sp>
+    </p:spTree>
+  </p:cSld>
+  <p:clrMapOvr>
+    <a:masterClrMapping/>
+  </p:clrMapOvr>
+</p:notes>
+</file>
+
+<file path=ppt/notesSlides/notesSlide5.xml><?xml version="1.0" encoding="utf-8"?>
+<p:notes xmlns:a="http://schemas.openxmlformats.org/drawingml/2006/main" xmlns:p="http://schemas.openxmlformats.org/presentationml/2006/main" xmlns:r="http://schemas.openxmlformats.org/officeDocument/2006/relationships">
+  <p:cSld>
+    <p:spTree>
+      <p:nvGrpSpPr>
+        <p:cNvPr id="1" name=""/>
+        <p:cNvGrpSpPr/>
+        <p:nvPr/>
+      </p:nvGrpSpPr>
+      <p:grpSpPr>
+        <a:xfrm>
+          <a:off x="0" y="0"/>
+          <a:ext cx="0" cy="0"/>
+          <a:chOff x="0" y="0"/>
+          <a:chExt cx="0" cy="0"/>
+        </a:xfrm>
+      </p:grpSpPr>
+      <p:sp>
+        <p:nvSpPr>
+          <p:cNvPr id="2" name="Slide Image Placeholder 1"/>
+          <p:cNvSpPr>
+            <a:spLocks noGrp="1"/>
+          </p:cNvSpPr>
+          <p:nvPr>
+            <p:ph type="sldImg" idx="2"/>
+          </p:nvPr>
+        </p:nvSpPr>
+        <p:spPr/>
+      </p:sp>
+      <p:sp>
+        <p:nvSpPr>
+          <p:cNvPr id="3" name="Notes Placeholder 2"/>
+          <p:cNvSpPr>
+            <a:spLocks noGrp="1"/>
+          </p:cNvSpPr>
+          <p:nvPr>
+            <p:ph type="body" idx="3" sz="quarter"/>
+          </p:nvPr>
+        </p:nvSpPr>
+        <p:spPr/>
+        <p:txBody>
+          <a:bodyPr/>
+          <a:lstStyle/>
+          <a:p>
+            <a:r>
+              <a:t>AB-1 Musterlösung (Trainer-Version)</a:t>
+            </a:r>
+          </a:p>
+          <a:p>
+            <a:r>
+              <a:t>Schritt 1 – Musterlösung:</a:t>
+            </a:r>
+          </a:p>
+          <a:p>
+            <a:r>
+              <a:t>Schritt 2 – Musterlösung:</a:t>
+            </a:r>
+          </a:p>
+          <a:p>
+            <a:r>
+              <a:t>Trainer-Hinweis: Empfehlung ist situationsabhängig. Szenario 2 ist betriebswirtschaftlich robust, aber der Kontrollverlust (25,1 % = Sperrminorität) ist ein Soft-Faktor, den viele Mittelständler emotional ablehnen. Gute TN erkennen, dass hier die Gesprächsführung entscheidend ist – nicht nur die Zahlen.</a:t>
+            </a:r>
+          </a:p>
+        </p:txBody>
+      </p:sp>
+      <p:sp>
+        <p:nvSpPr>
+          <p:cNvPr id="4" name="Slide Number Placeholder 3"/>
+          <p:cNvSpPr>
+            <a:spLocks noGrp="1"/>
+          </p:cNvSpPr>
+          <p:nvPr>
+            <p:ph type="sldNum" idx="5" sz="quarter"/>
+          </p:nvPr>
+        </p:nvSpPr>
+        <p:spPr/>
+      </p:sp>
+    </p:spTree>
+  </p:cSld>
+  <p:clrMapOvr>
+    <a:masterClrMapping/>
+  </p:clrMapOvr>
+</p:notes>
+</file>
+
+<file path=ppt/notesSlides/notesSlide6.xml><?xml version="1.0" encoding="utf-8"?>
+<p:notes xmlns:a="http://schemas.openxmlformats.org/drawingml/2006/main" xmlns:p="http://schemas.openxmlformats.org/presentationml/2006/main" xmlns:r="http://schemas.openxmlformats.org/officeDocument/2006/relationships">
+  <p:cSld>
+    <p:spTree>
+      <p:nvGrpSpPr>
+        <p:cNvPr id="1" name=""/>
+        <p:cNvGrpSpPr/>
+        <p:nvPr/>
+      </p:nvGrpSpPr>
+      <p:grpSpPr>
+        <a:xfrm>
+          <a:off x="0" y="0"/>
+          <a:ext cx="0" cy="0"/>
+          <a:chOff x="0" y="0"/>
+          <a:chExt cx="0" cy="0"/>
+        </a:xfrm>
+      </p:grpSpPr>
+      <p:sp>
+        <p:nvSpPr>
+          <p:cNvPr id="2" name="Slide Image Placeholder 1"/>
+          <p:cNvSpPr>
+            <a:spLocks noGrp="1"/>
+          </p:cNvSpPr>
+          <p:nvPr>
+            <p:ph type="sldImg" idx="2"/>
+          </p:nvPr>
+        </p:nvSpPr>
+        <p:spPr/>
+      </p:sp>
+      <p:sp>
+        <p:nvSpPr>
+          <p:cNvPr id="3" name="Notes Placeholder 2"/>
+          <p:cNvSpPr>
+            <a:spLocks noGrp="1"/>
+          </p:cNvSpPr>
+          <p:nvPr>
+            <p:ph type="body" idx="3" sz="quarter"/>
+          </p:nvPr>
+        </p:nvSpPr>
+        <p:spPr/>
+        <p:txBody>
+          <a:bodyPr/>
+          <a:lstStyle/>
+          <a:p>
+            <a:r>
+              <a:t>Siehe Trainerhandbuch (Sektion 3) für Moderationshinweise, Timing und erwartete Teilnehmerreaktionen.</a:t>
+            </a:r>
+          </a:p>
+        </p:txBody>
+      </p:sp>
+      <p:sp>
+        <p:nvSpPr>
+          <p:cNvPr id="4" name="Slide Number Placeholder 3"/>
+          <p:cNvSpPr>
+            <a:spLocks noGrp="1"/>
+          </p:cNvSpPr>
+          <p:nvPr>
+            <p:ph type="sldNum" idx="5" sz="quarter"/>
+          </p:nvPr>
+        </p:nvSpPr>
+        <p:spPr/>
+      </p:sp>
+    </p:spTree>
+  </p:cSld>
+  <p:clrMapOvr>
+    <a:masterClrMapping/>
+  </p:clrMapOvr>
+</p:notes>
 </file>
 
 <file path=ppt/slideLayouts/slideLayout1.xml><?xml version="1.0" encoding="utf-8"?>
@@ -3661,6 +4447,443 @@
 </p:sld>
 </file>
 
+<file path=ppt/slides/slide10.xml><?xml version="1.0" encoding="utf-8"?>
+<p:sld xmlns:a="http://schemas.openxmlformats.org/drawingml/2006/main" xmlns:p="http://schemas.openxmlformats.org/presentationml/2006/main" xmlns:r="http://schemas.openxmlformats.org/officeDocument/2006/relationships">
+  <p:cSld>
+    <p:spTree>
+      <p:nvGrpSpPr>
+        <p:cNvPr id="1" name=""/>
+        <p:cNvGrpSpPr/>
+        <p:nvPr/>
+      </p:nvGrpSpPr>
+      <p:grpSpPr/>
+      <p:sp>
+        <p:nvSpPr>
+          <p:cNvPr id="2" name="Rectangle 1"/>
+          <p:cNvSpPr/>
+          <p:nvPr/>
+        </p:nvSpPr>
+        <p:spPr>
+          <a:xfrm>
+            <a:off x="0" y="0"/>
+            <a:ext cx="12188952" cy="6858000"/>
+          </a:xfrm>
+          <a:prstGeom prst="rect">
+            <a:avLst/>
+          </a:prstGeom>
+          <a:solidFill>
+            <a:srgbClr val="EDEDF3"/>
+          </a:solidFill>
+          <a:ln>
+            <a:noFill/>
+          </a:ln>
+        </p:spPr>
+        <p:style>
+          <a:lnRef idx="1">
+            <a:schemeClr val="accent1"/>
+          </a:lnRef>
+          <a:fillRef idx="3">
+            <a:schemeClr val="accent1"/>
+          </a:fillRef>
+          <a:effectRef idx="2">
+            <a:schemeClr val="accent1"/>
+          </a:effectRef>
+          <a:fontRef idx="minor">
+            <a:schemeClr val="lt1"/>
+          </a:fontRef>
+        </p:style>
+        <p:txBody>
+          <a:bodyPr rtlCol="0" anchor="ctr"/>
+          <a:lstStyle/>
+          <a:p>
+            <a:pPr algn="ctr"/>
+          </a:p>
+        </p:txBody>
+      </p:sp>
+      <p:sp>
+        <p:nvSpPr>
+          <p:cNvPr id="3" name="Rectangle 2"/>
+          <p:cNvSpPr/>
+          <p:nvPr/>
+        </p:nvSpPr>
+        <p:spPr>
+          <a:xfrm>
+            <a:off x="0" y="0"/>
+            <a:ext cx="12188952" cy="50292"/>
+          </a:xfrm>
+          <a:prstGeom prst="rect">
+            <a:avLst/>
+          </a:prstGeom>
+          <a:solidFill>
+            <a:srgbClr val="1F2C56"/>
+          </a:solidFill>
+          <a:ln>
+            <a:noFill/>
+          </a:ln>
+        </p:spPr>
+        <p:style>
+          <a:lnRef idx="1">
+            <a:schemeClr val="accent1"/>
+          </a:lnRef>
+          <a:fillRef idx="3">
+            <a:schemeClr val="accent1"/>
+          </a:fillRef>
+          <a:effectRef idx="2">
+            <a:schemeClr val="accent1"/>
+          </a:effectRef>
+          <a:fontRef idx="minor">
+            <a:schemeClr val="lt1"/>
+          </a:fontRef>
+        </p:style>
+        <p:txBody>
+          <a:bodyPr rtlCol="0" anchor="ctr"/>
+          <a:lstStyle/>
+          <a:p>
+            <a:pPr algn="ctr"/>
+          </a:p>
+        </p:txBody>
+      </p:sp>
+      <p:sp>
+        <p:nvSpPr>
+          <p:cNvPr id="4" name="TextBox 3"/>
+          <p:cNvSpPr txBox="1"/>
+          <p:nvPr/>
+        </p:nvSpPr>
+        <p:spPr>
+          <a:xfrm>
+            <a:off x="685800" y="109728"/>
+            <a:ext cx="10817352" cy="228600"/>
+          </a:xfrm>
+          <a:prstGeom prst="rect">
+            <a:avLst/>
+          </a:prstGeom>
+          <a:noFill/>
+        </p:spPr>
+        <p:txBody>
+          <a:bodyPr wrap="none">
+            <a:spAutoFit/>
+          </a:bodyPr>
+          <a:lstStyle/>
+          <a:p>
+            <a:pPr algn="l"/>
+            <a:r>
+              <a:rPr sz="750">
+                <a:solidFill>
+                  <a:srgbClr val="78808C"/>
+                </a:solidFill>
+                <a:latin typeface="JetBrains Mono"/>
+              </a:rPr>
+              <a:t>M03  ·  INHALT</a:t>
+            </a:r>
+          </a:p>
+        </p:txBody>
+      </p:sp>
+      <p:sp>
+        <p:nvSpPr>
+          <p:cNvPr id="5" name="Rectangle 4"/>
+          <p:cNvSpPr/>
+          <p:nvPr/>
+        </p:nvSpPr>
+        <p:spPr>
+          <a:xfrm>
+            <a:off x="0" y="1234440"/>
+            <a:ext cx="12188952" cy="12700"/>
+          </a:xfrm>
+          <a:prstGeom prst="rect">
+            <a:avLst/>
+          </a:prstGeom>
+          <a:solidFill>
+            <a:srgbClr val="D8DFE4"/>
+          </a:solidFill>
+          <a:ln>
+            <a:noFill/>
+          </a:ln>
+        </p:spPr>
+        <p:style>
+          <a:lnRef idx="1">
+            <a:schemeClr val="accent1"/>
+          </a:lnRef>
+          <a:fillRef idx="3">
+            <a:schemeClr val="accent1"/>
+          </a:fillRef>
+          <a:effectRef idx="2">
+            <a:schemeClr val="accent1"/>
+          </a:effectRef>
+          <a:fontRef idx="minor">
+            <a:schemeClr val="lt1"/>
+          </a:fontRef>
+        </p:style>
+        <p:txBody>
+          <a:bodyPr rtlCol="0" anchor="ctr"/>
+          <a:lstStyle/>
+          <a:p>
+            <a:pPr algn="ctr"/>
+          </a:p>
+        </p:txBody>
+      </p:sp>
+      <p:sp>
+        <p:nvSpPr>
+          <p:cNvPr id="6" name="Rectangle 5"/>
+          <p:cNvSpPr/>
+          <p:nvPr/>
+        </p:nvSpPr>
+        <p:spPr>
+          <a:xfrm>
+            <a:off x="685800" y="502920"/>
+            <a:ext cx="36576" cy="658368"/>
+          </a:xfrm>
+          <a:prstGeom prst="rect">
+            <a:avLst/>
+          </a:prstGeom>
+          <a:solidFill>
+            <a:srgbClr val="D9C089"/>
+          </a:solidFill>
+          <a:ln>
+            <a:noFill/>
+          </a:ln>
+        </p:spPr>
+        <p:style>
+          <a:lnRef idx="1">
+            <a:schemeClr val="accent1"/>
+          </a:lnRef>
+          <a:fillRef idx="3">
+            <a:schemeClr val="accent1"/>
+          </a:fillRef>
+          <a:effectRef idx="2">
+            <a:schemeClr val="accent1"/>
+          </a:effectRef>
+          <a:fontRef idx="minor">
+            <a:schemeClr val="lt1"/>
+          </a:fontRef>
+        </p:style>
+        <p:txBody>
+          <a:bodyPr rtlCol="0" anchor="ctr"/>
+          <a:lstStyle/>
+          <a:p>
+            <a:pPr algn="ctr"/>
+          </a:p>
+        </p:txBody>
+      </p:sp>
+      <p:sp>
+        <p:nvSpPr>
+          <p:cNvPr id="7" name="TextBox 6"/>
+          <p:cNvSpPr txBox="1"/>
+          <p:nvPr/>
+        </p:nvSpPr>
+        <p:spPr>
+          <a:xfrm>
+            <a:off x="813816" y="502920"/>
+            <a:ext cx="10634472" cy="685800"/>
+          </a:xfrm>
+          <a:prstGeom prst="rect">
+            <a:avLst/>
+          </a:prstGeom>
+          <a:noFill/>
+        </p:spPr>
+        <p:txBody>
+          <a:bodyPr wrap="square">
+            <a:spAutoFit/>
+          </a:bodyPr>
+          <a:lstStyle/>
+          <a:p>
+            <a:pPr algn="l"/>
+            <a:r>
+              <a:rPr sz="2400" b="1" i="0">
+                <a:solidFill>
+                  <a:srgbClr val="1F2C56"/>
+                </a:solidFill>
+                <a:latin typeface="Source Serif 4"/>
+              </a:rPr>
+              <a:t>Liquiditäts- und Wachstumsplanung</a:t>
+            </a:r>
+          </a:p>
+        </p:txBody>
+      </p:sp>
+      <p:sp>
+        <p:nvSpPr>
+          <p:cNvPr id="8" name="TextBox 7"/>
+          <p:cNvSpPr txBox="1"/>
+          <p:nvPr/>
+        </p:nvSpPr>
+        <p:spPr>
+          <a:xfrm>
+            <a:off x="685800" y="1417320"/>
+            <a:ext cx="10817352" cy="5029200"/>
+          </a:xfrm>
+          <a:prstGeom prst="rect">
+            <a:avLst/>
+          </a:prstGeom>
+          <a:noFill/>
+        </p:spPr>
+        <p:txBody>
+          <a:bodyPr wrap="square">
+            <a:spAutoFit/>
+          </a:bodyPr>
+          <a:lstStyle/>
+          <a:p>
+            <a:pPr>
+              <a:spcBef>
+                <a:spcPts val="1000"/>
+              </a:spcBef>
+              <a:spcAft>
+                <a:spcPts val="200"/>
+              </a:spcAft>
+            </a:pPr>
+            <a:r>
+              <a:rPr sz="800" b="1">
+                <a:solidFill>
+                  <a:srgbClr val="78808C"/>
+                </a:solidFill>
+                <a:latin typeface="JetBrains Mono"/>
+              </a:rPr>
+              <a:t>WORKING CAPITAL UND CASH CONVERSION CYCLE</a:t>
+            </a:r>
+          </a:p>
+          <a:p>
+            <a:pPr>
+              <a:spcBef>
+                <a:spcPts val="400"/>
+              </a:spcBef>
+              <a:spcAft>
+                <a:spcPts val="200"/>
+              </a:spcAft>
+            </a:pPr>
+            <a:r>
+              <a:rPr sz="1200">
+                <a:solidFill>
+                  <a:srgbClr val="3D5466"/>
+                </a:solidFill>
+                <a:latin typeface="Arial"/>
+              </a:rPr>
+              <a:t>Formel Betriebsmittelbedarf: Betriebsmittelbedarf = Umsatzwachstum (EUR) × CCC (Tage) / 365</a:t>
+            </a:r>
+          </a:p>
+          <a:p>
+            <a:pPr>
+              <a:spcBef>
+                <a:spcPts val="400"/>
+              </a:spcBef>
+              <a:spcAft>
+                <a:spcPts val="200"/>
+              </a:spcAft>
+            </a:pPr>
+            <a:r>
+              <a:rPr sz="1200">
+                <a:solidFill>
+                  <a:srgbClr val="3D5466"/>
+                </a:solidFill>
+                <a:latin typeface="Arial"/>
+              </a:rPr>
+              <a:t>Beispiel: Umsatzwachstum +3,0 Mio. EUR, CCC 58 Tage → Betriebsmittelbedarf: 3.000 TEUR × 58/365 = ca. 477 TEUR zusätzlich</a:t>
+            </a:r>
+          </a:p>
+          <a:p>
+            <a:pPr>
+              <a:spcBef>
+                <a:spcPts val="1000"/>
+              </a:spcBef>
+              <a:spcAft>
+                <a:spcPts val="200"/>
+              </a:spcAft>
+            </a:pPr>
+            <a:r>
+              <a:rPr sz="800" b="1">
+                <a:solidFill>
+                  <a:srgbClr val="78808C"/>
+                </a:solidFill>
+                <a:latin typeface="JetBrains Mono"/>
+              </a:rPr>
+              <a:t>INSTRUMENTE DER WACHSTUMSFINANZIERUNG</a:t>
+            </a:r>
+          </a:p>
+        </p:txBody>
+      </p:sp>
+      <p:sp>
+        <p:nvSpPr>
+          <p:cNvPr id="9" name="Rectangle 8"/>
+          <p:cNvSpPr/>
+          <p:nvPr/>
+        </p:nvSpPr>
+        <p:spPr>
+          <a:xfrm>
+            <a:off x="0" y="6510528"/>
+            <a:ext cx="12188952" cy="347472"/>
+          </a:xfrm>
+          <a:prstGeom prst="rect">
+            <a:avLst/>
+          </a:prstGeom>
+          <a:solidFill>
+            <a:srgbClr val="0A1937"/>
+          </a:solidFill>
+          <a:ln>
+            <a:noFill/>
+          </a:ln>
+        </p:spPr>
+        <p:style>
+          <a:lnRef idx="1">
+            <a:schemeClr val="accent1"/>
+          </a:lnRef>
+          <a:fillRef idx="3">
+            <a:schemeClr val="accent1"/>
+          </a:fillRef>
+          <a:effectRef idx="2">
+            <a:schemeClr val="accent1"/>
+          </a:effectRef>
+          <a:fontRef idx="minor">
+            <a:schemeClr val="lt1"/>
+          </a:fontRef>
+        </p:style>
+        <p:txBody>
+          <a:bodyPr rtlCol="0" anchor="ctr"/>
+          <a:lstStyle/>
+          <a:p>
+            <a:pPr algn="ctr"/>
+          </a:p>
+        </p:txBody>
+      </p:sp>
+      <p:sp>
+        <p:nvSpPr>
+          <p:cNvPr id="10" name="TextBox 9"/>
+          <p:cNvSpPr txBox="1"/>
+          <p:nvPr/>
+        </p:nvSpPr>
+        <p:spPr>
+          <a:xfrm>
+            <a:off x="685800" y="6583680"/>
+            <a:ext cx="6490411" cy="256032"/>
+          </a:xfrm>
+          <a:prstGeom prst="rect">
+            <a:avLst/>
+          </a:prstGeom>
+          <a:noFill/>
+        </p:spPr>
+        <p:txBody>
+          <a:bodyPr wrap="none">
+            <a:spAutoFit/>
+          </a:bodyPr>
+          <a:lstStyle/>
+          <a:p>
+            <a:pPr algn="l"/>
+            <a:r>
+              <a:rPr sz="700">
+                <a:solidFill>
+                  <a:srgbClr val="A0B4D2"/>
+                </a:solidFill>
+                <a:latin typeface="JetBrains Mono"/>
+              </a:rPr>
+              <a:t>Benedikt Zoller Coaching  ·  FKB Campus  ·  M03</a:t>
+            </a:r>
+          </a:p>
+        </p:txBody>
+      </p:sp>
+    </p:spTree>
+  </p:cSld>
+  <p:clrMapOvr>
+    <a:masterClrMapping/>
+  </p:clrMapOvr>
+</p:sld>
+</file>
+
 <file path=ppt/slides/slide2.xml><?xml version="1.0" encoding="utf-8"?>
 <p:sld xmlns:a="http://schemas.openxmlformats.org/drawingml/2006/main" xmlns:p="http://schemas.openxmlformats.org/presentationml/2006/main" xmlns:r="http://schemas.openxmlformats.org/officeDocument/2006/relationships">
   <p:cSld>
@@ -4200,7 +5423,7 @@
                 </a:solidFill>
                 <a:latin typeface="JetBrains Mono"/>
               </a:rPr>
-              <a:t>M03  ·  INHALT</a:t>
+              <a:t>AGENDA  ·  M03</a:t>
             </a:r>
           </a:p>
         </p:txBody>
@@ -4250,57 +5473,14 @@
       </p:sp>
       <p:sp>
         <p:nvSpPr>
-          <p:cNvPr id="6" name="Rectangle 5"/>
-          <p:cNvSpPr/>
+          <p:cNvPr id="6" name="TextBox 5"/>
+          <p:cNvSpPr txBox="1"/>
           <p:nvPr/>
         </p:nvSpPr>
         <p:spPr>
           <a:xfrm>
             <a:off x="685800" y="502920"/>
-            <a:ext cx="36576" cy="658368"/>
-          </a:xfrm>
-          <a:prstGeom prst="rect">
-            <a:avLst/>
-          </a:prstGeom>
-          <a:solidFill>
-            <a:srgbClr val="D9C089"/>
-          </a:solidFill>
-          <a:ln>
-            <a:noFill/>
-          </a:ln>
-        </p:spPr>
-        <p:style>
-          <a:lnRef idx="1">
-            <a:schemeClr val="accent1"/>
-          </a:lnRef>
-          <a:fillRef idx="3">
-            <a:schemeClr val="accent1"/>
-          </a:fillRef>
-          <a:effectRef idx="2">
-            <a:schemeClr val="accent1"/>
-          </a:effectRef>
-          <a:fontRef idx="minor">
-            <a:schemeClr val="lt1"/>
-          </a:fontRef>
-        </p:style>
-        <p:txBody>
-          <a:bodyPr rtlCol="0" anchor="ctr"/>
-          <a:lstStyle/>
-          <a:p>
-            <a:pPr algn="ctr"/>
-          </a:p>
-        </p:txBody>
-      </p:sp>
-      <p:sp>
-        <p:nvSpPr>
-          <p:cNvPr id="7" name="TextBox 6"/>
-          <p:cNvSpPr txBox="1"/>
-          <p:nvPr/>
-        </p:nvSpPr>
-        <p:spPr>
-          <a:xfrm>
-            <a:off x="813816" y="502920"/>
-            <a:ext cx="10634472" cy="685800"/>
+            <a:ext cx="10817352" cy="658368"/>
           </a:xfrm>
           <a:prstGeom prst="rect">
             <a:avLst/>
@@ -4315,27 +5495,27 @@
           <a:p>
             <a:pPr algn="l"/>
             <a:r>
-              <a:rPr sz="2400" b="1" i="0">
+              <a:rPr sz="2600" b="1" i="0">
                 <a:solidFill>
                   <a:srgbClr val="1F2C56"/>
                 </a:solidFill>
                 <a:latin typeface="Source Serif 4"/>
               </a:rPr>
-              <a:t>Vom Bilanzgespräch zum Strategiegespräch</a:t>
-            </a:r>
-          </a:p>
-        </p:txBody>
-      </p:sp>
-      <p:sp>
-        <p:nvSpPr>
-          <p:cNvPr id="8" name="TextBox 7"/>
+              <a:t>Agenda</a:t>
+            </a:r>
+          </a:p>
+        </p:txBody>
+      </p:sp>
+      <p:sp>
+        <p:nvSpPr>
+          <p:cNvPr id="7" name="TextBox 6"/>
           <p:cNvSpPr txBox="1"/>
           <p:nvPr/>
         </p:nvSpPr>
         <p:spPr>
           <a:xfrm>
-            <a:off x="685800" y="1417320"/>
-            <a:ext cx="10817352" cy="5029200"/>
+            <a:off x="685800" y="1463040"/>
+            <a:ext cx="10817352" cy="4937760"/>
           </a:xfrm>
           <a:prstGeom prst="rect">
             <a:avLst/>
@@ -4350,27 +5530,103 @@
           <a:p>
             <a:pPr>
               <a:spcBef>
-                <a:spcPts val="1000"/>
+                <a:spcPts val="800"/>
               </a:spcBef>
               <a:spcAft>
                 <a:spcPts val="200"/>
               </a:spcAft>
             </a:pPr>
             <a:r>
-              <a:rPr sz="800" b="1">
+              <a:rPr sz="1500">
                 <a:solidFill>
-                  <a:srgbClr val="78808C"/>
+                  <a:srgbClr val="3D5466"/>
                 </a:solidFill>
-                <a:latin typeface="JetBrains Mono"/>
+                <a:latin typeface="Arial"/>
               </a:rPr>
-              <a:t>DIE DREI EBENEN DES STRATEGISCHEN FINANZDIALOGS</a:t>
-            </a:r>
-          </a:p>
-        </p:txBody>
-      </p:sp>
-      <p:sp>
-        <p:nvSpPr>
-          <p:cNvPr id="9" name="Rectangle 8"/>
+              <a:t>01   Vom Bilanzgespräch zum Strategiegespräch</a:t>
+            </a:r>
+          </a:p>
+          <a:p>
+            <a:pPr>
+              <a:spcBef>
+                <a:spcPts val="800"/>
+              </a:spcBef>
+              <a:spcAft>
+                <a:spcPts val="200"/>
+              </a:spcAft>
+            </a:pPr>
+            <a:r>
+              <a:rPr sz="1500">
+                <a:solidFill>
+                  <a:srgbClr val="3D5466"/>
+                </a:solidFill>
+                <a:latin typeface="Arial"/>
+              </a:rPr>
+              <a:t>02   Kapitalstruktur und Werttreiber verstehen</a:t>
+            </a:r>
+          </a:p>
+          <a:p>
+            <a:pPr>
+              <a:spcBef>
+                <a:spcPts val="800"/>
+              </a:spcBef>
+              <a:spcAft>
+                <a:spcPts val="200"/>
+              </a:spcAft>
+            </a:pPr>
+            <a:r>
+              <a:rPr sz="1500">
+                <a:solidFill>
+                  <a:srgbClr val="3D5466"/>
+                </a:solidFill>
+                <a:latin typeface="Arial"/>
+              </a:rPr>
+              <a:t>03   Strategische Szenarien in der Beratungspraxis</a:t>
+            </a:r>
+          </a:p>
+          <a:p>
+            <a:pPr>
+              <a:spcBef>
+                <a:spcPts val="800"/>
+              </a:spcBef>
+              <a:spcAft>
+                <a:spcPts val="200"/>
+              </a:spcAft>
+            </a:pPr>
+            <a:r>
+              <a:rPr sz="1500">
+                <a:solidFill>
+                  <a:srgbClr val="3D5466"/>
+                </a:solidFill>
+                <a:latin typeface="Arial"/>
+              </a:rPr>
+              <a:t>04   Praxiscase: Habermaier Präzisionsteile GmbH &amp; Co. KG</a:t>
+            </a:r>
+          </a:p>
+          <a:p>
+            <a:pPr>
+              <a:spcBef>
+                <a:spcPts val="800"/>
+              </a:spcBef>
+              <a:spcAft>
+                <a:spcPts val="200"/>
+              </a:spcAft>
+            </a:pPr>
+            <a:r>
+              <a:rPr sz="1500">
+                <a:solidFill>
+                  <a:srgbClr val="3D5466"/>
+                </a:solidFill>
+                <a:latin typeface="Arial"/>
+              </a:rPr>
+              <a:t>05   Liquiditäts- und Wachstumsplanung</a:t>
+            </a:r>
+          </a:p>
+        </p:txBody>
+      </p:sp>
+      <p:sp>
+        <p:nvSpPr>
+          <p:cNvPr id="8" name="Rectangle 7"/>
           <p:cNvSpPr/>
           <p:nvPr/>
         </p:nvSpPr>
@@ -4413,7 +5669,7 @@
       </p:sp>
       <p:sp>
         <p:nvSpPr>
-          <p:cNvPr id="10" name="TextBox 9"/>
+          <p:cNvPr id="9" name="TextBox 8"/>
           <p:cNvSpPr txBox="1"/>
           <p:nvPr/>
         </p:nvSpPr>
@@ -4479,7 +5735,7 @@
             <a:avLst/>
           </a:prstGeom>
           <a:solidFill>
-            <a:srgbClr val="FFFFFF"/>
+            <a:srgbClr val="EDEDF3"/>
           </a:solidFill>
           <a:ln>
             <a:noFill/>
@@ -4580,43 +5836,51 @@
                 </a:solidFill>
                 <a:latin typeface="JetBrains Mono"/>
               </a:rPr>
-              <a:t>M03  ·  SCHAUBILD</a:t>
-            </a:r>
-          </a:p>
-        </p:txBody>
-      </p:sp>
-      <p:sp>
-        <p:nvSpPr>
-          <p:cNvPr id="5" name="TextBox 4"/>
-          <p:cNvSpPr txBox="1"/>
-          <p:nvPr/>
-        </p:nvSpPr>
-        <p:spPr>
-          <a:xfrm>
-            <a:off x="685800" y="502920"/>
-            <a:ext cx="10817352" cy="594360"/>
-          </a:xfrm>
-          <a:prstGeom prst="rect">
-            <a:avLst/>
-          </a:prstGeom>
-          <a:noFill/>
-        </p:spPr>
-        <p:txBody>
-          <a:bodyPr wrap="square">
-            <a:spAutoFit/>
-          </a:bodyPr>
-          <a:lstStyle/>
-          <a:p>
-            <a:pPr algn="l"/>
-            <a:r>
-              <a:rPr sz="2000" b="1" i="0">
-                <a:solidFill>
-                  <a:srgbClr val="1F2C56"/>
-                </a:solidFill>
-                <a:latin typeface="Source Serif 4"/>
-              </a:rPr>
-              <a:t>Drei Gesprächsebenen des strategischen Finanzdialogs</a:t>
-            </a:r>
+              <a:t>M03  ·  INHALT</a:t>
+            </a:r>
+          </a:p>
+        </p:txBody>
+      </p:sp>
+      <p:sp>
+        <p:nvSpPr>
+          <p:cNvPr id="5" name="Rectangle 4"/>
+          <p:cNvSpPr/>
+          <p:nvPr/>
+        </p:nvSpPr>
+        <p:spPr>
+          <a:xfrm>
+            <a:off x="0" y="1234440"/>
+            <a:ext cx="12188952" cy="12700"/>
+          </a:xfrm>
+          <a:prstGeom prst="rect">
+            <a:avLst/>
+          </a:prstGeom>
+          <a:solidFill>
+            <a:srgbClr val="D8DFE4"/>
+          </a:solidFill>
+          <a:ln>
+            <a:noFill/>
+          </a:ln>
+        </p:spPr>
+        <p:style>
+          <a:lnRef idx="1">
+            <a:schemeClr val="accent1"/>
+          </a:lnRef>
+          <a:fillRef idx="3">
+            <a:schemeClr val="accent1"/>
+          </a:fillRef>
+          <a:effectRef idx="2">
+            <a:schemeClr val="accent1"/>
+          </a:effectRef>
+          <a:fontRef idx="minor">
+            <a:schemeClr val="lt1"/>
+          </a:fontRef>
+        </p:style>
+        <p:txBody>
+          <a:bodyPr rtlCol="0" anchor="ctr"/>
+          <a:lstStyle/>
+          <a:p>
+            <a:pPr algn="ctr"/>
           </a:p>
         </p:txBody>
       </p:sp>
@@ -4628,8 +5892,8 @@
         </p:nvSpPr>
         <p:spPr>
           <a:xfrm>
-            <a:off x="685800" y="1143000"/>
-            <a:ext cx="10817352" cy="25400"/>
+            <a:off x="685800" y="502920"/>
+            <a:ext cx="36576" cy="658368"/>
           </a:xfrm>
           <a:prstGeom prst="rect">
             <a:avLst/>
@@ -4663,33 +5927,86 @@
           </a:p>
         </p:txBody>
       </p:sp>
-      <p:pic>
-        <p:nvPicPr>
-          <p:cNvPr id="7" name="Picture 6" descr="image.png"/>
-          <p:cNvPicPr>
-            <a:picLocks noChangeAspect="1"/>
-          </p:cNvPicPr>
-          <p:nvPr/>
-        </p:nvPicPr>
-        <p:blipFill>
-          <a:blip r:embed="rId2"/>
-          <a:stretch>
-            <a:fillRect/>
-          </a:stretch>
-        </p:blipFill>
-        <p:spPr>
-          <a:xfrm>
-            <a:off x="2009463" y="1325880"/>
-            <a:ext cx="8170026" cy="4937760"/>
-          </a:xfrm>
-          <a:prstGeom prst="rect">
-            <a:avLst/>
-          </a:prstGeom>
-        </p:spPr>
-      </p:pic>
-      <p:sp>
-        <p:nvSpPr>
-          <p:cNvPr id="8" name="Rectangle 7"/>
+      <p:sp>
+        <p:nvSpPr>
+          <p:cNvPr id="7" name="TextBox 6"/>
+          <p:cNvSpPr txBox="1"/>
+          <p:nvPr/>
+        </p:nvSpPr>
+        <p:spPr>
+          <a:xfrm>
+            <a:off x="813816" y="502920"/>
+            <a:ext cx="10634472" cy="685800"/>
+          </a:xfrm>
+          <a:prstGeom prst="rect">
+            <a:avLst/>
+          </a:prstGeom>
+          <a:noFill/>
+        </p:spPr>
+        <p:txBody>
+          <a:bodyPr wrap="square">
+            <a:spAutoFit/>
+          </a:bodyPr>
+          <a:lstStyle/>
+          <a:p>
+            <a:pPr algn="l"/>
+            <a:r>
+              <a:rPr sz="2400" b="1" i="0">
+                <a:solidFill>
+                  <a:srgbClr val="1F2C56"/>
+                </a:solidFill>
+                <a:latin typeface="Source Serif 4"/>
+              </a:rPr>
+              <a:t>Vom Bilanzgespräch zum Strategiegespräch</a:t>
+            </a:r>
+          </a:p>
+        </p:txBody>
+      </p:sp>
+      <p:sp>
+        <p:nvSpPr>
+          <p:cNvPr id="8" name="TextBox 7"/>
+          <p:cNvSpPr txBox="1"/>
+          <p:nvPr/>
+        </p:nvSpPr>
+        <p:spPr>
+          <a:xfrm>
+            <a:off x="685800" y="1417320"/>
+            <a:ext cx="10817352" cy="5029200"/>
+          </a:xfrm>
+          <a:prstGeom prst="rect">
+            <a:avLst/>
+          </a:prstGeom>
+          <a:noFill/>
+        </p:spPr>
+        <p:txBody>
+          <a:bodyPr wrap="square">
+            <a:spAutoFit/>
+          </a:bodyPr>
+          <a:lstStyle/>
+          <a:p>
+            <a:pPr>
+              <a:spcBef>
+                <a:spcPts val="1000"/>
+              </a:spcBef>
+              <a:spcAft>
+                <a:spcPts val="200"/>
+              </a:spcAft>
+            </a:pPr>
+            <a:r>
+              <a:rPr sz="800" b="1">
+                <a:solidFill>
+                  <a:srgbClr val="78808C"/>
+                </a:solidFill>
+                <a:latin typeface="JetBrains Mono"/>
+              </a:rPr>
+              <a:t>DIE DREI EBENEN DES STRATEGISCHEN FINANZDIALOGS</a:t>
+            </a:r>
+          </a:p>
+        </p:txBody>
+      </p:sp>
+      <p:sp>
+        <p:nvSpPr>
+          <p:cNvPr id="9" name="Rectangle 8"/>
           <p:cNvSpPr/>
           <p:nvPr/>
         </p:nvSpPr>
@@ -4732,7 +6049,7 @@
       </p:sp>
       <p:sp>
         <p:nvSpPr>
-          <p:cNvPr id="9" name="TextBox 8"/>
+          <p:cNvPr id="10" name="TextBox 9"/>
           <p:cNvSpPr txBox="1"/>
           <p:nvPr/>
         </p:nvSpPr>
@@ -4761,41 +6078,6 @@
                 <a:latin typeface="JetBrains Mono"/>
               </a:rPr>
               <a:t>Benedikt Zoller Coaching  ·  FKB Campus  ·  M03</a:t>
-            </a:r>
-          </a:p>
-        </p:txBody>
-      </p:sp>
-      <p:sp>
-        <p:nvSpPr>
-          <p:cNvPr id="10" name="TextBox 9"/>
-          <p:cNvSpPr txBox="1"/>
-          <p:nvPr/>
-        </p:nvSpPr>
-        <p:spPr>
-          <a:xfrm>
-            <a:off x="7176211" y="6583680"/>
-            <a:ext cx="4326940" cy="256032"/>
-          </a:xfrm>
-          <a:prstGeom prst="rect">
-            <a:avLst/>
-          </a:prstGeom>
-          <a:noFill/>
-        </p:spPr>
-        <p:txBody>
-          <a:bodyPr wrap="none">
-            <a:spAutoFit/>
-          </a:bodyPr>
-          <a:lstStyle/>
-          <a:p>
-            <a:pPr algn="r"/>
-            <a:r>
-              <a:rPr sz="700">
-                <a:solidFill>
-                  <a:srgbClr val="A0B4D2"/>
-                </a:solidFill>
-                <a:latin typeface="JetBrains Mono"/>
-              </a:rPr>
-              <a:t>Schaubild</a:t>
             </a:r>
           </a:p>
         </p:txBody>
@@ -4833,7 +6115,7 @@
             <a:avLst/>
           </a:prstGeom>
           <a:solidFill>
-            <a:srgbClr val="EDEDF3"/>
+            <a:srgbClr val="FFFFFF"/>
           </a:solidFill>
           <a:ln>
             <a:noFill/>
@@ -4934,51 +6216,43 @@
                 </a:solidFill>
                 <a:latin typeface="JetBrains Mono"/>
               </a:rPr>
-              <a:t>M03  ·  INHALT</a:t>
-            </a:r>
-          </a:p>
-        </p:txBody>
-      </p:sp>
-      <p:sp>
-        <p:nvSpPr>
-          <p:cNvPr id="5" name="Rectangle 4"/>
-          <p:cNvSpPr/>
-          <p:nvPr/>
-        </p:nvSpPr>
-        <p:spPr>
-          <a:xfrm>
-            <a:off x="0" y="1234440"/>
-            <a:ext cx="12188952" cy="12700"/>
-          </a:xfrm>
-          <a:prstGeom prst="rect">
-            <a:avLst/>
-          </a:prstGeom>
-          <a:solidFill>
-            <a:srgbClr val="D8DFE4"/>
-          </a:solidFill>
-          <a:ln>
-            <a:noFill/>
-          </a:ln>
-        </p:spPr>
-        <p:style>
-          <a:lnRef idx="1">
-            <a:schemeClr val="accent1"/>
-          </a:lnRef>
-          <a:fillRef idx="3">
-            <a:schemeClr val="accent1"/>
-          </a:fillRef>
-          <a:effectRef idx="2">
-            <a:schemeClr val="accent1"/>
-          </a:effectRef>
-          <a:fontRef idx="minor">
-            <a:schemeClr val="lt1"/>
-          </a:fontRef>
-        </p:style>
-        <p:txBody>
-          <a:bodyPr rtlCol="0" anchor="ctr"/>
-          <a:lstStyle/>
-          <a:p>
-            <a:pPr algn="ctr"/>
+              <a:t>M03  ·  SCHAUBILD</a:t>
+            </a:r>
+          </a:p>
+        </p:txBody>
+      </p:sp>
+      <p:sp>
+        <p:nvSpPr>
+          <p:cNvPr id="5" name="TextBox 4"/>
+          <p:cNvSpPr txBox="1"/>
+          <p:nvPr/>
+        </p:nvSpPr>
+        <p:spPr>
+          <a:xfrm>
+            <a:off x="685800" y="502920"/>
+            <a:ext cx="10817352" cy="594360"/>
+          </a:xfrm>
+          <a:prstGeom prst="rect">
+            <a:avLst/>
+          </a:prstGeom>
+          <a:noFill/>
+        </p:spPr>
+        <p:txBody>
+          <a:bodyPr wrap="square">
+            <a:spAutoFit/>
+          </a:bodyPr>
+          <a:lstStyle/>
+          <a:p>
+            <a:pPr algn="l"/>
+            <a:r>
+              <a:rPr sz="2000" b="1" i="0">
+                <a:solidFill>
+                  <a:srgbClr val="1F2C56"/>
+                </a:solidFill>
+                <a:latin typeface="Source Serif 4"/>
+              </a:rPr>
+              <a:t>Drei Gesprächsebenen des strategischen Finanzdialogs</a:t>
+            </a:r>
           </a:p>
         </p:txBody>
       </p:sp>
@@ -4990,8 +6264,8 @@
         </p:nvSpPr>
         <p:spPr>
           <a:xfrm>
-            <a:off x="685800" y="502920"/>
-            <a:ext cx="36576" cy="658368"/>
+            <a:off x="685800" y="1143000"/>
+            <a:ext cx="10817352" cy="25400"/>
           </a:xfrm>
           <a:prstGeom prst="rect">
             <a:avLst/>
@@ -5025,124 +6299,33 @@
           </a:p>
         </p:txBody>
       </p:sp>
-      <p:sp>
-        <p:nvSpPr>
-          <p:cNvPr id="7" name="TextBox 6"/>
-          <p:cNvSpPr txBox="1"/>
-          <p:nvPr/>
-        </p:nvSpPr>
-        <p:spPr>
-          <a:xfrm>
-            <a:off x="813816" y="502920"/>
-            <a:ext cx="10634472" cy="685800"/>
-          </a:xfrm>
-          <a:prstGeom prst="rect">
-            <a:avLst/>
-          </a:prstGeom>
-          <a:noFill/>
-        </p:spPr>
-        <p:txBody>
-          <a:bodyPr wrap="square">
-            <a:spAutoFit/>
-          </a:bodyPr>
-          <a:lstStyle/>
-          <a:p>
-            <a:pPr algn="l"/>
-            <a:r>
-              <a:rPr sz="2400" b="1" i="0">
-                <a:solidFill>
-                  <a:srgbClr val="1F2C56"/>
-                </a:solidFill>
-                <a:latin typeface="Source Serif 4"/>
-              </a:rPr>
-              <a:t>Kapitalstruktur und Werttreiber verstehen</a:t>
-            </a:r>
-          </a:p>
-        </p:txBody>
-      </p:sp>
-      <p:sp>
-        <p:nvSpPr>
-          <p:cNvPr id="8" name="TextBox 7"/>
-          <p:cNvSpPr txBox="1"/>
-          <p:nvPr/>
-        </p:nvSpPr>
-        <p:spPr>
-          <a:xfrm>
-            <a:off x="685800" y="1417320"/>
-            <a:ext cx="10817352" cy="5029200"/>
-          </a:xfrm>
-          <a:prstGeom prst="rect">
-            <a:avLst/>
-          </a:prstGeom>
-          <a:noFill/>
-        </p:spPr>
-        <p:txBody>
-          <a:bodyPr wrap="square">
-            <a:spAutoFit/>
-          </a:bodyPr>
-          <a:lstStyle/>
-          <a:p>
-            <a:pPr>
-              <a:spcBef>
-                <a:spcPts val="1000"/>
-              </a:spcBef>
-              <a:spcAft>
-                <a:spcPts val="200"/>
-              </a:spcAft>
-            </a:pPr>
-            <a:r>
-              <a:rPr sz="800" b="1">
-                <a:solidFill>
-                  <a:srgbClr val="78808C"/>
-                </a:solidFill>
-                <a:latin typeface="JetBrains Mono"/>
-              </a:rPr>
-              <a:t>ZENTRALE WERTTREIBER IM MITTELSTAND</a:t>
-            </a:r>
-          </a:p>
-          <a:p>
-            <a:pPr>
-              <a:spcBef>
-                <a:spcPts val="400"/>
-              </a:spcBef>
-              <a:spcAft>
-                <a:spcPts val="200"/>
-              </a:spcAft>
-            </a:pPr>
-            <a:r>
-              <a:rPr sz="1200">
-                <a:solidFill>
-                  <a:srgbClr val="3D5466"/>
-                </a:solidFill>
-                <a:latin typeface="Arial"/>
-              </a:rPr>
-              <a:t>(vgl. )</a:t>
-            </a:r>
-          </a:p>
-          <a:p>
-            <a:pPr>
-              <a:spcBef>
-                <a:spcPts val="1000"/>
-              </a:spcBef>
-              <a:spcAft>
-                <a:spcPts val="200"/>
-              </a:spcAft>
-            </a:pPr>
-            <a:r>
-              <a:rPr sz="800" b="1">
-                <a:solidFill>
-                  <a:srgbClr val="78808C"/>
-                </a:solidFill>
-                <a:latin typeface="JetBrains Mono"/>
-              </a:rPr>
-              <a:t>FINANZIERUNGSOPTIONEN IM STRATEGISCHEN VERGLEICH</a:t>
-            </a:r>
-          </a:p>
-        </p:txBody>
-      </p:sp>
-      <p:sp>
-        <p:nvSpPr>
-          <p:cNvPr id="9" name="Rectangle 8"/>
+      <p:pic>
+        <p:nvPicPr>
+          <p:cNvPr id="7" name="Picture 6" descr="image.png"/>
+          <p:cNvPicPr>
+            <a:picLocks noChangeAspect="1"/>
+          </p:cNvPicPr>
+          <p:nvPr/>
+        </p:nvPicPr>
+        <p:blipFill>
+          <a:blip r:embed="rId2"/>
+          <a:stretch>
+            <a:fillRect/>
+          </a:stretch>
+        </p:blipFill>
+        <p:spPr>
+          <a:xfrm>
+            <a:off x="2009463" y="1325880"/>
+            <a:ext cx="8170026" cy="4937760"/>
+          </a:xfrm>
+          <a:prstGeom prst="rect">
+            <a:avLst/>
+          </a:prstGeom>
+        </p:spPr>
+      </p:pic>
+      <p:sp>
+        <p:nvSpPr>
+          <p:cNvPr id="8" name="Rectangle 7"/>
           <p:cNvSpPr/>
           <p:nvPr/>
         </p:nvSpPr>
@@ -5185,7 +6368,7 @@
       </p:sp>
       <p:sp>
         <p:nvSpPr>
-          <p:cNvPr id="10" name="TextBox 9"/>
+          <p:cNvPr id="9" name="TextBox 8"/>
           <p:cNvSpPr txBox="1"/>
           <p:nvPr/>
         </p:nvSpPr>
@@ -5214,6 +6397,41 @@
                 <a:latin typeface="JetBrains Mono"/>
               </a:rPr>
               <a:t>Benedikt Zoller Coaching  ·  FKB Campus  ·  M03</a:t>
+            </a:r>
+          </a:p>
+        </p:txBody>
+      </p:sp>
+      <p:sp>
+        <p:nvSpPr>
+          <p:cNvPr id="10" name="TextBox 9"/>
+          <p:cNvSpPr txBox="1"/>
+          <p:nvPr/>
+        </p:nvSpPr>
+        <p:spPr>
+          <a:xfrm>
+            <a:off x="7176211" y="6583680"/>
+            <a:ext cx="4326940" cy="256032"/>
+          </a:xfrm>
+          <a:prstGeom prst="rect">
+            <a:avLst/>
+          </a:prstGeom>
+          <a:noFill/>
+        </p:spPr>
+        <p:txBody>
+          <a:bodyPr wrap="none">
+            <a:spAutoFit/>
+          </a:bodyPr>
+          <a:lstStyle/>
+          <a:p>
+            <a:pPr algn="r"/>
+            <a:r>
+              <a:rPr sz="700">
+                <a:solidFill>
+                  <a:srgbClr val="A0B4D2"/>
+                </a:solidFill>
+                <a:latin typeface="JetBrains Mono"/>
+              </a:rPr>
+              <a:t>Schaubild</a:t>
             </a:r>
           </a:p>
         </p:txBody>
@@ -5251,7 +6469,7 @@
             <a:avLst/>
           </a:prstGeom>
           <a:solidFill>
-            <a:srgbClr val="FFFFFF"/>
+            <a:srgbClr val="EDEDF3"/>
           </a:solidFill>
           <a:ln>
             <a:noFill/>
@@ -5352,43 +6570,51 @@
                 </a:solidFill>
                 <a:latin typeface="JetBrains Mono"/>
               </a:rPr>
-              <a:t>M03  ·  SCHAUBILD</a:t>
-            </a:r>
-          </a:p>
-        </p:txBody>
-      </p:sp>
-      <p:sp>
-        <p:nvSpPr>
-          <p:cNvPr id="5" name="TextBox 4"/>
-          <p:cNvSpPr txBox="1"/>
-          <p:nvPr/>
-        </p:nvSpPr>
-        <p:spPr>
-          <a:xfrm>
-            <a:off x="685800" y="502920"/>
-            <a:ext cx="10817352" cy="594360"/>
-          </a:xfrm>
-          <a:prstGeom prst="rect">
-            <a:avLst/>
-          </a:prstGeom>
-          <a:noFill/>
-        </p:spPr>
-        <p:txBody>
-          <a:bodyPr wrap="square">
-            <a:spAutoFit/>
-          </a:bodyPr>
-          <a:lstStyle/>
-          <a:p>
-            <a:pPr algn="l"/>
-            <a:r>
-              <a:rPr sz="2000" b="1" i="0">
-                <a:solidFill>
-                  <a:srgbClr val="1F2C56"/>
-                </a:solidFill>
-                <a:latin typeface="Source Serif 4"/>
-              </a:rPr>
-              <a:t>Werttreiberbaum für den Mittelstand</a:t>
-            </a:r>
+              <a:t>M03  ·  INHALT</a:t>
+            </a:r>
+          </a:p>
+        </p:txBody>
+      </p:sp>
+      <p:sp>
+        <p:nvSpPr>
+          <p:cNvPr id="5" name="Rectangle 4"/>
+          <p:cNvSpPr/>
+          <p:nvPr/>
+        </p:nvSpPr>
+        <p:spPr>
+          <a:xfrm>
+            <a:off x="0" y="1234440"/>
+            <a:ext cx="12188952" cy="12700"/>
+          </a:xfrm>
+          <a:prstGeom prst="rect">
+            <a:avLst/>
+          </a:prstGeom>
+          <a:solidFill>
+            <a:srgbClr val="D8DFE4"/>
+          </a:solidFill>
+          <a:ln>
+            <a:noFill/>
+          </a:ln>
+        </p:spPr>
+        <p:style>
+          <a:lnRef idx="1">
+            <a:schemeClr val="accent1"/>
+          </a:lnRef>
+          <a:fillRef idx="3">
+            <a:schemeClr val="accent1"/>
+          </a:fillRef>
+          <a:effectRef idx="2">
+            <a:schemeClr val="accent1"/>
+          </a:effectRef>
+          <a:fontRef idx="minor">
+            <a:schemeClr val="lt1"/>
+          </a:fontRef>
+        </p:style>
+        <p:txBody>
+          <a:bodyPr rtlCol="0" anchor="ctr"/>
+          <a:lstStyle/>
+          <a:p>
+            <a:pPr algn="ctr"/>
           </a:p>
         </p:txBody>
       </p:sp>
@@ -5400,8 +6626,8 @@
         </p:nvSpPr>
         <p:spPr>
           <a:xfrm>
-            <a:off x="685800" y="1143000"/>
-            <a:ext cx="10817352" cy="25400"/>
+            <a:off x="685800" y="502920"/>
+            <a:ext cx="36576" cy="658368"/>
           </a:xfrm>
           <a:prstGeom prst="rect">
             <a:avLst/>
@@ -5435,33 +6661,124 @@
           </a:p>
         </p:txBody>
       </p:sp>
-      <p:pic>
-        <p:nvPicPr>
-          <p:cNvPr id="7" name="Picture 6" descr="image.png"/>
-          <p:cNvPicPr>
-            <a:picLocks noChangeAspect="1"/>
-          </p:cNvPicPr>
-          <p:nvPr/>
-        </p:nvPicPr>
-        <p:blipFill>
-          <a:blip r:embed="rId2"/>
-          <a:stretch>
-            <a:fillRect/>
-          </a:stretch>
-        </p:blipFill>
-        <p:spPr>
-          <a:xfrm>
-            <a:off x="2303489" y="1325880"/>
-            <a:ext cx="7581973" cy="4937760"/>
-          </a:xfrm>
-          <a:prstGeom prst="rect">
-            <a:avLst/>
-          </a:prstGeom>
-        </p:spPr>
-      </p:pic>
-      <p:sp>
-        <p:nvSpPr>
-          <p:cNvPr id="8" name="Rectangle 7"/>
+      <p:sp>
+        <p:nvSpPr>
+          <p:cNvPr id="7" name="TextBox 6"/>
+          <p:cNvSpPr txBox="1"/>
+          <p:nvPr/>
+        </p:nvSpPr>
+        <p:spPr>
+          <a:xfrm>
+            <a:off x="813816" y="502920"/>
+            <a:ext cx="10634472" cy="685800"/>
+          </a:xfrm>
+          <a:prstGeom prst="rect">
+            <a:avLst/>
+          </a:prstGeom>
+          <a:noFill/>
+        </p:spPr>
+        <p:txBody>
+          <a:bodyPr wrap="square">
+            <a:spAutoFit/>
+          </a:bodyPr>
+          <a:lstStyle/>
+          <a:p>
+            <a:pPr algn="l"/>
+            <a:r>
+              <a:rPr sz="2400" b="1" i="0">
+                <a:solidFill>
+                  <a:srgbClr val="1F2C56"/>
+                </a:solidFill>
+                <a:latin typeface="Source Serif 4"/>
+              </a:rPr>
+              <a:t>Kapitalstruktur und Werttreiber verstehen</a:t>
+            </a:r>
+          </a:p>
+        </p:txBody>
+      </p:sp>
+      <p:sp>
+        <p:nvSpPr>
+          <p:cNvPr id="8" name="TextBox 7"/>
+          <p:cNvSpPr txBox="1"/>
+          <p:nvPr/>
+        </p:nvSpPr>
+        <p:spPr>
+          <a:xfrm>
+            <a:off x="685800" y="1417320"/>
+            <a:ext cx="10817352" cy="5029200"/>
+          </a:xfrm>
+          <a:prstGeom prst="rect">
+            <a:avLst/>
+          </a:prstGeom>
+          <a:noFill/>
+        </p:spPr>
+        <p:txBody>
+          <a:bodyPr wrap="square">
+            <a:spAutoFit/>
+          </a:bodyPr>
+          <a:lstStyle/>
+          <a:p>
+            <a:pPr>
+              <a:spcBef>
+                <a:spcPts val="1000"/>
+              </a:spcBef>
+              <a:spcAft>
+                <a:spcPts val="200"/>
+              </a:spcAft>
+            </a:pPr>
+            <a:r>
+              <a:rPr sz="800" b="1">
+                <a:solidFill>
+                  <a:srgbClr val="78808C"/>
+                </a:solidFill>
+                <a:latin typeface="JetBrains Mono"/>
+              </a:rPr>
+              <a:t>ZENTRALE WERTTREIBER IM MITTELSTAND</a:t>
+            </a:r>
+          </a:p>
+          <a:p>
+            <a:pPr>
+              <a:spcBef>
+                <a:spcPts val="400"/>
+              </a:spcBef>
+              <a:spcAft>
+                <a:spcPts val="200"/>
+              </a:spcAft>
+            </a:pPr>
+            <a:r>
+              <a:rPr sz="1200">
+                <a:solidFill>
+                  <a:srgbClr val="3D5466"/>
+                </a:solidFill>
+                <a:latin typeface="Arial"/>
+              </a:rPr>
+              <a:t>(vgl. )</a:t>
+            </a:r>
+          </a:p>
+          <a:p>
+            <a:pPr>
+              <a:spcBef>
+                <a:spcPts val="1000"/>
+              </a:spcBef>
+              <a:spcAft>
+                <a:spcPts val="200"/>
+              </a:spcAft>
+            </a:pPr>
+            <a:r>
+              <a:rPr sz="800" b="1">
+                <a:solidFill>
+                  <a:srgbClr val="78808C"/>
+                </a:solidFill>
+                <a:latin typeface="JetBrains Mono"/>
+              </a:rPr>
+              <a:t>FINANZIERUNGSOPTIONEN IM STRATEGISCHEN VERGLEICH</a:t>
+            </a:r>
+          </a:p>
+        </p:txBody>
+      </p:sp>
+      <p:sp>
+        <p:nvSpPr>
+          <p:cNvPr id="9" name="Rectangle 8"/>
           <p:cNvSpPr/>
           <p:nvPr/>
         </p:nvSpPr>
@@ -5504,7 +6821,7 @@
       </p:sp>
       <p:sp>
         <p:nvSpPr>
-          <p:cNvPr id="9" name="TextBox 8"/>
+          <p:cNvPr id="10" name="TextBox 9"/>
           <p:cNvSpPr txBox="1"/>
           <p:nvPr/>
         </p:nvSpPr>
@@ -5533,41 +6850,6 @@
                 <a:latin typeface="JetBrains Mono"/>
               </a:rPr>
               <a:t>Benedikt Zoller Coaching  ·  FKB Campus  ·  M03</a:t>
-            </a:r>
-          </a:p>
-        </p:txBody>
-      </p:sp>
-      <p:sp>
-        <p:nvSpPr>
-          <p:cNvPr id="10" name="TextBox 9"/>
-          <p:cNvSpPr txBox="1"/>
-          <p:nvPr/>
-        </p:nvSpPr>
-        <p:spPr>
-          <a:xfrm>
-            <a:off x="7176211" y="6583680"/>
-            <a:ext cx="4326940" cy="256032"/>
-          </a:xfrm>
-          <a:prstGeom prst="rect">
-            <a:avLst/>
-          </a:prstGeom>
-          <a:noFill/>
-        </p:spPr>
-        <p:txBody>
-          <a:bodyPr wrap="none">
-            <a:spAutoFit/>
-          </a:bodyPr>
-          <a:lstStyle/>
-          <a:p>
-            <a:pPr algn="r"/>
-            <a:r>
-              <a:rPr sz="700">
-                <a:solidFill>
-                  <a:srgbClr val="A0B4D2"/>
-                </a:solidFill>
-                <a:latin typeface="JetBrains Mono"/>
-              </a:rPr>
-              <a:t>Schaubild</a:t>
             </a:r>
           </a:p>
         </p:txBody>
@@ -5605,7 +6887,7 @@
             <a:avLst/>
           </a:prstGeom>
           <a:solidFill>
-            <a:srgbClr val="EDEDF3"/>
+            <a:srgbClr val="FFFFFF"/>
           </a:solidFill>
           <a:ln>
             <a:noFill/>
@@ -5706,51 +6988,43 @@
                 </a:solidFill>
                 <a:latin typeface="JetBrains Mono"/>
               </a:rPr>
-              <a:t>M03  ·  INHALT</a:t>
-            </a:r>
-          </a:p>
-        </p:txBody>
-      </p:sp>
-      <p:sp>
-        <p:nvSpPr>
-          <p:cNvPr id="5" name="Rectangle 4"/>
-          <p:cNvSpPr/>
-          <p:nvPr/>
-        </p:nvSpPr>
-        <p:spPr>
-          <a:xfrm>
-            <a:off x="0" y="1234440"/>
-            <a:ext cx="12188952" cy="12700"/>
-          </a:xfrm>
-          <a:prstGeom prst="rect">
-            <a:avLst/>
-          </a:prstGeom>
-          <a:solidFill>
-            <a:srgbClr val="D8DFE4"/>
-          </a:solidFill>
-          <a:ln>
-            <a:noFill/>
-          </a:ln>
-        </p:spPr>
-        <p:style>
-          <a:lnRef idx="1">
-            <a:schemeClr val="accent1"/>
-          </a:lnRef>
-          <a:fillRef idx="3">
-            <a:schemeClr val="accent1"/>
-          </a:fillRef>
-          <a:effectRef idx="2">
-            <a:schemeClr val="accent1"/>
-          </a:effectRef>
-          <a:fontRef idx="minor">
-            <a:schemeClr val="lt1"/>
-          </a:fontRef>
-        </p:style>
-        <p:txBody>
-          <a:bodyPr rtlCol="0" anchor="ctr"/>
-          <a:lstStyle/>
-          <a:p>
-            <a:pPr algn="ctr"/>
+              <a:t>M03  ·  SCHAUBILD</a:t>
+            </a:r>
+          </a:p>
+        </p:txBody>
+      </p:sp>
+      <p:sp>
+        <p:nvSpPr>
+          <p:cNvPr id="5" name="TextBox 4"/>
+          <p:cNvSpPr txBox="1"/>
+          <p:nvPr/>
+        </p:nvSpPr>
+        <p:spPr>
+          <a:xfrm>
+            <a:off x="685800" y="502920"/>
+            <a:ext cx="10817352" cy="594360"/>
+          </a:xfrm>
+          <a:prstGeom prst="rect">
+            <a:avLst/>
+          </a:prstGeom>
+          <a:noFill/>
+        </p:spPr>
+        <p:txBody>
+          <a:bodyPr wrap="square">
+            <a:spAutoFit/>
+          </a:bodyPr>
+          <a:lstStyle/>
+          <a:p>
+            <a:pPr algn="l"/>
+            <a:r>
+              <a:rPr sz="2000" b="1" i="0">
+                <a:solidFill>
+                  <a:srgbClr val="1F2C56"/>
+                </a:solidFill>
+                <a:latin typeface="Source Serif 4"/>
+              </a:rPr>
+              <a:t>Werttreiberbaum für den Mittelstand</a:t>
+            </a:r>
           </a:p>
         </p:txBody>
       </p:sp>
@@ -5762,8 +7036,8 @@
         </p:nvSpPr>
         <p:spPr>
           <a:xfrm>
-            <a:off x="685800" y="502920"/>
-            <a:ext cx="36576" cy="658368"/>
+            <a:off x="685800" y="1143000"/>
+            <a:ext cx="10817352" cy="25400"/>
           </a:xfrm>
           <a:prstGeom prst="rect">
             <a:avLst/>
@@ -5797,86 +7071,33 @@
           </a:p>
         </p:txBody>
       </p:sp>
-      <p:sp>
-        <p:nvSpPr>
-          <p:cNvPr id="7" name="TextBox 6"/>
-          <p:cNvSpPr txBox="1"/>
-          <p:nvPr/>
-        </p:nvSpPr>
-        <p:spPr>
-          <a:xfrm>
-            <a:off x="813816" y="502920"/>
-            <a:ext cx="10634472" cy="685800"/>
-          </a:xfrm>
-          <a:prstGeom prst="rect">
-            <a:avLst/>
-          </a:prstGeom>
-          <a:noFill/>
-        </p:spPr>
-        <p:txBody>
-          <a:bodyPr wrap="square">
-            <a:spAutoFit/>
-          </a:bodyPr>
-          <a:lstStyle/>
-          <a:p>
-            <a:pPr algn="l"/>
-            <a:r>
-              <a:rPr sz="2400" b="1" i="0">
-                <a:solidFill>
-                  <a:srgbClr val="1F2C56"/>
-                </a:solidFill>
-                <a:latin typeface="Source Serif 4"/>
-              </a:rPr>
-              <a:t>Strategische Szenarien in der Beratungspraxis</a:t>
-            </a:r>
-          </a:p>
-        </p:txBody>
-      </p:sp>
-      <p:sp>
-        <p:nvSpPr>
-          <p:cNvPr id="8" name="TextBox 7"/>
-          <p:cNvSpPr txBox="1"/>
-          <p:nvPr/>
-        </p:nvSpPr>
-        <p:spPr>
-          <a:xfrm>
-            <a:off x="685800" y="1417320"/>
-            <a:ext cx="10817352" cy="5029200"/>
-          </a:xfrm>
-          <a:prstGeom prst="rect">
-            <a:avLst/>
-          </a:prstGeom>
-          <a:noFill/>
-        </p:spPr>
-        <p:txBody>
-          <a:bodyPr wrap="square">
-            <a:spAutoFit/>
-          </a:bodyPr>
-          <a:lstStyle/>
-          <a:p>
-            <a:pPr>
-              <a:spcBef>
-                <a:spcPts val="1000"/>
-              </a:spcBef>
-              <a:spcAft>
-                <a:spcPts val="200"/>
-              </a:spcAft>
-            </a:pPr>
-            <a:r>
-              <a:rPr sz="800" b="1">
-                <a:solidFill>
-                  <a:srgbClr val="78808C"/>
-                </a:solidFill>
-                <a:latin typeface="JetBrains Mono"/>
-              </a:rPr>
-              <a:t>DIE FÜNF KERNSZENARIEN</a:t>
-            </a:r>
-          </a:p>
-        </p:txBody>
-      </p:sp>
-      <p:sp>
-        <p:nvSpPr>
-          <p:cNvPr id="9" name="Rectangle 8"/>
+      <p:pic>
+        <p:nvPicPr>
+          <p:cNvPr id="7" name="Picture 6" descr="image.png"/>
+          <p:cNvPicPr>
+            <a:picLocks noChangeAspect="1"/>
+          </p:cNvPicPr>
+          <p:nvPr/>
+        </p:nvPicPr>
+        <p:blipFill>
+          <a:blip r:embed="rId2"/>
+          <a:stretch>
+            <a:fillRect/>
+          </a:stretch>
+        </p:blipFill>
+        <p:spPr>
+          <a:xfrm>
+            <a:off x="2303489" y="1325880"/>
+            <a:ext cx="7581973" cy="4937760"/>
+          </a:xfrm>
+          <a:prstGeom prst="rect">
+            <a:avLst/>
+          </a:prstGeom>
+        </p:spPr>
+      </p:pic>
+      <p:sp>
+        <p:nvSpPr>
+          <p:cNvPr id="8" name="Rectangle 7"/>
           <p:cNvSpPr/>
           <p:nvPr/>
         </p:nvSpPr>
@@ -5919,7 +7140,7 @@
       </p:sp>
       <p:sp>
         <p:nvSpPr>
-          <p:cNvPr id="10" name="TextBox 9"/>
+          <p:cNvPr id="9" name="TextBox 8"/>
           <p:cNvSpPr txBox="1"/>
           <p:nvPr/>
         </p:nvSpPr>
@@ -5948,6 +7169,41 @@
                 <a:latin typeface="JetBrains Mono"/>
               </a:rPr>
               <a:t>Benedikt Zoller Coaching  ·  FKB Campus  ·  M03</a:t>
+            </a:r>
+          </a:p>
+        </p:txBody>
+      </p:sp>
+      <p:sp>
+        <p:nvSpPr>
+          <p:cNvPr id="10" name="TextBox 9"/>
+          <p:cNvSpPr txBox="1"/>
+          <p:nvPr/>
+        </p:nvSpPr>
+        <p:spPr>
+          <a:xfrm>
+            <a:off x="7176211" y="6583680"/>
+            <a:ext cx="4326940" cy="256032"/>
+          </a:xfrm>
+          <a:prstGeom prst="rect">
+            <a:avLst/>
+          </a:prstGeom>
+          <a:noFill/>
+        </p:spPr>
+        <p:txBody>
+          <a:bodyPr wrap="none">
+            <a:spAutoFit/>
+          </a:bodyPr>
+          <a:lstStyle/>
+          <a:p>
+            <a:pPr algn="r"/>
+            <a:r>
+              <a:rPr sz="700">
+                <a:solidFill>
+                  <a:srgbClr val="A0B4D2"/>
+                </a:solidFill>
+                <a:latin typeface="JetBrains Mono"/>
+              </a:rPr>
+              <a:t>Schaubild</a:t>
             </a:r>
           </a:p>
         </p:txBody>
@@ -6207,7 +7463,7 @@
                 </a:solidFill>
                 <a:latin typeface="Source Serif 4"/>
               </a:rPr>
-              <a:t>Praxiscase: Habermaier Präzisionsteile GmbH &amp; Co. KG</a:t>
+              <a:t>Strategische Szenarien in der Beratungspraxis</a:t>
             </a:r>
           </a:p>
         </p:txBody>
@@ -6249,216 +7505,7 @@
                 </a:solidFill>
                 <a:latin typeface="JetBrains Mono"/>
               </a:rPr>
-              <a:t>UNTERNEHMENSPROFIL</a:t>
-            </a:r>
-          </a:p>
-          <a:p>
-            <a:pPr>
-              <a:spcBef>
-                <a:spcPts val="1000"/>
-              </a:spcBef>
-              <a:spcAft>
-                <a:spcPts val="200"/>
-              </a:spcAft>
-            </a:pPr>
-            <a:r>
-              <a:rPr sz="800" b="1">
-                <a:solidFill>
-                  <a:srgbClr val="78808C"/>
-                </a:solidFill>
-                <a:latin typeface="JetBrains Mono"/>
-              </a:rPr>
-              <a:t>FINANZKENNZAHLEN (GESCHÄFTSJAHRE)</a:t>
-            </a:r>
-          </a:p>
-          <a:p>
-            <a:pPr>
-              <a:spcBef>
-                <a:spcPts val="1000"/>
-              </a:spcBef>
-              <a:spcAft>
-                <a:spcPts val="200"/>
-              </a:spcAft>
-            </a:pPr>
-            <a:r>
-              <a:rPr sz="800" b="1">
-                <a:solidFill>
-                  <a:srgbClr val="78808C"/>
-                </a:solidFill>
-                <a:latin typeface="JetBrains Mono"/>
-              </a:rPr>
-              <a:t>STRATEGISCHE AUSGANGSLAGE</a:t>
-            </a:r>
-          </a:p>
-          <a:p>
-            <a:pPr>
-              <a:spcBef>
-                <a:spcPts val="400"/>
-              </a:spcBef>
-              <a:spcAft>
-                <a:spcPts val="200"/>
-              </a:spcAft>
-            </a:pPr>
-            <a:r>
-              <a:rPr sz="1200">
-                <a:solidFill>
-                  <a:srgbClr val="3D5466"/>
-                </a:solidFill>
-                <a:latin typeface="Arial"/>
-              </a:rPr>
-              <a:t>Stefan Habermaier hat Sie zum Jahresgespräch eingeladen. Im Vorlauf hat er angedeutet, dass er „größere Pläne" hat. Folgender Sachverhalt zeichnet sich ab:</a:t>
-            </a:r>
-          </a:p>
-          <a:p>
-            <a:pPr>
-              <a:spcBef>
-                <a:spcPts val="400"/>
-              </a:spcBef>
-              <a:spcAft>
-                <a:spcPts val="200"/>
-              </a:spcAft>
-            </a:pPr>
-            <a:r>
-              <a:rPr sz="1300">
-                <a:solidFill>
-                  <a:srgbClr val="3D5466"/>
-                </a:solidFill>
-                <a:latin typeface="Arial"/>
-              </a:rPr>
-              <a:t>▸  Ein Medizintechnik-Konzern (Auftragsvolumen derzeit 18 % vom Umsatz) hat eine langfristige Rahmenvereinbarung angeboten, die eine Umsatzsteigerung auf ca. 16 Mio. EUR ermöglicht – aber einen zweiten CNC-Bearbeitungszentrums-Park (Investitionsbedarf: 3,2 Mio. EUR) voraussetzt.</a:t>
-            </a:r>
-          </a:p>
-          <a:p>
-            <a:pPr>
-              <a:spcBef>
-                <a:spcPts val="400"/>
-              </a:spcBef>
-              <a:spcAft>
-                <a:spcPts val="200"/>
-              </a:spcAft>
-            </a:pPr>
-            <a:r>
-              <a:rPr sz="1300">
-                <a:solidFill>
-                  <a:srgbClr val="3D5466"/>
-                </a:solidFill>
-                <a:latin typeface="Arial"/>
-              </a:rPr>
-              <a:t>▸  Gleichzeitig hat ein süddeutscher Stratege-Investor Interesse an einer Minderheitsbeteiligung von 25,1 % signalisiert (Bewertung: 8x EBITDA = ca. 11,8 Mio. EUR Unternehmenswert).</a:t>
-            </a:r>
-          </a:p>
-          <a:p>
-            <a:pPr>
-              <a:spcBef>
-                <a:spcPts val="400"/>
-              </a:spcBef>
-              <a:spcAft>
-                <a:spcPts val="200"/>
-              </a:spcAft>
-            </a:pPr>
-            <a:r>
-              <a:rPr sz="1300">
-                <a:solidFill>
-                  <a:srgbClr val="3D5466"/>
-                </a:solidFill>
-                <a:latin typeface="Arial"/>
-              </a:rPr>
-              <a:t>▸  Stefan Habermaiers älterer Bruder (typisch stiller Gesellschafter, 15 % Anteil, ohne Stimmrecht und Verlustbeteiligung) möchte seinen Anteil mittelfristig veräußern. (Praxishinweis: Bei atypisch stiller Beteiligung mit Verlustbeteiligung wäre steuerlich und rechtlich ein Steuerberater/Rechtsanwalt frühzeitig einzuschalten – das Signal für den Berater ist die Frage nach Stimmrecht und Verlustbeteiligung.)</a:t>
-            </a:r>
-          </a:p>
-          <a:p>
-            <a:pPr>
-              <a:spcBef>
-                <a:spcPts val="1000"/>
-              </a:spcBef>
-              <a:spcAft>
-                <a:spcPts val="200"/>
-              </a:spcAft>
-            </a:pPr>
-            <a:r>
-              <a:rPr sz="800" b="1">
-                <a:solidFill>
-                  <a:srgbClr val="78808C"/>
-                </a:solidFill>
-                <a:latin typeface="JetBrains Mono"/>
-              </a:rPr>
-              <a:t>AUFGABENSTELLUNG</a:t>
-            </a:r>
-          </a:p>
-          <a:p>
-            <a:pPr>
-              <a:spcBef>
-                <a:spcPts val="1000"/>
-              </a:spcBef>
-              <a:spcAft>
-                <a:spcPts val="200"/>
-              </a:spcAft>
-            </a:pPr>
-            <a:r>
-              <a:rPr sz="800" b="1">
-                <a:solidFill>
-                  <a:srgbClr val="78808C"/>
-                </a:solidFill>
-                <a:latin typeface="JetBrains Mono"/>
-              </a:rPr>
-              <a:t>VR-BANK VS. INVESTOR – MUSTERFORMULIERUNGEN FÜR A3</a:t>
-            </a:r>
-          </a:p>
-          <a:p>
-            <a:pPr>
-              <a:spcBef>
-                <a:spcPts val="1000"/>
-              </a:spcBef>
-              <a:spcAft>
-                <a:spcPts val="200"/>
-              </a:spcAft>
-            </a:pPr>
-            <a:r>
-              <a:rPr sz="800" b="1">
-                <a:solidFill>
-                  <a:srgbClr val="78808C"/>
-                </a:solidFill>
-                <a:latin typeface="JetBrains Mono"/>
-              </a:rPr>
-              <a:t>SZENARIO-ANALYSE</a:t>
-            </a:r>
-          </a:p>
-          <a:p>
-            <a:pPr>
-              <a:spcBef>
-                <a:spcPts val="400"/>
-              </a:spcBef>
-              <a:spcAft>
-                <a:spcPts val="200"/>
-              </a:spcAft>
-            </a:pPr>
-            <a:r>
-              <a:rPr sz="1200">
-                <a:solidFill>
-                  <a:srgbClr val="3D5466"/>
-                </a:solidFill>
-                <a:latin typeface="Arial"/>
-              </a:rPr>
-              <a:t>Schritt 1: Kennzahlenanalyse Ist-Situation (Jahr 4)</a:t>
-            </a:r>
-          </a:p>
-          <a:p>
-            <a:pPr>
-              <a:spcBef>
-                <a:spcPts val="400"/>
-              </a:spcBef>
-              <a:spcAft>
-                <a:spcPts val="200"/>
-              </a:spcAft>
-            </a:pPr>
-            <a:r>
-              <a:rPr sz="1200">
-                <a:solidFill>
-                  <a:srgbClr val="3D5466"/>
-                </a:solidFill>
-                <a:latin typeface="Arial"/>
-              </a:rPr>
-              <a:t>Schritt 2: Szenario-Vergleich nach Investition (3,2 Mio. EUR)</a:t>
+              <a:t>DIE FÜNF KERNSZENARIEN</a:t>
             </a:r>
           </a:p>
         </p:txBody>
@@ -6675,7 +7722,7 @@
                 </a:solidFill>
                 <a:latin typeface="JetBrains Mono"/>
               </a:rPr>
-              <a:t>M03  ·  INHALT</a:t>
+              <a:t>M03  ·  ARBEITSBLATT</a:t>
             </a:r>
           </a:p>
         </p:txBody>
@@ -6796,7 +7843,7 @@
                 </a:solidFill>
                 <a:latin typeface="Source Serif 4"/>
               </a:rPr>
-              <a:t>Liquiditäts- und Wachstumsplanung</a:t>
+              <a:t>Praxiscase: Habermaier Präzisionsteile GmbH &amp; Co. KG</a:t>
             </a:r>
           </a:p>
         </p:txBody>
@@ -6809,8 +7856,8 @@
         </p:nvSpPr>
         <p:spPr>
           <a:xfrm>
-            <a:off x="685800" y="1417320"/>
-            <a:ext cx="10817352" cy="5029200"/>
+            <a:off x="685800" y="1554480"/>
+            <a:ext cx="10817352" cy="3840480"/>
           </a:xfrm>
           <a:prstGeom prst="rect">
             <a:avLst/>
@@ -6822,25 +7869,6 @@
             <a:spAutoFit/>
           </a:bodyPr>
           <a:lstStyle/>
-          <a:p>
-            <a:pPr>
-              <a:spcBef>
-                <a:spcPts val="1000"/>
-              </a:spcBef>
-              <a:spcAft>
-                <a:spcPts val="200"/>
-              </a:spcAft>
-            </a:pPr>
-            <a:r>
-              <a:rPr sz="800" b="1">
-                <a:solidFill>
-                  <a:srgbClr val="78808C"/>
-                </a:solidFill>
-                <a:latin typeface="JetBrains Mono"/>
-              </a:rPr>
-              <a:t>WORKING CAPITAL UND CASH CONVERSION CYCLE</a:t>
-            </a:r>
-          </a:p>
           <a:p>
             <a:pPr>
               <a:spcBef>
@@ -6851,13 +7879,13 @@
               </a:spcAft>
             </a:pPr>
             <a:r>
-              <a:rPr sz="1200">
+              <a:rPr sz="1400">
                 <a:solidFill>
                   <a:srgbClr val="3D5466"/>
                 </a:solidFill>
                 <a:latin typeface="Arial"/>
               </a:rPr>
-              <a:t>Formel Betriebsmittelbedarf: Betriebsmittelbedarf = Umsatzwachstum (EUR) × CCC (Tage) / 365</a:t>
+              <a:t>▸  Unternehmensprofil</a:t>
             </a:r>
           </a:p>
           <a:p>
@@ -6870,32 +7898,70 @@
               </a:spcAft>
             </a:pPr>
             <a:r>
-              <a:rPr sz="1200">
+              <a:rPr sz="1400">
                 <a:solidFill>
                   <a:srgbClr val="3D5466"/>
                 </a:solidFill>
                 <a:latin typeface="Arial"/>
               </a:rPr>
-              <a:t>Beispiel: Umsatzwachstum +3,0 Mio. EUR, CCC 58 Tage → Betriebsmittelbedarf: 3.000 TEUR × 58/365 = ca. 477 TEUR zusätzlich</a:t>
+              <a:t>▸  Finanzkennzahlen (Geschäftsjahre)</a:t>
             </a:r>
           </a:p>
           <a:p>
             <a:pPr>
               <a:spcBef>
-                <a:spcPts val="1000"/>
+                <a:spcPts val="400"/>
               </a:spcBef>
               <a:spcAft>
                 <a:spcPts val="200"/>
               </a:spcAft>
             </a:pPr>
             <a:r>
-              <a:rPr sz="800" b="1">
+              <a:rPr sz="1400">
                 <a:solidFill>
-                  <a:srgbClr val="78808C"/>
+                  <a:srgbClr val="3D5466"/>
                 </a:solidFill>
-                <a:latin typeface="JetBrains Mono"/>
+                <a:latin typeface="Arial"/>
               </a:rPr>
-              <a:t>INSTRUMENTE DER WACHSTUMSFINANZIERUNG</a:t>
+              <a:t>▸  Strategische Ausgangslage</a:t>
+            </a:r>
+          </a:p>
+          <a:p>
+            <a:pPr>
+              <a:spcBef>
+                <a:spcPts val="400"/>
+              </a:spcBef>
+              <a:spcAft>
+                <a:spcPts val="200"/>
+              </a:spcAft>
+            </a:pPr>
+            <a:r>
+              <a:rPr sz="1400">
+                <a:solidFill>
+                  <a:srgbClr val="3D5466"/>
+                </a:solidFill>
+                <a:latin typeface="Arial"/>
+              </a:rPr>
+              <a:t>▸  Stefan Habermaier hat Sie zum Jahresgespräch eingeladen. Im Vorlauf hat er angedeutet, dass er „größere Pläne" hat. Folgender Sachverhalt zeichnet sich ab:</a:t>
+            </a:r>
+          </a:p>
+          <a:p>
+            <a:pPr>
+              <a:spcBef>
+                <a:spcPts val="400"/>
+              </a:spcBef>
+              <a:spcAft>
+                <a:spcPts val="200"/>
+              </a:spcAft>
+            </a:pPr>
+            <a:r>
+              <a:rPr sz="1400">
+                <a:solidFill>
+                  <a:srgbClr val="3D5466"/>
+                </a:solidFill>
+                <a:latin typeface="Arial"/>
+              </a:rPr>
+              <a:t>▸  Ein Medizintechnik-Konzern (Auftragsvolumen derzeit 18 % vom Umsatz) hat eine langfristige Rahmenvereinbarung angeboten, die eine Umsatzsteigerung auf ca. 16 Mio. EUR ermöglicht – aber einen zweiten CNC-Bearbeitungszentrums-Park (Investitionsbedarf: 3,2 Mio. EUR) voraussetzt.</a:t>
             </a:r>
           </a:p>
         </p:txBody>
@@ -6903,6 +7969,84 @@
       <p:sp>
         <p:nvSpPr>
           <p:cNvPr id="9" name="Rectangle 8"/>
+          <p:cNvSpPr/>
+          <p:nvPr/>
+        </p:nvSpPr>
+        <p:spPr>
+          <a:xfrm>
+            <a:off x="685800" y="5486400"/>
+            <a:ext cx="10817352" cy="640080"/>
+          </a:xfrm>
+          <a:prstGeom prst="rect">
+            <a:avLst/>
+          </a:prstGeom>
+          <a:solidFill>
+            <a:srgbClr val="1F2C56"/>
+          </a:solidFill>
+          <a:ln>
+            <a:noFill/>
+          </a:ln>
+        </p:spPr>
+        <p:style>
+          <a:lnRef idx="1">
+            <a:schemeClr val="accent1"/>
+          </a:lnRef>
+          <a:fillRef idx="3">
+            <a:schemeClr val="accent1"/>
+          </a:fillRef>
+          <a:effectRef idx="2">
+            <a:schemeClr val="accent1"/>
+          </a:effectRef>
+          <a:fontRef idx="minor">
+            <a:schemeClr val="lt1"/>
+          </a:fontRef>
+        </p:style>
+        <p:txBody>
+          <a:bodyPr rtlCol="0" anchor="ctr"/>
+          <a:lstStyle/>
+          <a:p>
+            <a:pPr algn="ctr"/>
+          </a:p>
+        </p:txBody>
+      </p:sp>
+      <p:sp>
+        <p:nvSpPr>
+          <p:cNvPr id="10" name="TextBox 9"/>
+          <p:cNvSpPr txBox="1"/>
+          <p:nvPr/>
+        </p:nvSpPr>
+        <p:spPr>
+          <a:xfrm>
+            <a:off x="868680" y="5596128"/>
+            <a:ext cx="10451592" cy="457200"/>
+          </a:xfrm>
+          <a:prstGeom prst="rect">
+            <a:avLst/>
+          </a:prstGeom>
+          <a:noFill/>
+        </p:spPr>
+        <p:txBody>
+          <a:bodyPr wrap="square">
+            <a:spAutoFit/>
+          </a:bodyPr>
+          <a:lstStyle/>
+          <a:p>
+            <a:pPr algn="l"/>
+            <a:r>
+              <a:rPr sz="1300" b="1" i="0">
+                <a:solidFill>
+                  <a:srgbClr val="FFFFFF"/>
+                </a:solidFill>
+                <a:latin typeface="Arial"/>
+              </a:rPr>
+              <a:t>→  Bearbeitung im Teilnehmer-Workbook (Arbeitsblatt mit Ausfüllfeldern)</a:t>
+            </a:r>
+          </a:p>
+        </p:txBody>
+      </p:sp>
+      <p:sp>
+        <p:nvSpPr>
+          <p:cNvPr id="11" name="Rectangle 10"/>
           <p:cNvSpPr/>
           <p:nvPr/>
         </p:nvSpPr>
@@ -6945,7 +8089,7 @@
       </p:sp>
       <p:sp>
         <p:nvSpPr>
-          <p:cNvPr id="10" name="TextBox 9"/>
+          <p:cNvPr id="12" name="TextBox 11"/>
           <p:cNvSpPr txBox="1"/>
           <p:nvPr/>
         </p:nvSpPr>
@@ -7304,4 +8448,324 @@
   </a:objectDefaults>
   <a:extraClrSchemeLst/>
 </a:theme>
+</file>
+
+<file path=ppt/theme/theme2.xml><?xml version="1.0" encoding="utf-8"?>
+<a:theme xmlns:a="http://schemas.openxmlformats.org/drawingml/2006/main" name="Office Theme">
+  <a:themeElements>
+    <a:clrScheme name="Office">
+      <a:dk1>
+        <a:sysClr val="windowText" lastClr="000000"/>
+      </a:dk1>
+      <a:lt1>
+        <a:sysClr val="window" lastClr="FFFFFF"/>
+      </a:lt1>
+      <a:dk2>
+        <a:srgbClr val="1F497D"/>
+      </a:dk2>
+      <a:lt2>
+        <a:srgbClr val="EEECE1"/>
+      </a:lt2>
+      <a:accent1>
+        <a:srgbClr val="4F81BD"/>
+      </a:accent1>
+      <a:accent2>
+        <a:srgbClr val="C0504D"/>
+      </a:accent2>
+      <a:accent3>
+        <a:srgbClr val="9BBB59"/>
+      </a:accent3>
+      <a:accent4>
+        <a:srgbClr val="8064A2"/>
+      </a:accent4>
+      <a:accent5>
+        <a:srgbClr val="4BACC6"/>
+      </a:accent5>
+      <a:accent6>
+        <a:srgbClr val="F79646"/>
+      </a:accent6>
+      <a:hlink>
+        <a:srgbClr val="0000FF"/>
+      </a:hlink>
+      <a:folHlink>
+        <a:srgbClr val="800080"/>
+      </a:folHlink>
+    </a:clrScheme>
+    <a:fontScheme name="Office">
+      <a:majorFont>
+        <a:latin typeface="Calibri"/>
+        <a:ea typeface=""/>
+        <a:cs typeface=""/>
+        <a:font script="Jpan" typeface="ＭＳ Ｐゴシック"/>
+        <a:font script="Hang" typeface="맑은 고딕"/>
+        <a:font script="Hans" typeface="宋体"/>
+        <a:font script="Hant" typeface="新細明體"/>
+        <a:font script="Arab" typeface="Times New Roman"/>
+        <a:font script="Hebr" typeface="Times New Roman"/>
+        <a:font script="Thai" typeface="Angsana New"/>
+        <a:font script="Ethi" typeface="Nyala"/>
+        <a:font script="Beng" typeface="Vrinda"/>
+        <a:font script="Gujr" typeface="Shruti"/>
+        <a:font script="Khmr" typeface="MoolBoran"/>
+        <a:font script="Knda" typeface="Tunga"/>
+        <a:font script="Guru" typeface="Raavi"/>
+        <a:font script="Cans" typeface="Euphemia"/>
+        <a:font script="Cher" typeface="Plantagenet Cherokee"/>
+        <a:font script="Yiii" typeface="Microsoft Yi Baiti"/>
+        <a:font script="Tibt" typeface="Microsoft Himalaya"/>
+        <a:font script="Thaa" typeface="MV Boli"/>
+        <a:font script="Deva" typeface="Mangal"/>
+        <a:font script="Telu" typeface="Gautami"/>
+        <a:font script="Taml" typeface="Latha"/>
+        <a:font script="Syrc" typeface="Estrangelo Edessa"/>
+        <a:font script="Orya" typeface="Kalinga"/>
+        <a:font script="Mlym" typeface="Kartika"/>
+        <a:font script="Laoo" typeface="DokChampa"/>
+        <a:font script="Sinh" typeface="Iskoola Pota"/>
+        <a:font script="Mong" typeface="Mongolian Baiti"/>
+        <a:font script="Viet" typeface="Times New Roman"/>
+        <a:font script="Uigh" typeface="Microsoft Uighur"/>
+        <a:font script="Geor" typeface="Sylfaen"/>
+      </a:majorFont>
+      <a:minorFont>
+        <a:latin typeface="Calibri"/>
+        <a:ea typeface=""/>
+        <a:cs typeface=""/>
+        <a:font script="Jpan" typeface="ＭＳ Ｐゴシック"/>
+        <a:font script="Hang" typeface="맑은 고딕"/>
+        <a:font script="Hans" typeface="宋体"/>
+        <a:font script="Hant" typeface="新細明體"/>
+        <a:font script="Arab" typeface="Arial"/>
+        <a:font script="Hebr" typeface="Arial"/>
+        <a:font script="Thai" typeface="Cordia New"/>
+        <a:font script="Ethi" typeface="Nyala"/>
+        <a:font script="Beng" typeface="Vrinda"/>
+        <a:font script="Gujr" typeface="Shruti"/>
+        <a:font script="Khmr" typeface="DaunPenh"/>
+        <a:font script="Knda" typeface="Tunga"/>
+        <a:font script="Guru" typeface="Raavi"/>
+        <a:font script="Cans" typeface="Euphemia"/>
+        <a:font script="Cher" typeface="Plantagenet Cherokee"/>
+        <a:font script="Yiii" typeface="Microsoft Yi Baiti"/>
+        <a:font script="Tibt" typeface="Microsoft Himalaya"/>
+        <a:font script="Thaa" typeface="MV Boli"/>
+        <a:font script="Deva" typeface="Mangal"/>
+        <a:font script="Telu" typeface="Gautami"/>
+        <a:font script="Taml" typeface="Latha"/>
+        <a:font script="Syrc" typeface="Estrangelo Edessa"/>
+        <a:font script="Orya" typeface="Kalinga"/>
+        <a:font script="Mlym" typeface="Kartika"/>
+        <a:font script="Laoo" typeface="DokChampa"/>
+        <a:font script="Sinh" typeface="Iskoola Pota"/>
+        <a:font script="Mong" typeface="Mongolian Baiti"/>
+        <a:font script="Viet" typeface="Arial"/>
+        <a:font script="Uigh" typeface="Microsoft Uighur"/>
+        <a:font script="Geor" typeface="Sylfaen"/>
+      </a:minorFont>
+    </a:fontScheme>
+    <a:fmtScheme name="Office">
+      <a:fillStyleLst>
+        <a:solidFill>
+          <a:schemeClr val="phClr"/>
+        </a:solidFill>
+        <a:gradFill rotWithShape="1">
+          <a:gsLst>
+            <a:gs pos="0">
+              <a:schemeClr val="phClr">
+                <a:tint val="50000"/>
+                <a:satMod val="300000"/>
+              </a:schemeClr>
+            </a:gs>
+            <a:gs pos="35000">
+              <a:schemeClr val="phClr">
+                <a:tint val="37000"/>
+                <a:satMod val="300000"/>
+              </a:schemeClr>
+            </a:gs>
+            <a:gs pos="100000">
+              <a:schemeClr val="phClr">
+                <a:tint val="15000"/>
+                <a:satMod val="350000"/>
+              </a:schemeClr>
+            </a:gs>
+          </a:gsLst>
+          <a:lin ang="16200000" scaled="1"/>
+        </a:gradFill>
+        <a:gradFill rotWithShape="1">
+          <a:gsLst>
+            <a:gs pos="0">
+              <a:schemeClr val="phClr">
+                <a:tint val="100000"/>
+                <a:shade val="100000"/>
+                <a:satMod val="130000"/>
+              </a:schemeClr>
+            </a:gs>
+            <a:gs pos="100000">
+              <a:schemeClr val="phClr">
+                <a:tint val="50000"/>
+                <a:shade val="100000"/>
+                <a:satMod val="350000"/>
+              </a:schemeClr>
+            </a:gs>
+          </a:gsLst>
+          <a:lin ang="16200000" scaled="0"/>
+        </a:gradFill>
+      </a:fillStyleLst>
+      <a:lnStyleLst>
+        <a:ln w="9525" cap="flat" cmpd="sng" algn="ctr">
+          <a:solidFill>
+            <a:schemeClr val="phClr">
+              <a:shade val="95000"/>
+              <a:satMod val="105000"/>
+            </a:schemeClr>
+          </a:solidFill>
+          <a:prstDash val="solid"/>
+        </a:ln>
+        <a:ln w="25400" cap="flat" cmpd="sng" algn="ctr">
+          <a:solidFill>
+            <a:schemeClr val="phClr"/>
+          </a:solidFill>
+          <a:prstDash val="solid"/>
+        </a:ln>
+        <a:ln w="38100" cap="flat" cmpd="sng" algn="ctr">
+          <a:solidFill>
+            <a:schemeClr val="phClr"/>
+          </a:solidFill>
+          <a:prstDash val="solid"/>
+        </a:ln>
+      </a:lnStyleLst>
+      <a:effectStyleLst>
+        <a:effectStyle>
+          <a:effectLst>
+            <a:outerShdw blurRad="40000" dist="20000" dir="5400000" rotWithShape="0">
+              <a:srgbClr val="000000">
+                <a:alpha val="38000"/>
+              </a:srgbClr>
+            </a:outerShdw>
+          </a:effectLst>
+        </a:effectStyle>
+        <a:effectStyle>
+          <a:effectLst>
+            <a:outerShdw blurRad="40000" dist="23000" dir="5400000" rotWithShape="0">
+              <a:srgbClr val="000000">
+                <a:alpha val="35000"/>
+              </a:srgbClr>
+            </a:outerShdw>
+          </a:effectLst>
+        </a:effectStyle>
+        <a:effectStyle>
+          <a:effectLst>
+            <a:outerShdw blurRad="40000" dist="23000" dir="5400000" rotWithShape="0">
+              <a:srgbClr val="000000">
+                <a:alpha val="35000"/>
+              </a:srgbClr>
+            </a:outerShdw>
+          </a:effectLst>
+          <a:scene3d>
+            <a:camera prst="orthographicFront">
+              <a:rot lat="0" lon="0" rev="0"/>
+            </a:camera>
+            <a:lightRig rig="threePt" dir="t">
+              <a:rot lat="0" lon="0" rev="1200000"/>
+            </a:lightRig>
+          </a:scene3d>
+          <a:sp3d>
+            <a:bevelT w="63500" h="25400"/>
+          </a:sp3d>
+        </a:effectStyle>
+      </a:effectStyleLst>
+      <a:bgFillStyleLst>
+        <a:solidFill>
+          <a:schemeClr val="phClr"/>
+        </a:solidFill>
+        <a:gradFill rotWithShape="1">
+          <a:gsLst>
+            <a:gs pos="0">
+              <a:schemeClr val="phClr">
+                <a:tint val="40000"/>
+                <a:satMod val="350000"/>
+              </a:schemeClr>
+            </a:gs>
+            <a:gs pos="40000">
+              <a:schemeClr val="phClr">
+                <a:tint val="45000"/>
+                <a:shade val="99000"/>
+                <a:satMod val="350000"/>
+              </a:schemeClr>
+            </a:gs>
+            <a:gs pos="100000">
+              <a:schemeClr val="phClr">
+                <a:shade val="20000"/>
+                <a:satMod val="255000"/>
+              </a:schemeClr>
+            </a:gs>
+          </a:gsLst>
+          <a:path path="circle">
+            <a:fillToRect l="50000" t="-80000" r="50000" b="180000"/>
+          </a:path>
+        </a:gradFill>
+        <a:gradFill rotWithShape="1">
+          <a:gsLst>
+            <a:gs pos="0">
+              <a:schemeClr val="phClr">
+                <a:tint val="80000"/>
+                <a:satMod val="300000"/>
+              </a:schemeClr>
+            </a:gs>
+            <a:gs pos="100000">
+              <a:schemeClr val="phClr">
+                <a:shade val="30000"/>
+                <a:satMod val="200000"/>
+              </a:schemeClr>
+            </a:gs>
+          </a:gsLst>
+          <a:path path="circle">
+            <a:fillToRect l="50000" t="50000" r="50000" b="50000"/>
+          </a:path>
+        </a:gradFill>
+      </a:bgFillStyleLst>
+    </a:fmtScheme>
+  </a:themeElements>
+  <a:objectDefaults>
+    <a:spDef>
+      <a:spPr/>
+      <a:bodyPr/>
+      <a:lstStyle/>
+      <a:style>
+        <a:lnRef idx="1">
+          <a:schemeClr val="accent1"/>
+        </a:lnRef>
+        <a:fillRef idx="3">
+          <a:schemeClr val="accent1"/>
+        </a:fillRef>
+        <a:effectRef idx="2">
+          <a:schemeClr val="accent1"/>
+        </a:effectRef>
+        <a:fontRef idx="minor">
+          <a:schemeClr val="lt1"/>
+        </a:fontRef>
+      </a:style>
+    </a:spDef>
+    <a:lnDef>
+      <a:spPr/>
+      <a:bodyPr/>
+      <a:lstStyle/>
+      <a:style>
+        <a:lnRef idx="2">
+          <a:schemeClr val="accent1"/>
+        </a:lnRef>
+        <a:fillRef idx="0">
+          <a:schemeClr val="accent1"/>
+        </a:fillRef>
+        <a:effectRef idx="1">
+          <a:schemeClr val="accent1"/>
+        </a:effectRef>
+        <a:fontRef idx="minor">
+          <a:schemeClr val="tx1"/>
+        </a:fontRef>
+      </a:style>
+    </a:lnDef>
+  </a:objectDefaults>
+  <a:extraClrSchemeLst/>
+</a:theme>
 </file>
--- a/protected-downloads/praesentation/M03.pptx
+++ b/protected-downloads/praesentation/M03.pptx
@@ -4251,7 +4251,7 @@
                 </a:solidFill>
                 <a:latin typeface="Arial"/>
               </a:rPr>
-              <a:t>Stratege</a:t>
+              <a:t>Strategischer Partner</a:t>
             </a:r>
           </a:p>
         </p:txBody>

--- a/protected-downloads/praesentation/M03.pptx
+++ b/protected-downloads/praesentation/M03.pptx
@@ -8,13 +8,14 @@
     <p:sldId id="256" r:id="rId7"/>
     <p:sldId id="257" r:id="rId8"/>
     <p:sldId id="258" r:id="rId9"/>
-    <p:sldId id="259" r:id="rId11"/>
+    <p:sldId id="259" r:id="rId10"/>
     <p:sldId id="260" r:id="rId12"/>
     <p:sldId id="261" r:id="rId13"/>
     <p:sldId id="262" r:id="rId14"/>
     <p:sldId id="263" r:id="rId15"/>
     <p:sldId id="264" r:id="rId16"/>
     <p:sldId id="265" r:id="rId17"/>
+    <p:sldId id="266" r:id="rId18"/>
   </p:sldIdLst>
   <p:sldSz cx="12188952" cy="6858000" type="screen4x3"/>
   <p:notesSz cx="6858000" cy="9144000"/>
@@ -4573,6 +4574,540 @@
                 </a:solidFill>
                 <a:latin typeface="JetBrains Mono"/>
               </a:rPr>
+              <a:t>M03  ·  ARBEITSBLATT</a:t>
+            </a:r>
+          </a:p>
+        </p:txBody>
+      </p:sp>
+      <p:sp>
+        <p:nvSpPr>
+          <p:cNvPr id="5" name="Rectangle 4"/>
+          <p:cNvSpPr/>
+          <p:nvPr/>
+        </p:nvSpPr>
+        <p:spPr>
+          <a:xfrm>
+            <a:off x="0" y="1234440"/>
+            <a:ext cx="12188952" cy="12700"/>
+          </a:xfrm>
+          <a:prstGeom prst="rect">
+            <a:avLst/>
+          </a:prstGeom>
+          <a:solidFill>
+            <a:srgbClr val="D8DFE4"/>
+          </a:solidFill>
+          <a:ln>
+            <a:noFill/>
+          </a:ln>
+        </p:spPr>
+        <p:style>
+          <a:lnRef idx="1">
+            <a:schemeClr val="accent1"/>
+          </a:lnRef>
+          <a:fillRef idx="3">
+            <a:schemeClr val="accent1"/>
+          </a:fillRef>
+          <a:effectRef idx="2">
+            <a:schemeClr val="accent1"/>
+          </a:effectRef>
+          <a:fontRef idx="minor">
+            <a:schemeClr val="lt1"/>
+          </a:fontRef>
+        </p:style>
+        <p:txBody>
+          <a:bodyPr rtlCol="0" anchor="ctr"/>
+          <a:lstStyle/>
+          <a:p>
+            <a:pPr algn="ctr"/>
+          </a:p>
+        </p:txBody>
+      </p:sp>
+      <p:sp>
+        <p:nvSpPr>
+          <p:cNvPr id="6" name="Rectangle 5"/>
+          <p:cNvSpPr/>
+          <p:nvPr/>
+        </p:nvSpPr>
+        <p:spPr>
+          <a:xfrm>
+            <a:off x="685800" y="502920"/>
+            <a:ext cx="36576" cy="658368"/>
+          </a:xfrm>
+          <a:prstGeom prst="rect">
+            <a:avLst/>
+          </a:prstGeom>
+          <a:solidFill>
+            <a:srgbClr val="D9C089"/>
+          </a:solidFill>
+          <a:ln>
+            <a:noFill/>
+          </a:ln>
+        </p:spPr>
+        <p:style>
+          <a:lnRef idx="1">
+            <a:schemeClr val="accent1"/>
+          </a:lnRef>
+          <a:fillRef idx="3">
+            <a:schemeClr val="accent1"/>
+          </a:fillRef>
+          <a:effectRef idx="2">
+            <a:schemeClr val="accent1"/>
+          </a:effectRef>
+          <a:fontRef idx="minor">
+            <a:schemeClr val="lt1"/>
+          </a:fontRef>
+        </p:style>
+        <p:txBody>
+          <a:bodyPr rtlCol="0" anchor="ctr"/>
+          <a:lstStyle/>
+          <a:p>
+            <a:pPr algn="ctr"/>
+          </a:p>
+        </p:txBody>
+      </p:sp>
+      <p:sp>
+        <p:nvSpPr>
+          <p:cNvPr id="7" name="TextBox 6"/>
+          <p:cNvSpPr txBox="1"/>
+          <p:nvPr/>
+        </p:nvSpPr>
+        <p:spPr>
+          <a:xfrm>
+            <a:off x="813816" y="502920"/>
+            <a:ext cx="10634472" cy="685800"/>
+          </a:xfrm>
+          <a:prstGeom prst="rect">
+            <a:avLst/>
+          </a:prstGeom>
+          <a:noFill/>
+        </p:spPr>
+        <p:txBody>
+          <a:bodyPr wrap="square">
+            <a:spAutoFit/>
+          </a:bodyPr>
+          <a:lstStyle/>
+          <a:p>
+            <a:pPr algn="l"/>
+            <a:r>
+              <a:rPr sz="2400" b="1" i="0">
+                <a:solidFill>
+                  <a:srgbClr val="1F2C56"/>
+                </a:solidFill>
+                <a:latin typeface="Source Serif 4"/>
+              </a:rPr>
+              <a:t>Praxiscase: Habermaier Präzisionsteile GmbH &amp; Co. KG</a:t>
+            </a:r>
+          </a:p>
+        </p:txBody>
+      </p:sp>
+      <p:sp>
+        <p:nvSpPr>
+          <p:cNvPr id="8" name="TextBox 7"/>
+          <p:cNvSpPr txBox="1"/>
+          <p:nvPr/>
+        </p:nvSpPr>
+        <p:spPr>
+          <a:xfrm>
+            <a:off x="685800" y="1554480"/>
+            <a:ext cx="10817352" cy="3840480"/>
+          </a:xfrm>
+          <a:prstGeom prst="rect">
+            <a:avLst/>
+          </a:prstGeom>
+          <a:noFill/>
+        </p:spPr>
+        <p:txBody>
+          <a:bodyPr wrap="square">
+            <a:spAutoFit/>
+          </a:bodyPr>
+          <a:lstStyle/>
+          <a:p>
+            <a:pPr>
+              <a:spcBef>
+                <a:spcPts val="400"/>
+              </a:spcBef>
+              <a:spcAft>
+                <a:spcPts val="200"/>
+              </a:spcAft>
+            </a:pPr>
+            <a:r>
+              <a:rPr sz="1400">
+                <a:solidFill>
+                  <a:srgbClr val="3D5466"/>
+                </a:solidFill>
+                <a:latin typeface="Arial"/>
+              </a:rPr>
+              <a:t>▸  Unternehmensprofil</a:t>
+            </a:r>
+          </a:p>
+          <a:p>
+            <a:pPr>
+              <a:spcBef>
+                <a:spcPts val="400"/>
+              </a:spcBef>
+              <a:spcAft>
+                <a:spcPts val="200"/>
+              </a:spcAft>
+            </a:pPr>
+            <a:r>
+              <a:rPr sz="1400">
+                <a:solidFill>
+                  <a:srgbClr val="3D5466"/>
+                </a:solidFill>
+                <a:latin typeface="Arial"/>
+              </a:rPr>
+              <a:t>▸  Finanzkennzahlen (Geschäftsjahre)</a:t>
+            </a:r>
+          </a:p>
+          <a:p>
+            <a:pPr>
+              <a:spcBef>
+                <a:spcPts val="400"/>
+              </a:spcBef>
+              <a:spcAft>
+                <a:spcPts val="200"/>
+              </a:spcAft>
+            </a:pPr>
+            <a:r>
+              <a:rPr sz="1400">
+                <a:solidFill>
+                  <a:srgbClr val="3D5466"/>
+                </a:solidFill>
+                <a:latin typeface="Arial"/>
+              </a:rPr>
+              <a:t>▸  Strategische Ausgangslage</a:t>
+            </a:r>
+          </a:p>
+          <a:p>
+            <a:pPr>
+              <a:spcBef>
+                <a:spcPts val="400"/>
+              </a:spcBef>
+              <a:spcAft>
+                <a:spcPts val="200"/>
+              </a:spcAft>
+            </a:pPr>
+            <a:r>
+              <a:rPr sz="1400">
+                <a:solidFill>
+                  <a:srgbClr val="3D5466"/>
+                </a:solidFill>
+                <a:latin typeface="Arial"/>
+              </a:rPr>
+              <a:t>▸  Stefan Habermaier hat Sie zum Jahresgespräch eingeladen. Im Vorlauf hat er angedeutet, dass er „größere Pläne" hat. Folgender Sachverhalt zeichnet sich ab:</a:t>
+            </a:r>
+          </a:p>
+          <a:p>
+            <a:pPr>
+              <a:spcBef>
+                <a:spcPts val="400"/>
+              </a:spcBef>
+              <a:spcAft>
+                <a:spcPts val="200"/>
+              </a:spcAft>
+            </a:pPr>
+            <a:r>
+              <a:rPr sz="1400">
+                <a:solidFill>
+                  <a:srgbClr val="3D5466"/>
+                </a:solidFill>
+                <a:latin typeface="Arial"/>
+              </a:rPr>
+              <a:t>▸  Ein Medizintechnik-Konzern (Auftragsvolumen derzeit 18 % vom Umsatz) hat eine langfristige Rahmenvereinbarung angeboten, die eine Umsatzsteigerung auf ca. 16 Mio. EUR ermöglicht – aber einen zweiten CNC-Bearbeitungszentrums-Park (Investitionsbedarf: 3,2 Mio. EUR) voraussetzt.</a:t>
+            </a:r>
+          </a:p>
+        </p:txBody>
+      </p:sp>
+      <p:sp>
+        <p:nvSpPr>
+          <p:cNvPr id="9" name="Rectangle 8"/>
+          <p:cNvSpPr/>
+          <p:nvPr/>
+        </p:nvSpPr>
+        <p:spPr>
+          <a:xfrm>
+            <a:off x="685800" y="5486400"/>
+            <a:ext cx="10817352" cy="640080"/>
+          </a:xfrm>
+          <a:prstGeom prst="rect">
+            <a:avLst/>
+          </a:prstGeom>
+          <a:solidFill>
+            <a:srgbClr val="1F2C56"/>
+          </a:solidFill>
+          <a:ln>
+            <a:noFill/>
+          </a:ln>
+        </p:spPr>
+        <p:style>
+          <a:lnRef idx="1">
+            <a:schemeClr val="accent1"/>
+          </a:lnRef>
+          <a:fillRef idx="3">
+            <a:schemeClr val="accent1"/>
+          </a:fillRef>
+          <a:effectRef idx="2">
+            <a:schemeClr val="accent1"/>
+          </a:effectRef>
+          <a:fontRef idx="minor">
+            <a:schemeClr val="lt1"/>
+          </a:fontRef>
+        </p:style>
+        <p:txBody>
+          <a:bodyPr rtlCol="0" anchor="ctr"/>
+          <a:lstStyle/>
+          <a:p>
+            <a:pPr algn="ctr"/>
+          </a:p>
+        </p:txBody>
+      </p:sp>
+      <p:sp>
+        <p:nvSpPr>
+          <p:cNvPr id="10" name="TextBox 9"/>
+          <p:cNvSpPr txBox="1"/>
+          <p:nvPr/>
+        </p:nvSpPr>
+        <p:spPr>
+          <a:xfrm>
+            <a:off x="868680" y="5596128"/>
+            <a:ext cx="10451592" cy="457200"/>
+          </a:xfrm>
+          <a:prstGeom prst="rect">
+            <a:avLst/>
+          </a:prstGeom>
+          <a:noFill/>
+        </p:spPr>
+        <p:txBody>
+          <a:bodyPr wrap="square">
+            <a:spAutoFit/>
+          </a:bodyPr>
+          <a:lstStyle/>
+          <a:p>
+            <a:pPr algn="l"/>
+            <a:r>
+              <a:rPr sz="1300" b="1" i="0">
+                <a:solidFill>
+                  <a:srgbClr val="FFFFFF"/>
+                </a:solidFill>
+                <a:latin typeface="Arial"/>
+              </a:rPr>
+              <a:t>→  Bearbeitung im Teilnehmer-Workbook (Arbeitsblatt mit Ausfüllfeldern)</a:t>
+            </a:r>
+          </a:p>
+        </p:txBody>
+      </p:sp>
+      <p:sp>
+        <p:nvSpPr>
+          <p:cNvPr id="11" name="Rectangle 10"/>
+          <p:cNvSpPr/>
+          <p:nvPr/>
+        </p:nvSpPr>
+        <p:spPr>
+          <a:xfrm>
+            <a:off x="0" y="6510528"/>
+            <a:ext cx="12188952" cy="347472"/>
+          </a:xfrm>
+          <a:prstGeom prst="rect">
+            <a:avLst/>
+          </a:prstGeom>
+          <a:solidFill>
+            <a:srgbClr val="0A1937"/>
+          </a:solidFill>
+          <a:ln>
+            <a:noFill/>
+          </a:ln>
+        </p:spPr>
+        <p:style>
+          <a:lnRef idx="1">
+            <a:schemeClr val="accent1"/>
+          </a:lnRef>
+          <a:fillRef idx="3">
+            <a:schemeClr val="accent1"/>
+          </a:fillRef>
+          <a:effectRef idx="2">
+            <a:schemeClr val="accent1"/>
+          </a:effectRef>
+          <a:fontRef idx="minor">
+            <a:schemeClr val="lt1"/>
+          </a:fontRef>
+        </p:style>
+        <p:txBody>
+          <a:bodyPr rtlCol="0" anchor="ctr"/>
+          <a:lstStyle/>
+          <a:p>
+            <a:pPr algn="ctr"/>
+          </a:p>
+        </p:txBody>
+      </p:sp>
+      <p:sp>
+        <p:nvSpPr>
+          <p:cNvPr id="12" name="TextBox 11"/>
+          <p:cNvSpPr txBox="1"/>
+          <p:nvPr/>
+        </p:nvSpPr>
+        <p:spPr>
+          <a:xfrm>
+            <a:off x="685800" y="6583680"/>
+            <a:ext cx="6490411" cy="256032"/>
+          </a:xfrm>
+          <a:prstGeom prst="rect">
+            <a:avLst/>
+          </a:prstGeom>
+          <a:noFill/>
+        </p:spPr>
+        <p:txBody>
+          <a:bodyPr wrap="none">
+            <a:spAutoFit/>
+          </a:bodyPr>
+          <a:lstStyle/>
+          <a:p>
+            <a:pPr algn="l"/>
+            <a:r>
+              <a:rPr sz="700">
+                <a:solidFill>
+                  <a:srgbClr val="A0B4D2"/>
+                </a:solidFill>
+                <a:latin typeface="JetBrains Mono"/>
+              </a:rPr>
+              <a:t>Benedikt Zoller Coaching  ·  FKB Campus  ·  M03</a:t>
+            </a:r>
+          </a:p>
+        </p:txBody>
+      </p:sp>
+    </p:spTree>
+  </p:cSld>
+  <p:clrMapOvr>
+    <a:masterClrMapping/>
+  </p:clrMapOvr>
+</p:sld>
+</file>
+
+<file path=ppt/slides/slide11.xml><?xml version="1.0" encoding="utf-8"?>
+<p:sld xmlns:a="http://schemas.openxmlformats.org/drawingml/2006/main" xmlns:p="http://schemas.openxmlformats.org/presentationml/2006/main" xmlns:r="http://schemas.openxmlformats.org/officeDocument/2006/relationships">
+  <p:cSld>
+    <p:spTree>
+      <p:nvGrpSpPr>
+        <p:cNvPr id="1" name=""/>
+        <p:cNvGrpSpPr/>
+        <p:nvPr/>
+      </p:nvGrpSpPr>
+      <p:grpSpPr/>
+      <p:sp>
+        <p:nvSpPr>
+          <p:cNvPr id="2" name="Rectangle 1"/>
+          <p:cNvSpPr/>
+          <p:nvPr/>
+        </p:nvSpPr>
+        <p:spPr>
+          <a:xfrm>
+            <a:off x="0" y="0"/>
+            <a:ext cx="12188952" cy="6858000"/>
+          </a:xfrm>
+          <a:prstGeom prst="rect">
+            <a:avLst/>
+          </a:prstGeom>
+          <a:solidFill>
+            <a:srgbClr val="EDEDF3"/>
+          </a:solidFill>
+          <a:ln>
+            <a:noFill/>
+          </a:ln>
+        </p:spPr>
+        <p:style>
+          <a:lnRef idx="1">
+            <a:schemeClr val="accent1"/>
+          </a:lnRef>
+          <a:fillRef idx="3">
+            <a:schemeClr val="accent1"/>
+          </a:fillRef>
+          <a:effectRef idx="2">
+            <a:schemeClr val="accent1"/>
+          </a:effectRef>
+          <a:fontRef idx="minor">
+            <a:schemeClr val="lt1"/>
+          </a:fontRef>
+        </p:style>
+        <p:txBody>
+          <a:bodyPr rtlCol="0" anchor="ctr"/>
+          <a:lstStyle/>
+          <a:p>
+            <a:pPr algn="ctr"/>
+          </a:p>
+        </p:txBody>
+      </p:sp>
+      <p:sp>
+        <p:nvSpPr>
+          <p:cNvPr id="3" name="Rectangle 2"/>
+          <p:cNvSpPr/>
+          <p:nvPr/>
+        </p:nvSpPr>
+        <p:spPr>
+          <a:xfrm>
+            <a:off x="0" y="0"/>
+            <a:ext cx="12188952" cy="50292"/>
+          </a:xfrm>
+          <a:prstGeom prst="rect">
+            <a:avLst/>
+          </a:prstGeom>
+          <a:solidFill>
+            <a:srgbClr val="1F2C56"/>
+          </a:solidFill>
+          <a:ln>
+            <a:noFill/>
+          </a:ln>
+        </p:spPr>
+        <p:style>
+          <a:lnRef idx="1">
+            <a:schemeClr val="accent1"/>
+          </a:lnRef>
+          <a:fillRef idx="3">
+            <a:schemeClr val="accent1"/>
+          </a:fillRef>
+          <a:effectRef idx="2">
+            <a:schemeClr val="accent1"/>
+          </a:effectRef>
+          <a:fontRef idx="minor">
+            <a:schemeClr val="lt1"/>
+          </a:fontRef>
+        </p:style>
+        <p:txBody>
+          <a:bodyPr rtlCol="0" anchor="ctr"/>
+          <a:lstStyle/>
+          <a:p>
+            <a:pPr algn="ctr"/>
+          </a:p>
+        </p:txBody>
+      </p:sp>
+      <p:sp>
+        <p:nvSpPr>
+          <p:cNvPr id="4" name="TextBox 3"/>
+          <p:cNvSpPr txBox="1"/>
+          <p:nvPr/>
+        </p:nvSpPr>
+        <p:spPr>
+          <a:xfrm>
+            <a:off x="685800" y="109728"/>
+            <a:ext cx="10817352" cy="228600"/>
+          </a:xfrm>
+          <a:prstGeom prst="rect">
+            <a:avLst/>
+          </a:prstGeom>
+          <a:noFill/>
+        </p:spPr>
+        <p:txBody>
+          <a:bodyPr wrap="none">
+            <a:spAutoFit/>
+          </a:bodyPr>
+          <a:lstStyle/>
+          <a:p>
+            <a:pPr algn="l"/>
+            <a:r>
+              <a:rPr sz="750">
+                <a:solidFill>
+                  <a:srgbClr val="78808C"/>
+                </a:solidFill>
+                <a:latin typeface="JetBrains Mono"/>
+              </a:rPr>
               <a:t>M03  ·  INHALT</a:t>
             </a:r>
           </a:p>
@@ -5010,7 +5545,7 @@
                 </a:solidFill>
                 <a:latin typeface="JetBrains Mono"/>
               </a:rPr>
-              <a:t>LERNZIELE  ·  M03</a:t>
+              <a:t>ÜBERBLICK  ·  M03</a:t>
             </a:r>
           </a:p>
         </p:txBody>
@@ -5088,7 +5623,7 @@
                 </a:solidFill>
                 <a:latin typeface="Source Serif 4"/>
               </a:rPr>
-              <a:t>Was Sie heute mitnehmen</a:t>
+              <a:t>Worum geht es heute</a:t>
             </a:r>
           </a:p>
         </p:txBody>
@@ -5101,8 +5636,8 @@
         </p:nvSpPr>
         <p:spPr>
           <a:xfrm>
-            <a:off x="685800" y="1371600"/>
-            <a:ext cx="10817352" cy="5120640"/>
+            <a:off x="685800" y="1737360"/>
+            <a:ext cx="9720072" cy="4206240"/>
           </a:xfrm>
           <a:prstGeom prst="rect">
             <a:avLst/>
@@ -5116,97 +5651,50 @@
           <a:lstStyle/>
           <a:p>
             <a:pPr>
-              <a:spcBef>
-                <a:spcPts val="800"/>
-              </a:spcBef>
               <a:spcAft>
-                <a:spcPts val="200"/>
+                <a:spcPts val="1200"/>
               </a:spcAft>
             </a:pPr>
             <a:r>
-              <a:rPr sz="1400">
+              <a:rPr sz="1700">
                 <a:solidFill>
                   <a:srgbClr val="3D5466"/>
                 </a:solidFill>
                 <a:latin typeface="Arial"/>
               </a:rPr>
-              <a:t>▸  Die Teilnehmer analysieren die Kapitalstruktur eines mittelständischen Unternehmens und identifizieren Optimierungspotenziale hinsichtlich Eigen- und Fremdkapitalquote.</a:t>
+              <a:t>Auf der obersten Beratungsstufe geht es nicht mehr um einzelne Produkte, sondern um die finanzielle Zukunft des Unternehmens.</a:t>
             </a:r>
           </a:p>
           <a:p>
             <a:pPr>
-              <a:spcBef>
-                <a:spcPts val="800"/>
-              </a:spcBef>
               <a:spcAft>
-                <a:spcPts val="200"/>
+                <a:spcPts val="1200"/>
               </a:spcAft>
             </a:pPr>
             <a:r>
-              <a:rPr sz="1400">
+              <a:rPr sz="1700">
                 <a:solidFill>
                   <a:srgbClr val="3D5466"/>
                 </a:solidFill>
                 <a:latin typeface="Arial"/>
               </a:rPr>
-              <a:t>▸  Die Teilnehmer bewerten alternative Finanzierungsstrategien (Bankkredit, Mezzanine, Beteiligungskapital) nach Kosten, Flexibilität und strategischer Passung.</a:t>
+              <a:t>Sie arbeiten mit Werttreiberbaum und Finanzdialog-Ebenen und trainieren den strategischen Dialog in einer Simulation mit Coaching.</a:t>
             </a:r>
           </a:p>
           <a:p>
             <a:pPr>
-              <a:spcBef>
-                <a:spcPts val="800"/>
-              </a:spcBef>
               <a:spcAft>
-                <a:spcPts val="200"/>
+                <a:spcPts val="1200"/>
               </a:spcAft>
             </a:pPr>
             <a:r>
-              <a:rPr sz="1400">
+              <a:rPr sz="1700">
                 <a:solidFill>
                   <a:srgbClr val="3D5466"/>
                 </a:solidFill>
                 <a:latin typeface="Arial"/>
               </a:rPr>
-              <a:t>▸  Die Teilnehmer analysieren Unternehmenswerttreiber und entwickeln daraus begründete strategische Handlungsempfehlungen.</a:t>
-            </a:r>
-          </a:p>
-          <a:p>
-            <a:pPr>
-              <a:spcBef>
-                <a:spcPts val="800"/>
-              </a:spcBef>
-              <a:spcAft>
-                <a:spcPts val="200"/>
-              </a:spcAft>
-            </a:pPr>
-            <a:r>
-              <a:rPr sz="1400">
-                <a:solidFill>
-                  <a:srgbClr val="3D5466"/>
-                </a:solidFill>
-                <a:latin typeface="Arial"/>
-              </a:rPr>
-              <a:t>▸  Die Teilnehmer entwickeln für ein Fallstudienunternehmen einen strategischen Finanzierungsplan einschließlich Meilensteinplanung und Risikobewertung.</a:t>
-            </a:r>
-          </a:p>
-          <a:p>
-            <a:pPr>
-              <a:spcBef>
-                <a:spcPts val="800"/>
-              </a:spcBef>
-              <a:spcAft>
-                <a:spcPts val="200"/>
-              </a:spcAft>
-            </a:pPr>
-            <a:r>
-              <a:rPr sz="1400">
-                <a:solidFill>
-                  <a:srgbClr val="3D5466"/>
-                </a:solidFill>
-                <a:latin typeface="Arial"/>
-              </a:rPr>
-              <a:t>▸  Die Teilnehmer beurteilen, wann Bankfinanzierung ihre Grenzen erreicht und alternative Kapitalquellen strategisch sinnvoll sind.</a:t>
+              <a:t>Danach führen Sie Gespräche über Kapitalstruktur, Investitionen und Strategie auf Augenhöhe mit der Geschäftsführung.</a:t>
             </a:r>
           </a:p>
         </p:txBody>
@@ -5423,7 +5911,7 @@
                 </a:solidFill>
                 <a:latin typeface="JetBrains Mono"/>
               </a:rPr>
-              <a:t>AGENDA  ·  M03</a:t>
+              <a:t>LERNZIELE  ·  M03</a:t>
             </a:r>
           </a:p>
         </p:txBody>
@@ -5501,7 +5989,7 @@
                 </a:solidFill>
                 <a:latin typeface="Source Serif 4"/>
               </a:rPr>
-              <a:t>Agenda</a:t>
+              <a:t>Was Sie heute mitnehmen</a:t>
             </a:r>
           </a:p>
         </p:txBody>
@@ -5514,8 +6002,8 @@
         </p:nvSpPr>
         <p:spPr>
           <a:xfrm>
-            <a:off x="685800" y="1463040"/>
-            <a:ext cx="10817352" cy="4937760"/>
+            <a:off x="685800" y="1371600"/>
+            <a:ext cx="10817352" cy="5120640"/>
           </a:xfrm>
           <a:prstGeom prst="rect">
             <a:avLst/>
@@ -5537,13 +6025,13 @@
               </a:spcAft>
             </a:pPr>
             <a:r>
-              <a:rPr sz="1500">
+              <a:rPr sz="1400">
                 <a:solidFill>
                   <a:srgbClr val="3D5466"/>
                 </a:solidFill>
                 <a:latin typeface="Arial"/>
               </a:rPr>
-              <a:t>01   Vom Bilanzgespräch zum Strategiegespräch</a:t>
+              <a:t>▸  Die Teilnehmer analysieren die Kapitalstruktur eines mittelständischen Unternehmens und identifizieren Optimierungspotenziale hinsichtlich Eigen- und Fremdkapitalquote.</a:t>
             </a:r>
           </a:p>
           <a:p>
@@ -5556,13 +6044,13 @@
               </a:spcAft>
             </a:pPr>
             <a:r>
-              <a:rPr sz="1500">
+              <a:rPr sz="1400">
                 <a:solidFill>
                   <a:srgbClr val="3D5466"/>
                 </a:solidFill>
                 <a:latin typeface="Arial"/>
               </a:rPr>
-              <a:t>02   Kapitalstruktur und Werttreiber verstehen</a:t>
+              <a:t>▸  Die Teilnehmer bewerten alternative Finanzierungsstrategien (Bankkredit, Mezzanine, Beteiligungskapital) nach Kosten, Flexibilität und strategischer Passung.</a:t>
             </a:r>
           </a:p>
           <a:p>
@@ -5575,13 +6063,13 @@
               </a:spcAft>
             </a:pPr>
             <a:r>
-              <a:rPr sz="1500">
+              <a:rPr sz="1400">
                 <a:solidFill>
                   <a:srgbClr val="3D5466"/>
                 </a:solidFill>
                 <a:latin typeface="Arial"/>
               </a:rPr>
-              <a:t>03   Strategische Szenarien in der Beratungspraxis</a:t>
+              <a:t>▸  Die Teilnehmer analysieren Unternehmenswerttreiber und entwickeln daraus begründete strategische Handlungsempfehlungen.</a:t>
             </a:r>
           </a:p>
           <a:p>
@@ -5594,13 +6082,13 @@
               </a:spcAft>
             </a:pPr>
             <a:r>
-              <a:rPr sz="1500">
+              <a:rPr sz="1400">
                 <a:solidFill>
                   <a:srgbClr val="3D5466"/>
                 </a:solidFill>
                 <a:latin typeface="Arial"/>
               </a:rPr>
-              <a:t>04   Praxiscase: Habermaier Präzisionsteile GmbH &amp; Co. KG</a:t>
+              <a:t>▸  Die Teilnehmer entwickeln für ein Fallstudienunternehmen einen strategischen Finanzierungsplan einschließlich Meilensteinplanung und Risikobewertung.</a:t>
             </a:r>
           </a:p>
           <a:p>
@@ -5613,13 +6101,13 @@
               </a:spcAft>
             </a:pPr>
             <a:r>
-              <a:rPr sz="1500">
+              <a:rPr sz="1400">
                 <a:solidFill>
                   <a:srgbClr val="3D5466"/>
                 </a:solidFill>
                 <a:latin typeface="Arial"/>
               </a:rPr>
-              <a:t>05   Liquiditäts- und Wachstumsplanung</a:t>
+              <a:t>▸  Die Teilnehmer beurteilen, wann Bankfinanzierung ihre Grenzen erreicht und alternative Kapitalquellen strategisch sinnvoll sind.</a:t>
             </a:r>
           </a:p>
         </p:txBody>
@@ -5836,7 +6324,7 @@
                 </a:solidFill>
                 <a:latin typeface="JetBrains Mono"/>
               </a:rPr>
-              <a:t>M03  ·  INHALT</a:t>
+              <a:t>AGENDA  ·  M03</a:t>
             </a:r>
           </a:p>
         </p:txBody>
@@ -5886,57 +6374,14 @@
       </p:sp>
       <p:sp>
         <p:nvSpPr>
-          <p:cNvPr id="6" name="Rectangle 5"/>
-          <p:cNvSpPr/>
+          <p:cNvPr id="6" name="TextBox 5"/>
+          <p:cNvSpPr txBox="1"/>
           <p:nvPr/>
         </p:nvSpPr>
         <p:spPr>
           <a:xfrm>
             <a:off x="685800" y="502920"/>
-            <a:ext cx="36576" cy="658368"/>
-          </a:xfrm>
-          <a:prstGeom prst="rect">
-            <a:avLst/>
-          </a:prstGeom>
-          <a:solidFill>
-            <a:srgbClr val="D9C089"/>
-          </a:solidFill>
-          <a:ln>
-            <a:noFill/>
-          </a:ln>
-        </p:spPr>
-        <p:style>
-          <a:lnRef idx="1">
-            <a:schemeClr val="accent1"/>
-          </a:lnRef>
-          <a:fillRef idx="3">
-            <a:schemeClr val="accent1"/>
-          </a:fillRef>
-          <a:effectRef idx="2">
-            <a:schemeClr val="accent1"/>
-          </a:effectRef>
-          <a:fontRef idx="minor">
-            <a:schemeClr val="lt1"/>
-          </a:fontRef>
-        </p:style>
-        <p:txBody>
-          <a:bodyPr rtlCol="0" anchor="ctr"/>
-          <a:lstStyle/>
-          <a:p>
-            <a:pPr algn="ctr"/>
-          </a:p>
-        </p:txBody>
-      </p:sp>
-      <p:sp>
-        <p:nvSpPr>
-          <p:cNvPr id="7" name="TextBox 6"/>
-          <p:cNvSpPr txBox="1"/>
-          <p:nvPr/>
-        </p:nvSpPr>
-        <p:spPr>
-          <a:xfrm>
-            <a:off x="813816" y="502920"/>
-            <a:ext cx="10634472" cy="685800"/>
+            <a:ext cx="10817352" cy="658368"/>
           </a:xfrm>
           <a:prstGeom prst="rect">
             <a:avLst/>
@@ -5951,27 +6396,27 @@
           <a:p>
             <a:pPr algn="l"/>
             <a:r>
-              <a:rPr sz="2400" b="1" i="0">
+              <a:rPr sz="2600" b="1" i="0">
                 <a:solidFill>
                   <a:srgbClr val="1F2C56"/>
                 </a:solidFill>
                 <a:latin typeface="Source Serif 4"/>
               </a:rPr>
-              <a:t>Vom Bilanzgespräch zum Strategiegespräch</a:t>
-            </a:r>
-          </a:p>
-        </p:txBody>
-      </p:sp>
-      <p:sp>
-        <p:nvSpPr>
-          <p:cNvPr id="8" name="TextBox 7"/>
+              <a:t>Agenda</a:t>
+            </a:r>
+          </a:p>
+        </p:txBody>
+      </p:sp>
+      <p:sp>
+        <p:nvSpPr>
+          <p:cNvPr id="7" name="TextBox 6"/>
           <p:cNvSpPr txBox="1"/>
           <p:nvPr/>
         </p:nvSpPr>
         <p:spPr>
           <a:xfrm>
-            <a:off x="685800" y="1417320"/>
-            <a:ext cx="10817352" cy="5029200"/>
+            <a:off x="685800" y="1463040"/>
+            <a:ext cx="10817352" cy="4937760"/>
           </a:xfrm>
           <a:prstGeom prst="rect">
             <a:avLst/>
@@ -5986,27 +6431,103 @@
           <a:p>
             <a:pPr>
               <a:spcBef>
-                <a:spcPts val="1000"/>
+                <a:spcPts val="800"/>
               </a:spcBef>
               <a:spcAft>
                 <a:spcPts val="200"/>
               </a:spcAft>
             </a:pPr>
             <a:r>
-              <a:rPr sz="800" b="1">
+              <a:rPr sz="1500">
                 <a:solidFill>
-                  <a:srgbClr val="78808C"/>
+                  <a:srgbClr val="3D5466"/>
                 </a:solidFill>
-                <a:latin typeface="JetBrains Mono"/>
+                <a:latin typeface="Arial"/>
               </a:rPr>
-              <a:t>DIE DREI EBENEN DES STRATEGISCHEN FINANZDIALOGS</a:t>
-            </a:r>
-          </a:p>
-        </p:txBody>
-      </p:sp>
-      <p:sp>
-        <p:nvSpPr>
-          <p:cNvPr id="9" name="Rectangle 8"/>
+              <a:t>01   Vom Bilanzgespräch zum Strategiegespräch</a:t>
+            </a:r>
+          </a:p>
+          <a:p>
+            <a:pPr>
+              <a:spcBef>
+                <a:spcPts val="800"/>
+              </a:spcBef>
+              <a:spcAft>
+                <a:spcPts val="200"/>
+              </a:spcAft>
+            </a:pPr>
+            <a:r>
+              <a:rPr sz="1500">
+                <a:solidFill>
+                  <a:srgbClr val="3D5466"/>
+                </a:solidFill>
+                <a:latin typeface="Arial"/>
+              </a:rPr>
+              <a:t>02   Kapitalstruktur und Werttreiber verstehen</a:t>
+            </a:r>
+          </a:p>
+          <a:p>
+            <a:pPr>
+              <a:spcBef>
+                <a:spcPts val="800"/>
+              </a:spcBef>
+              <a:spcAft>
+                <a:spcPts val="200"/>
+              </a:spcAft>
+            </a:pPr>
+            <a:r>
+              <a:rPr sz="1500">
+                <a:solidFill>
+                  <a:srgbClr val="3D5466"/>
+                </a:solidFill>
+                <a:latin typeface="Arial"/>
+              </a:rPr>
+              <a:t>03   Strategische Szenarien in der Beratungspraxis</a:t>
+            </a:r>
+          </a:p>
+          <a:p>
+            <a:pPr>
+              <a:spcBef>
+                <a:spcPts val="800"/>
+              </a:spcBef>
+              <a:spcAft>
+                <a:spcPts val="200"/>
+              </a:spcAft>
+            </a:pPr>
+            <a:r>
+              <a:rPr sz="1500">
+                <a:solidFill>
+                  <a:srgbClr val="3D5466"/>
+                </a:solidFill>
+                <a:latin typeface="Arial"/>
+              </a:rPr>
+              <a:t>04   Praxiscase: Habermaier Präzisionsteile GmbH &amp; Co. KG</a:t>
+            </a:r>
+          </a:p>
+          <a:p>
+            <a:pPr>
+              <a:spcBef>
+                <a:spcPts val="800"/>
+              </a:spcBef>
+              <a:spcAft>
+                <a:spcPts val="200"/>
+              </a:spcAft>
+            </a:pPr>
+            <a:r>
+              <a:rPr sz="1500">
+                <a:solidFill>
+                  <a:srgbClr val="3D5466"/>
+                </a:solidFill>
+                <a:latin typeface="Arial"/>
+              </a:rPr>
+              <a:t>05   Liquiditäts- und Wachstumsplanung</a:t>
+            </a:r>
+          </a:p>
+        </p:txBody>
+      </p:sp>
+      <p:sp>
+        <p:nvSpPr>
+          <p:cNvPr id="8" name="Rectangle 7"/>
           <p:cNvSpPr/>
           <p:nvPr/>
         </p:nvSpPr>
@@ -6049,7 +6570,7 @@
       </p:sp>
       <p:sp>
         <p:nvSpPr>
-          <p:cNvPr id="10" name="TextBox 9"/>
+          <p:cNvPr id="9" name="TextBox 8"/>
           <p:cNvSpPr txBox="1"/>
           <p:nvPr/>
         </p:nvSpPr>
@@ -6115,7 +6636,7 @@
             <a:avLst/>
           </a:prstGeom>
           <a:solidFill>
-            <a:srgbClr val="FFFFFF"/>
+            <a:srgbClr val="EDEDF3"/>
           </a:solidFill>
           <a:ln>
             <a:noFill/>
@@ -6216,43 +6737,51 @@
                 </a:solidFill>
                 <a:latin typeface="JetBrains Mono"/>
               </a:rPr>
-              <a:t>M03  ·  SCHAUBILD</a:t>
-            </a:r>
-          </a:p>
-        </p:txBody>
-      </p:sp>
-      <p:sp>
-        <p:nvSpPr>
-          <p:cNvPr id="5" name="TextBox 4"/>
-          <p:cNvSpPr txBox="1"/>
-          <p:nvPr/>
-        </p:nvSpPr>
-        <p:spPr>
-          <a:xfrm>
-            <a:off x="685800" y="502920"/>
-            <a:ext cx="10817352" cy="594360"/>
-          </a:xfrm>
-          <a:prstGeom prst="rect">
-            <a:avLst/>
-          </a:prstGeom>
-          <a:noFill/>
-        </p:spPr>
-        <p:txBody>
-          <a:bodyPr wrap="square">
-            <a:spAutoFit/>
-          </a:bodyPr>
-          <a:lstStyle/>
-          <a:p>
-            <a:pPr algn="l"/>
-            <a:r>
-              <a:rPr sz="2000" b="1" i="0">
-                <a:solidFill>
-                  <a:srgbClr val="1F2C56"/>
-                </a:solidFill>
-                <a:latin typeface="Source Serif 4"/>
-              </a:rPr>
-              <a:t>Drei Gesprächsebenen des strategischen Finanzdialogs</a:t>
-            </a:r>
+              <a:t>M03  ·  INHALT</a:t>
+            </a:r>
+          </a:p>
+        </p:txBody>
+      </p:sp>
+      <p:sp>
+        <p:nvSpPr>
+          <p:cNvPr id="5" name="Rectangle 4"/>
+          <p:cNvSpPr/>
+          <p:nvPr/>
+        </p:nvSpPr>
+        <p:spPr>
+          <a:xfrm>
+            <a:off x="0" y="1234440"/>
+            <a:ext cx="12188952" cy="12700"/>
+          </a:xfrm>
+          <a:prstGeom prst="rect">
+            <a:avLst/>
+          </a:prstGeom>
+          <a:solidFill>
+            <a:srgbClr val="D8DFE4"/>
+          </a:solidFill>
+          <a:ln>
+            <a:noFill/>
+          </a:ln>
+        </p:spPr>
+        <p:style>
+          <a:lnRef idx="1">
+            <a:schemeClr val="accent1"/>
+          </a:lnRef>
+          <a:fillRef idx="3">
+            <a:schemeClr val="accent1"/>
+          </a:fillRef>
+          <a:effectRef idx="2">
+            <a:schemeClr val="accent1"/>
+          </a:effectRef>
+          <a:fontRef idx="minor">
+            <a:schemeClr val="lt1"/>
+          </a:fontRef>
+        </p:style>
+        <p:txBody>
+          <a:bodyPr rtlCol="0" anchor="ctr"/>
+          <a:lstStyle/>
+          <a:p>
+            <a:pPr algn="ctr"/>
           </a:p>
         </p:txBody>
       </p:sp>
@@ -6264,8 +6793,8 @@
         </p:nvSpPr>
         <p:spPr>
           <a:xfrm>
-            <a:off x="685800" y="1143000"/>
-            <a:ext cx="10817352" cy="25400"/>
+            <a:off x="685800" y="502920"/>
+            <a:ext cx="36576" cy="658368"/>
           </a:xfrm>
           <a:prstGeom prst="rect">
             <a:avLst/>
@@ -6299,33 +6828,86 @@
           </a:p>
         </p:txBody>
       </p:sp>
-      <p:pic>
-        <p:nvPicPr>
-          <p:cNvPr id="7" name="Picture 6" descr="image.png"/>
-          <p:cNvPicPr>
-            <a:picLocks noChangeAspect="1"/>
-          </p:cNvPicPr>
-          <p:nvPr/>
-        </p:nvPicPr>
-        <p:blipFill>
-          <a:blip r:embed="rId2"/>
-          <a:stretch>
-            <a:fillRect/>
-          </a:stretch>
-        </p:blipFill>
-        <p:spPr>
-          <a:xfrm>
-            <a:off x="2009463" y="1325880"/>
-            <a:ext cx="8170026" cy="4937760"/>
-          </a:xfrm>
-          <a:prstGeom prst="rect">
-            <a:avLst/>
-          </a:prstGeom>
-        </p:spPr>
-      </p:pic>
-      <p:sp>
-        <p:nvSpPr>
-          <p:cNvPr id="8" name="Rectangle 7"/>
+      <p:sp>
+        <p:nvSpPr>
+          <p:cNvPr id="7" name="TextBox 6"/>
+          <p:cNvSpPr txBox="1"/>
+          <p:nvPr/>
+        </p:nvSpPr>
+        <p:spPr>
+          <a:xfrm>
+            <a:off x="813816" y="502920"/>
+            <a:ext cx="10634472" cy="685800"/>
+          </a:xfrm>
+          <a:prstGeom prst="rect">
+            <a:avLst/>
+          </a:prstGeom>
+          <a:noFill/>
+        </p:spPr>
+        <p:txBody>
+          <a:bodyPr wrap="square">
+            <a:spAutoFit/>
+          </a:bodyPr>
+          <a:lstStyle/>
+          <a:p>
+            <a:pPr algn="l"/>
+            <a:r>
+              <a:rPr sz="2400" b="1" i="0">
+                <a:solidFill>
+                  <a:srgbClr val="1F2C56"/>
+                </a:solidFill>
+                <a:latin typeface="Source Serif 4"/>
+              </a:rPr>
+              <a:t>Vom Bilanzgespräch zum Strategiegespräch</a:t>
+            </a:r>
+          </a:p>
+        </p:txBody>
+      </p:sp>
+      <p:sp>
+        <p:nvSpPr>
+          <p:cNvPr id="8" name="TextBox 7"/>
+          <p:cNvSpPr txBox="1"/>
+          <p:nvPr/>
+        </p:nvSpPr>
+        <p:spPr>
+          <a:xfrm>
+            <a:off x="685800" y="1417320"/>
+            <a:ext cx="10817352" cy="5029200"/>
+          </a:xfrm>
+          <a:prstGeom prst="rect">
+            <a:avLst/>
+          </a:prstGeom>
+          <a:noFill/>
+        </p:spPr>
+        <p:txBody>
+          <a:bodyPr wrap="square">
+            <a:spAutoFit/>
+          </a:bodyPr>
+          <a:lstStyle/>
+          <a:p>
+            <a:pPr>
+              <a:spcBef>
+                <a:spcPts val="1000"/>
+              </a:spcBef>
+              <a:spcAft>
+                <a:spcPts val="200"/>
+              </a:spcAft>
+            </a:pPr>
+            <a:r>
+              <a:rPr sz="800" b="1">
+                <a:solidFill>
+                  <a:srgbClr val="78808C"/>
+                </a:solidFill>
+                <a:latin typeface="JetBrains Mono"/>
+              </a:rPr>
+              <a:t>DIE DREI EBENEN DES STRATEGISCHEN FINANZDIALOGS</a:t>
+            </a:r>
+          </a:p>
+        </p:txBody>
+      </p:sp>
+      <p:sp>
+        <p:nvSpPr>
+          <p:cNvPr id="9" name="Rectangle 8"/>
           <p:cNvSpPr/>
           <p:nvPr/>
         </p:nvSpPr>
@@ -6368,7 +6950,7 @@
       </p:sp>
       <p:sp>
         <p:nvSpPr>
-          <p:cNvPr id="9" name="TextBox 8"/>
+          <p:cNvPr id="10" name="TextBox 9"/>
           <p:cNvSpPr txBox="1"/>
           <p:nvPr/>
         </p:nvSpPr>
@@ -6397,41 +6979,6 @@
                 <a:latin typeface="JetBrains Mono"/>
               </a:rPr>
               <a:t>Benedikt Zoller Coaching  ·  FKB Campus  ·  M03</a:t>
-            </a:r>
-          </a:p>
-        </p:txBody>
-      </p:sp>
-      <p:sp>
-        <p:nvSpPr>
-          <p:cNvPr id="10" name="TextBox 9"/>
-          <p:cNvSpPr txBox="1"/>
-          <p:nvPr/>
-        </p:nvSpPr>
-        <p:spPr>
-          <a:xfrm>
-            <a:off x="7176211" y="6583680"/>
-            <a:ext cx="4326940" cy="256032"/>
-          </a:xfrm>
-          <a:prstGeom prst="rect">
-            <a:avLst/>
-          </a:prstGeom>
-          <a:noFill/>
-        </p:spPr>
-        <p:txBody>
-          <a:bodyPr wrap="none">
-            <a:spAutoFit/>
-          </a:bodyPr>
-          <a:lstStyle/>
-          <a:p>
-            <a:pPr algn="r"/>
-            <a:r>
-              <a:rPr sz="700">
-                <a:solidFill>
-                  <a:srgbClr val="A0B4D2"/>
-                </a:solidFill>
-                <a:latin typeface="JetBrains Mono"/>
-              </a:rPr>
-              <a:t>Schaubild</a:t>
             </a:r>
           </a:p>
         </p:txBody>
@@ -6469,7 +7016,7 @@
             <a:avLst/>
           </a:prstGeom>
           <a:solidFill>
-            <a:srgbClr val="EDEDF3"/>
+            <a:srgbClr val="FFFFFF"/>
           </a:solidFill>
           <a:ln>
             <a:noFill/>
@@ -6570,51 +7117,43 @@
                 </a:solidFill>
                 <a:latin typeface="JetBrains Mono"/>
               </a:rPr>
-              <a:t>M03  ·  INHALT</a:t>
-            </a:r>
-          </a:p>
-        </p:txBody>
-      </p:sp>
-      <p:sp>
-        <p:nvSpPr>
-          <p:cNvPr id="5" name="Rectangle 4"/>
-          <p:cNvSpPr/>
-          <p:nvPr/>
-        </p:nvSpPr>
-        <p:spPr>
-          <a:xfrm>
-            <a:off x="0" y="1234440"/>
-            <a:ext cx="12188952" cy="12700"/>
-          </a:xfrm>
-          <a:prstGeom prst="rect">
-            <a:avLst/>
-          </a:prstGeom>
-          <a:solidFill>
-            <a:srgbClr val="D8DFE4"/>
-          </a:solidFill>
-          <a:ln>
-            <a:noFill/>
-          </a:ln>
-        </p:spPr>
-        <p:style>
-          <a:lnRef idx="1">
-            <a:schemeClr val="accent1"/>
-          </a:lnRef>
-          <a:fillRef idx="3">
-            <a:schemeClr val="accent1"/>
-          </a:fillRef>
-          <a:effectRef idx="2">
-            <a:schemeClr val="accent1"/>
-          </a:effectRef>
-          <a:fontRef idx="minor">
-            <a:schemeClr val="lt1"/>
-          </a:fontRef>
-        </p:style>
-        <p:txBody>
-          <a:bodyPr rtlCol="0" anchor="ctr"/>
-          <a:lstStyle/>
-          <a:p>
-            <a:pPr algn="ctr"/>
+              <a:t>M03  ·  SCHAUBILD</a:t>
+            </a:r>
+          </a:p>
+        </p:txBody>
+      </p:sp>
+      <p:sp>
+        <p:nvSpPr>
+          <p:cNvPr id="5" name="TextBox 4"/>
+          <p:cNvSpPr txBox="1"/>
+          <p:nvPr/>
+        </p:nvSpPr>
+        <p:spPr>
+          <a:xfrm>
+            <a:off x="685800" y="502920"/>
+            <a:ext cx="10817352" cy="594360"/>
+          </a:xfrm>
+          <a:prstGeom prst="rect">
+            <a:avLst/>
+          </a:prstGeom>
+          <a:noFill/>
+        </p:spPr>
+        <p:txBody>
+          <a:bodyPr wrap="square">
+            <a:spAutoFit/>
+          </a:bodyPr>
+          <a:lstStyle/>
+          <a:p>
+            <a:pPr algn="l"/>
+            <a:r>
+              <a:rPr sz="2000" b="1" i="0">
+                <a:solidFill>
+                  <a:srgbClr val="1F2C56"/>
+                </a:solidFill>
+                <a:latin typeface="Source Serif 4"/>
+              </a:rPr>
+              <a:t>Drei Gesprächsebenen des strategischen Finanzdialogs</a:t>
+            </a:r>
           </a:p>
         </p:txBody>
       </p:sp>
@@ -6626,8 +7165,8 @@
         </p:nvSpPr>
         <p:spPr>
           <a:xfrm>
-            <a:off x="685800" y="502920"/>
-            <a:ext cx="36576" cy="658368"/>
+            <a:off x="685800" y="1143000"/>
+            <a:ext cx="10817352" cy="25400"/>
           </a:xfrm>
           <a:prstGeom prst="rect">
             <a:avLst/>
@@ -6661,124 +7200,33 @@
           </a:p>
         </p:txBody>
       </p:sp>
-      <p:sp>
-        <p:nvSpPr>
-          <p:cNvPr id="7" name="TextBox 6"/>
-          <p:cNvSpPr txBox="1"/>
-          <p:nvPr/>
-        </p:nvSpPr>
-        <p:spPr>
-          <a:xfrm>
-            <a:off x="813816" y="502920"/>
-            <a:ext cx="10634472" cy="685800"/>
-          </a:xfrm>
-          <a:prstGeom prst="rect">
-            <a:avLst/>
-          </a:prstGeom>
-          <a:noFill/>
-        </p:spPr>
-        <p:txBody>
-          <a:bodyPr wrap="square">
-            <a:spAutoFit/>
-          </a:bodyPr>
-          <a:lstStyle/>
-          <a:p>
-            <a:pPr algn="l"/>
-            <a:r>
-              <a:rPr sz="2400" b="1" i="0">
-                <a:solidFill>
-                  <a:srgbClr val="1F2C56"/>
-                </a:solidFill>
-                <a:latin typeface="Source Serif 4"/>
-              </a:rPr>
-              <a:t>Kapitalstruktur und Werttreiber verstehen</a:t>
-            </a:r>
-          </a:p>
-        </p:txBody>
-      </p:sp>
-      <p:sp>
-        <p:nvSpPr>
-          <p:cNvPr id="8" name="TextBox 7"/>
-          <p:cNvSpPr txBox="1"/>
-          <p:nvPr/>
-        </p:nvSpPr>
-        <p:spPr>
-          <a:xfrm>
-            <a:off x="685800" y="1417320"/>
-            <a:ext cx="10817352" cy="5029200"/>
-          </a:xfrm>
-          <a:prstGeom prst="rect">
-            <a:avLst/>
-          </a:prstGeom>
-          <a:noFill/>
-        </p:spPr>
-        <p:txBody>
-          <a:bodyPr wrap="square">
-            <a:spAutoFit/>
-          </a:bodyPr>
-          <a:lstStyle/>
-          <a:p>
-            <a:pPr>
-              <a:spcBef>
-                <a:spcPts val="1000"/>
-              </a:spcBef>
-              <a:spcAft>
-                <a:spcPts val="200"/>
-              </a:spcAft>
-            </a:pPr>
-            <a:r>
-              <a:rPr sz="800" b="1">
-                <a:solidFill>
-                  <a:srgbClr val="78808C"/>
-                </a:solidFill>
-                <a:latin typeface="JetBrains Mono"/>
-              </a:rPr>
-              <a:t>ZENTRALE WERTTREIBER IM MITTELSTAND</a:t>
-            </a:r>
-          </a:p>
-          <a:p>
-            <a:pPr>
-              <a:spcBef>
-                <a:spcPts val="400"/>
-              </a:spcBef>
-              <a:spcAft>
-                <a:spcPts val="200"/>
-              </a:spcAft>
-            </a:pPr>
-            <a:r>
-              <a:rPr sz="1200">
-                <a:solidFill>
-                  <a:srgbClr val="3D5466"/>
-                </a:solidFill>
-                <a:latin typeface="Arial"/>
-              </a:rPr>
-              <a:t>(vgl. )</a:t>
-            </a:r>
-          </a:p>
-          <a:p>
-            <a:pPr>
-              <a:spcBef>
-                <a:spcPts val="1000"/>
-              </a:spcBef>
-              <a:spcAft>
-                <a:spcPts val="200"/>
-              </a:spcAft>
-            </a:pPr>
-            <a:r>
-              <a:rPr sz="800" b="1">
-                <a:solidFill>
-                  <a:srgbClr val="78808C"/>
-                </a:solidFill>
-                <a:latin typeface="JetBrains Mono"/>
-              </a:rPr>
-              <a:t>FINANZIERUNGSOPTIONEN IM STRATEGISCHEN VERGLEICH</a:t>
-            </a:r>
-          </a:p>
-        </p:txBody>
-      </p:sp>
-      <p:sp>
-        <p:nvSpPr>
-          <p:cNvPr id="9" name="Rectangle 8"/>
+      <p:pic>
+        <p:nvPicPr>
+          <p:cNvPr id="7" name="Picture 6" descr="image.png"/>
+          <p:cNvPicPr>
+            <a:picLocks noChangeAspect="1"/>
+          </p:cNvPicPr>
+          <p:nvPr/>
+        </p:nvPicPr>
+        <p:blipFill>
+          <a:blip r:embed="rId2"/>
+          <a:stretch>
+            <a:fillRect/>
+          </a:stretch>
+        </p:blipFill>
+        <p:spPr>
+          <a:xfrm>
+            <a:off x="2009463" y="1325880"/>
+            <a:ext cx="8170026" cy="4937760"/>
+          </a:xfrm>
+          <a:prstGeom prst="rect">
+            <a:avLst/>
+          </a:prstGeom>
+        </p:spPr>
+      </p:pic>
+      <p:sp>
+        <p:nvSpPr>
+          <p:cNvPr id="8" name="Rectangle 7"/>
           <p:cNvSpPr/>
           <p:nvPr/>
         </p:nvSpPr>
@@ -6821,7 +7269,7 @@
       </p:sp>
       <p:sp>
         <p:nvSpPr>
-          <p:cNvPr id="10" name="TextBox 9"/>
+          <p:cNvPr id="9" name="TextBox 8"/>
           <p:cNvSpPr txBox="1"/>
           <p:nvPr/>
         </p:nvSpPr>
@@ -6850,6 +7298,41 @@
                 <a:latin typeface="JetBrains Mono"/>
               </a:rPr>
               <a:t>Benedikt Zoller Coaching  ·  FKB Campus  ·  M03</a:t>
+            </a:r>
+          </a:p>
+        </p:txBody>
+      </p:sp>
+      <p:sp>
+        <p:nvSpPr>
+          <p:cNvPr id="10" name="TextBox 9"/>
+          <p:cNvSpPr txBox="1"/>
+          <p:nvPr/>
+        </p:nvSpPr>
+        <p:spPr>
+          <a:xfrm>
+            <a:off x="7176211" y="6583680"/>
+            <a:ext cx="4326940" cy="256032"/>
+          </a:xfrm>
+          <a:prstGeom prst="rect">
+            <a:avLst/>
+          </a:prstGeom>
+          <a:noFill/>
+        </p:spPr>
+        <p:txBody>
+          <a:bodyPr wrap="none">
+            <a:spAutoFit/>
+          </a:bodyPr>
+          <a:lstStyle/>
+          <a:p>
+            <a:pPr algn="r"/>
+            <a:r>
+              <a:rPr sz="700">
+                <a:solidFill>
+                  <a:srgbClr val="A0B4D2"/>
+                </a:solidFill>
+                <a:latin typeface="JetBrains Mono"/>
+              </a:rPr>
+              <a:t>Schaubild</a:t>
             </a:r>
           </a:p>
         </p:txBody>
@@ -6887,7 +7370,7 @@
             <a:avLst/>
           </a:prstGeom>
           <a:solidFill>
-            <a:srgbClr val="FFFFFF"/>
+            <a:srgbClr val="EDEDF3"/>
           </a:solidFill>
           <a:ln>
             <a:noFill/>
@@ -6988,43 +7471,51 @@
                 </a:solidFill>
                 <a:latin typeface="JetBrains Mono"/>
               </a:rPr>
-              <a:t>M03  ·  SCHAUBILD</a:t>
-            </a:r>
-          </a:p>
-        </p:txBody>
-      </p:sp>
-      <p:sp>
-        <p:nvSpPr>
-          <p:cNvPr id="5" name="TextBox 4"/>
-          <p:cNvSpPr txBox="1"/>
-          <p:nvPr/>
-        </p:nvSpPr>
-        <p:spPr>
-          <a:xfrm>
-            <a:off x="685800" y="502920"/>
-            <a:ext cx="10817352" cy="594360"/>
-          </a:xfrm>
-          <a:prstGeom prst="rect">
-            <a:avLst/>
-          </a:prstGeom>
-          <a:noFill/>
-        </p:spPr>
-        <p:txBody>
-          <a:bodyPr wrap="square">
-            <a:spAutoFit/>
-          </a:bodyPr>
-          <a:lstStyle/>
-          <a:p>
-            <a:pPr algn="l"/>
-            <a:r>
-              <a:rPr sz="2000" b="1" i="0">
-                <a:solidFill>
-                  <a:srgbClr val="1F2C56"/>
-                </a:solidFill>
-                <a:latin typeface="Source Serif 4"/>
-              </a:rPr>
-              <a:t>Werttreiberbaum für den Mittelstand</a:t>
-            </a:r>
+              <a:t>M03  ·  INHALT</a:t>
+            </a:r>
+          </a:p>
+        </p:txBody>
+      </p:sp>
+      <p:sp>
+        <p:nvSpPr>
+          <p:cNvPr id="5" name="Rectangle 4"/>
+          <p:cNvSpPr/>
+          <p:nvPr/>
+        </p:nvSpPr>
+        <p:spPr>
+          <a:xfrm>
+            <a:off x="0" y="1234440"/>
+            <a:ext cx="12188952" cy="12700"/>
+          </a:xfrm>
+          <a:prstGeom prst="rect">
+            <a:avLst/>
+          </a:prstGeom>
+          <a:solidFill>
+            <a:srgbClr val="D8DFE4"/>
+          </a:solidFill>
+          <a:ln>
+            <a:noFill/>
+          </a:ln>
+        </p:spPr>
+        <p:style>
+          <a:lnRef idx="1">
+            <a:schemeClr val="accent1"/>
+          </a:lnRef>
+          <a:fillRef idx="3">
+            <a:schemeClr val="accent1"/>
+          </a:fillRef>
+          <a:effectRef idx="2">
+            <a:schemeClr val="accent1"/>
+          </a:effectRef>
+          <a:fontRef idx="minor">
+            <a:schemeClr val="lt1"/>
+          </a:fontRef>
+        </p:style>
+        <p:txBody>
+          <a:bodyPr rtlCol="0" anchor="ctr"/>
+          <a:lstStyle/>
+          <a:p>
+            <a:pPr algn="ctr"/>
           </a:p>
         </p:txBody>
       </p:sp>
@@ -7036,8 +7527,8 @@
         </p:nvSpPr>
         <p:spPr>
           <a:xfrm>
-            <a:off x="685800" y="1143000"/>
-            <a:ext cx="10817352" cy="25400"/>
+            <a:off x="685800" y="502920"/>
+            <a:ext cx="36576" cy="658368"/>
           </a:xfrm>
           <a:prstGeom prst="rect">
             <a:avLst/>
@@ -7071,33 +7562,124 @@
           </a:p>
         </p:txBody>
       </p:sp>
-      <p:pic>
-        <p:nvPicPr>
-          <p:cNvPr id="7" name="Picture 6" descr="image.png"/>
-          <p:cNvPicPr>
-            <a:picLocks noChangeAspect="1"/>
-          </p:cNvPicPr>
-          <p:nvPr/>
-        </p:nvPicPr>
-        <p:blipFill>
-          <a:blip r:embed="rId2"/>
-          <a:stretch>
-            <a:fillRect/>
-          </a:stretch>
-        </p:blipFill>
-        <p:spPr>
-          <a:xfrm>
-            <a:off x="2303489" y="1325880"/>
-            <a:ext cx="7581973" cy="4937760"/>
-          </a:xfrm>
-          <a:prstGeom prst="rect">
-            <a:avLst/>
-          </a:prstGeom>
-        </p:spPr>
-      </p:pic>
-      <p:sp>
-        <p:nvSpPr>
-          <p:cNvPr id="8" name="Rectangle 7"/>
+      <p:sp>
+        <p:nvSpPr>
+          <p:cNvPr id="7" name="TextBox 6"/>
+          <p:cNvSpPr txBox="1"/>
+          <p:nvPr/>
+        </p:nvSpPr>
+        <p:spPr>
+          <a:xfrm>
+            <a:off x="813816" y="502920"/>
+            <a:ext cx="10634472" cy="685800"/>
+          </a:xfrm>
+          <a:prstGeom prst="rect">
+            <a:avLst/>
+          </a:prstGeom>
+          <a:noFill/>
+        </p:spPr>
+        <p:txBody>
+          <a:bodyPr wrap="square">
+            <a:spAutoFit/>
+          </a:bodyPr>
+          <a:lstStyle/>
+          <a:p>
+            <a:pPr algn="l"/>
+            <a:r>
+              <a:rPr sz="2400" b="1" i="0">
+                <a:solidFill>
+                  <a:srgbClr val="1F2C56"/>
+                </a:solidFill>
+                <a:latin typeface="Source Serif 4"/>
+              </a:rPr>
+              <a:t>Kapitalstruktur und Werttreiber verstehen</a:t>
+            </a:r>
+          </a:p>
+        </p:txBody>
+      </p:sp>
+      <p:sp>
+        <p:nvSpPr>
+          <p:cNvPr id="8" name="TextBox 7"/>
+          <p:cNvSpPr txBox="1"/>
+          <p:nvPr/>
+        </p:nvSpPr>
+        <p:spPr>
+          <a:xfrm>
+            <a:off x="685800" y="1417320"/>
+            <a:ext cx="10817352" cy="5029200"/>
+          </a:xfrm>
+          <a:prstGeom prst="rect">
+            <a:avLst/>
+          </a:prstGeom>
+          <a:noFill/>
+        </p:spPr>
+        <p:txBody>
+          <a:bodyPr wrap="square">
+            <a:spAutoFit/>
+          </a:bodyPr>
+          <a:lstStyle/>
+          <a:p>
+            <a:pPr>
+              <a:spcBef>
+                <a:spcPts val="1000"/>
+              </a:spcBef>
+              <a:spcAft>
+                <a:spcPts val="200"/>
+              </a:spcAft>
+            </a:pPr>
+            <a:r>
+              <a:rPr sz="800" b="1">
+                <a:solidFill>
+                  <a:srgbClr val="78808C"/>
+                </a:solidFill>
+                <a:latin typeface="JetBrains Mono"/>
+              </a:rPr>
+              <a:t>ZENTRALE WERTTREIBER IM MITTELSTAND</a:t>
+            </a:r>
+          </a:p>
+          <a:p>
+            <a:pPr>
+              <a:spcBef>
+                <a:spcPts val="400"/>
+              </a:spcBef>
+              <a:spcAft>
+                <a:spcPts val="200"/>
+              </a:spcAft>
+            </a:pPr>
+            <a:r>
+              <a:rPr sz="1200">
+                <a:solidFill>
+                  <a:srgbClr val="3D5466"/>
+                </a:solidFill>
+                <a:latin typeface="Arial"/>
+              </a:rPr>
+              <a:t>(vgl. )</a:t>
+            </a:r>
+          </a:p>
+          <a:p>
+            <a:pPr>
+              <a:spcBef>
+                <a:spcPts val="1000"/>
+              </a:spcBef>
+              <a:spcAft>
+                <a:spcPts val="200"/>
+              </a:spcAft>
+            </a:pPr>
+            <a:r>
+              <a:rPr sz="800" b="1">
+                <a:solidFill>
+                  <a:srgbClr val="78808C"/>
+                </a:solidFill>
+                <a:latin typeface="JetBrains Mono"/>
+              </a:rPr>
+              <a:t>FINANZIERUNGSOPTIONEN IM STRATEGISCHEN VERGLEICH</a:t>
+            </a:r>
+          </a:p>
+        </p:txBody>
+      </p:sp>
+      <p:sp>
+        <p:nvSpPr>
+          <p:cNvPr id="9" name="Rectangle 8"/>
           <p:cNvSpPr/>
           <p:nvPr/>
         </p:nvSpPr>
@@ -7140,7 +7722,7 @@
       </p:sp>
       <p:sp>
         <p:nvSpPr>
-          <p:cNvPr id="9" name="TextBox 8"/>
+          <p:cNvPr id="10" name="TextBox 9"/>
           <p:cNvSpPr txBox="1"/>
           <p:nvPr/>
         </p:nvSpPr>
@@ -7169,41 +7751,6 @@
                 <a:latin typeface="JetBrains Mono"/>
               </a:rPr>
               <a:t>Benedikt Zoller Coaching  ·  FKB Campus  ·  M03</a:t>
-            </a:r>
-          </a:p>
-        </p:txBody>
-      </p:sp>
-      <p:sp>
-        <p:nvSpPr>
-          <p:cNvPr id="10" name="TextBox 9"/>
-          <p:cNvSpPr txBox="1"/>
-          <p:nvPr/>
-        </p:nvSpPr>
-        <p:spPr>
-          <a:xfrm>
-            <a:off x="7176211" y="6583680"/>
-            <a:ext cx="4326940" cy="256032"/>
-          </a:xfrm>
-          <a:prstGeom prst="rect">
-            <a:avLst/>
-          </a:prstGeom>
-          <a:noFill/>
-        </p:spPr>
-        <p:txBody>
-          <a:bodyPr wrap="none">
-            <a:spAutoFit/>
-          </a:bodyPr>
-          <a:lstStyle/>
-          <a:p>
-            <a:pPr algn="r"/>
-            <a:r>
-              <a:rPr sz="700">
-                <a:solidFill>
-                  <a:srgbClr val="A0B4D2"/>
-                </a:solidFill>
-                <a:latin typeface="JetBrains Mono"/>
-              </a:rPr>
-              <a:t>Schaubild</a:t>
             </a:r>
           </a:p>
         </p:txBody>
@@ -7241,7 +7788,7 @@
             <a:avLst/>
           </a:prstGeom>
           <a:solidFill>
-            <a:srgbClr val="EDEDF3"/>
+            <a:srgbClr val="FFFFFF"/>
           </a:solidFill>
           <a:ln>
             <a:noFill/>
@@ -7342,51 +7889,43 @@
                 </a:solidFill>
                 <a:latin typeface="JetBrains Mono"/>
               </a:rPr>
-              <a:t>M03  ·  INHALT</a:t>
-            </a:r>
-          </a:p>
-        </p:txBody>
-      </p:sp>
-      <p:sp>
-        <p:nvSpPr>
-          <p:cNvPr id="5" name="Rectangle 4"/>
-          <p:cNvSpPr/>
-          <p:nvPr/>
-        </p:nvSpPr>
-        <p:spPr>
-          <a:xfrm>
-            <a:off x="0" y="1234440"/>
-            <a:ext cx="12188952" cy="12700"/>
-          </a:xfrm>
-          <a:prstGeom prst="rect">
-            <a:avLst/>
-          </a:prstGeom>
-          <a:solidFill>
-            <a:srgbClr val="D8DFE4"/>
-          </a:solidFill>
-          <a:ln>
-            <a:noFill/>
-          </a:ln>
-        </p:spPr>
-        <p:style>
-          <a:lnRef idx="1">
-            <a:schemeClr val="accent1"/>
-          </a:lnRef>
-          <a:fillRef idx="3">
-            <a:schemeClr val="accent1"/>
-          </a:fillRef>
-          <a:effectRef idx="2">
-            <a:schemeClr val="accent1"/>
-          </a:effectRef>
-          <a:fontRef idx="minor">
-            <a:schemeClr val="lt1"/>
-          </a:fontRef>
-        </p:style>
-        <p:txBody>
-          <a:bodyPr rtlCol="0" anchor="ctr"/>
-          <a:lstStyle/>
-          <a:p>
-            <a:pPr algn="ctr"/>
+              <a:t>M03  ·  SCHAUBILD</a:t>
+            </a:r>
+          </a:p>
+        </p:txBody>
+      </p:sp>
+      <p:sp>
+        <p:nvSpPr>
+          <p:cNvPr id="5" name="TextBox 4"/>
+          <p:cNvSpPr txBox="1"/>
+          <p:nvPr/>
+        </p:nvSpPr>
+        <p:spPr>
+          <a:xfrm>
+            <a:off x="685800" y="502920"/>
+            <a:ext cx="10817352" cy="594360"/>
+          </a:xfrm>
+          <a:prstGeom prst="rect">
+            <a:avLst/>
+          </a:prstGeom>
+          <a:noFill/>
+        </p:spPr>
+        <p:txBody>
+          <a:bodyPr wrap="square">
+            <a:spAutoFit/>
+          </a:bodyPr>
+          <a:lstStyle/>
+          <a:p>
+            <a:pPr algn="l"/>
+            <a:r>
+              <a:rPr sz="2000" b="1" i="0">
+                <a:solidFill>
+                  <a:srgbClr val="1F2C56"/>
+                </a:solidFill>
+                <a:latin typeface="Source Serif 4"/>
+              </a:rPr>
+              <a:t>Werttreiberbaum für den Mittelstand</a:t>
+            </a:r>
           </a:p>
         </p:txBody>
       </p:sp>
@@ -7398,8 +7937,8 @@
         </p:nvSpPr>
         <p:spPr>
           <a:xfrm>
-            <a:off x="685800" y="502920"/>
-            <a:ext cx="36576" cy="658368"/>
+            <a:off x="685800" y="1143000"/>
+            <a:ext cx="10817352" cy="25400"/>
           </a:xfrm>
           <a:prstGeom prst="rect">
             <a:avLst/>
@@ -7433,86 +7972,33 @@
           </a:p>
         </p:txBody>
       </p:sp>
-      <p:sp>
-        <p:nvSpPr>
-          <p:cNvPr id="7" name="TextBox 6"/>
-          <p:cNvSpPr txBox="1"/>
-          <p:nvPr/>
-        </p:nvSpPr>
-        <p:spPr>
-          <a:xfrm>
-            <a:off x="813816" y="502920"/>
-            <a:ext cx="10634472" cy="685800"/>
-          </a:xfrm>
-          <a:prstGeom prst="rect">
-            <a:avLst/>
-          </a:prstGeom>
-          <a:noFill/>
-        </p:spPr>
-        <p:txBody>
-          <a:bodyPr wrap="square">
-            <a:spAutoFit/>
-          </a:bodyPr>
-          <a:lstStyle/>
-          <a:p>
-            <a:pPr algn="l"/>
-            <a:r>
-              <a:rPr sz="2400" b="1" i="0">
-                <a:solidFill>
-                  <a:srgbClr val="1F2C56"/>
-                </a:solidFill>
-                <a:latin typeface="Source Serif 4"/>
-              </a:rPr>
-              <a:t>Strategische Szenarien in der Beratungspraxis</a:t>
-            </a:r>
-          </a:p>
-        </p:txBody>
-      </p:sp>
-      <p:sp>
-        <p:nvSpPr>
-          <p:cNvPr id="8" name="TextBox 7"/>
-          <p:cNvSpPr txBox="1"/>
-          <p:nvPr/>
-        </p:nvSpPr>
-        <p:spPr>
-          <a:xfrm>
-            <a:off x="685800" y="1417320"/>
-            <a:ext cx="10817352" cy="5029200"/>
-          </a:xfrm>
-          <a:prstGeom prst="rect">
-            <a:avLst/>
-          </a:prstGeom>
-          <a:noFill/>
-        </p:spPr>
-        <p:txBody>
-          <a:bodyPr wrap="square">
-            <a:spAutoFit/>
-          </a:bodyPr>
-          <a:lstStyle/>
-          <a:p>
-            <a:pPr>
-              <a:spcBef>
-                <a:spcPts val="1000"/>
-              </a:spcBef>
-              <a:spcAft>
-                <a:spcPts val="200"/>
-              </a:spcAft>
-            </a:pPr>
-            <a:r>
-              <a:rPr sz="800" b="1">
-                <a:solidFill>
-                  <a:srgbClr val="78808C"/>
-                </a:solidFill>
-                <a:latin typeface="JetBrains Mono"/>
-              </a:rPr>
-              <a:t>DIE FÜNF KERNSZENARIEN</a:t>
-            </a:r>
-          </a:p>
-        </p:txBody>
-      </p:sp>
-      <p:sp>
-        <p:nvSpPr>
-          <p:cNvPr id="9" name="Rectangle 8"/>
+      <p:pic>
+        <p:nvPicPr>
+          <p:cNvPr id="7" name="Picture 6" descr="image.png"/>
+          <p:cNvPicPr>
+            <a:picLocks noChangeAspect="1"/>
+          </p:cNvPicPr>
+          <p:nvPr/>
+        </p:nvPicPr>
+        <p:blipFill>
+          <a:blip r:embed="rId2"/>
+          <a:stretch>
+            <a:fillRect/>
+          </a:stretch>
+        </p:blipFill>
+        <p:spPr>
+          <a:xfrm>
+            <a:off x="2303489" y="1325880"/>
+            <a:ext cx="7581973" cy="4937760"/>
+          </a:xfrm>
+          <a:prstGeom prst="rect">
+            <a:avLst/>
+          </a:prstGeom>
+        </p:spPr>
+      </p:pic>
+      <p:sp>
+        <p:nvSpPr>
+          <p:cNvPr id="8" name="Rectangle 7"/>
           <p:cNvSpPr/>
           <p:nvPr/>
         </p:nvSpPr>
@@ -7555,7 +8041,7 @@
       </p:sp>
       <p:sp>
         <p:nvSpPr>
-          <p:cNvPr id="10" name="TextBox 9"/>
+          <p:cNvPr id="9" name="TextBox 8"/>
           <p:cNvSpPr txBox="1"/>
           <p:nvPr/>
         </p:nvSpPr>
@@ -7584,6 +8070,41 @@
                 <a:latin typeface="JetBrains Mono"/>
               </a:rPr>
               <a:t>Benedikt Zoller Coaching  ·  FKB Campus  ·  M03</a:t>
+            </a:r>
+          </a:p>
+        </p:txBody>
+      </p:sp>
+      <p:sp>
+        <p:nvSpPr>
+          <p:cNvPr id="10" name="TextBox 9"/>
+          <p:cNvSpPr txBox="1"/>
+          <p:nvPr/>
+        </p:nvSpPr>
+        <p:spPr>
+          <a:xfrm>
+            <a:off x="7176211" y="6583680"/>
+            <a:ext cx="4326940" cy="256032"/>
+          </a:xfrm>
+          <a:prstGeom prst="rect">
+            <a:avLst/>
+          </a:prstGeom>
+          <a:noFill/>
+        </p:spPr>
+        <p:txBody>
+          <a:bodyPr wrap="none">
+            <a:spAutoFit/>
+          </a:bodyPr>
+          <a:lstStyle/>
+          <a:p>
+            <a:pPr algn="r"/>
+            <a:r>
+              <a:rPr sz="700">
+                <a:solidFill>
+                  <a:srgbClr val="A0B4D2"/>
+                </a:solidFill>
+                <a:latin typeface="JetBrains Mono"/>
+              </a:rPr>
+              <a:t>Schaubild</a:t>
             </a:r>
           </a:p>
         </p:txBody>
@@ -7722,7 +8243,7 @@
                 </a:solidFill>
                 <a:latin typeface="JetBrains Mono"/>
               </a:rPr>
-              <a:t>M03  ·  ARBEITSBLATT</a:t>
+              <a:t>M03  ·  INHALT</a:t>
             </a:r>
           </a:p>
         </p:txBody>
@@ -7843,7 +8364,7 @@
                 </a:solidFill>
                 <a:latin typeface="Source Serif 4"/>
               </a:rPr>
-              <a:t>Praxiscase: Habermaier Präzisionsteile GmbH &amp; Co. KG</a:t>
+              <a:t>Strategische Szenarien in der Beratungspraxis</a:t>
             </a:r>
           </a:p>
         </p:txBody>
@@ -7856,8 +8377,8 @@
         </p:nvSpPr>
         <p:spPr>
           <a:xfrm>
-            <a:off x="685800" y="1554480"/>
-            <a:ext cx="10817352" cy="3840480"/>
+            <a:off x="685800" y="1417320"/>
+            <a:ext cx="10817352" cy="5029200"/>
           </a:xfrm>
           <a:prstGeom prst="rect">
             <a:avLst/>
@@ -7872,96 +8393,20 @@
           <a:p>
             <a:pPr>
               <a:spcBef>
-                <a:spcPts val="400"/>
+                <a:spcPts val="1000"/>
               </a:spcBef>
               <a:spcAft>
                 <a:spcPts val="200"/>
               </a:spcAft>
             </a:pPr>
             <a:r>
-              <a:rPr sz="1400">
+              <a:rPr sz="800" b="1">
                 <a:solidFill>
-                  <a:srgbClr val="3D5466"/>
+                  <a:srgbClr val="78808C"/>
                 </a:solidFill>
-                <a:latin typeface="Arial"/>
+                <a:latin typeface="JetBrains Mono"/>
               </a:rPr>
-              <a:t>▸  Unternehmensprofil</a:t>
-            </a:r>
-          </a:p>
-          <a:p>
-            <a:pPr>
-              <a:spcBef>
-                <a:spcPts val="400"/>
-              </a:spcBef>
-              <a:spcAft>
-                <a:spcPts val="200"/>
-              </a:spcAft>
-            </a:pPr>
-            <a:r>
-              <a:rPr sz="1400">
-                <a:solidFill>
-                  <a:srgbClr val="3D5466"/>
-                </a:solidFill>
-                <a:latin typeface="Arial"/>
-              </a:rPr>
-              <a:t>▸  Finanzkennzahlen (Geschäftsjahre)</a:t>
-            </a:r>
-          </a:p>
-          <a:p>
-            <a:pPr>
-              <a:spcBef>
-                <a:spcPts val="400"/>
-              </a:spcBef>
-              <a:spcAft>
-                <a:spcPts val="200"/>
-              </a:spcAft>
-            </a:pPr>
-            <a:r>
-              <a:rPr sz="1400">
-                <a:solidFill>
-                  <a:srgbClr val="3D5466"/>
-                </a:solidFill>
-                <a:latin typeface="Arial"/>
-              </a:rPr>
-              <a:t>▸  Strategische Ausgangslage</a:t>
-            </a:r>
-          </a:p>
-          <a:p>
-            <a:pPr>
-              <a:spcBef>
-                <a:spcPts val="400"/>
-              </a:spcBef>
-              <a:spcAft>
-                <a:spcPts val="200"/>
-              </a:spcAft>
-            </a:pPr>
-            <a:r>
-              <a:rPr sz="1400">
-                <a:solidFill>
-                  <a:srgbClr val="3D5466"/>
-                </a:solidFill>
-                <a:latin typeface="Arial"/>
-              </a:rPr>
-              <a:t>▸  Stefan Habermaier hat Sie zum Jahresgespräch eingeladen. Im Vorlauf hat er angedeutet, dass er „größere Pläne" hat. Folgender Sachverhalt zeichnet sich ab:</a:t>
-            </a:r>
-          </a:p>
-          <a:p>
-            <a:pPr>
-              <a:spcBef>
-                <a:spcPts val="400"/>
-              </a:spcBef>
-              <a:spcAft>
-                <a:spcPts val="200"/>
-              </a:spcAft>
-            </a:pPr>
-            <a:r>
-              <a:rPr sz="1400">
-                <a:solidFill>
-                  <a:srgbClr val="3D5466"/>
-                </a:solidFill>
-                <a:latin typeface="Arial"/>
-              </a:rPr>
-              <a:t>▸  Ein Medizintechnik-Konzern (Auftragsvolumen derzeit 18 % vom Umsatz) hat eine langfristige Rahmenvereinbarung angeboten, die eine Umsatzsteigerung auf ca. 16 Mio. EUR ermöglicht – aber einen zweiten CNC-Bearbeitungszentrums-Park (Investitionsbedarf: 3,2 Mio. EUR) voraussetzt.</a:t>
+              <a:t>DIE FÜNF KERNSZENARIEN</a:t>
             </a:r>
           </a:p>
         </p:txBody>
@@ -7969,84 +8414,6 @@
       <p:sp>
         <p:nvSpPr>
           <p:cNvPr id="9" name="Rectangle 8"/>
-          <p:cNvSpPr/>
-          <p:nvPr/>
-        </p:nvSpPr>
-        <p:spPr>
-          <a:xfrm>
-            <a:off x="685800" y="5486400"/>
-            <a:ext cx="10817352" cy="640080"/>
-          </a:xfrm>
-          <a:prstGeom prst="rect">
-            <a:avLst/>
-          </a:prstGeom>
-          <a:solidFill>
-            <a:srgbClr val="1F2C56"/>
-          </a:solidFill>
-          <a:ln>
-            <a:noFill/>
-          </a:ln>
-        </p:spPr>
-        <p:style>
-          <a:lnRef idx="1">
-            <a:schemeClr val="accent1"/>
-          </a:lnRef>
-          <a:fillRef idx="3">
-            <a:schemeClr val="accent1"/>
-          </a:fillRef>
-          <a:effectRef idx="2">
-            <a:schemeClr val="accent1"/>
-          </a:effectRef>
-          <a:fontRef idx="minor">
-            <a:schemeClr val="lt1"/>
-          </a:fontRef>
-        </p:style>
-        <p:txBody>
-          <a:bodyPr rtlCol="0" anchor="ctr"/>
-          <a:lstStyle/>
-          <a:p>
-            <a:pPr algn="ctr"/>
-          </a:p>
-        </p:txBody>
-      </p:sp>
-      <p:sp>
-        <p:nvSpPr>
-          <p:cNvPr id="10" name="TextBox 9"/>
-          <p:cNvSpPr txBox="1"/>
-          <p:nvPr/>
-        </p:nvSpPr>
-        <p:spPr>
-          <a:xfrm>
-            <a:off x="868680" y="5596128"/>
-            <a:ext cx="10451592" cy="457200"/>
-          </a:xfrm>
-          <a:prstGeom prst="rect">
-            <a:avLst/>
-          </a:prstGeom>
-          <a:noFill/>
-        </p:spPr>
-        <p:txBody>
-          <a:bodyPr wrap="square">
-            <a:spAutoFit/>
-          </a:bodyPr>
-          <a:lstStyle/>
-          <a:p>
-            <a:pPr algn="l"/>
-            <a:r>
-              <a:rPr sz="1300" b="1" i="0">
-                <a:solidFill>
-                  <a:srgbClr val="FFFFFF"/>
-                </a:solidFill>
-                <a:latin typeface="Arial"/>
-              </a:rPr>
-              <a:t>→  Bearbeitung im Teilnehmer-Workbook (Arbeitsblatt mit Ausfüllfeldern)</a:t>
-            </a:r>
-          </a:p>
-        </p:txBody>
-      </p:sp>
-      <p:sp>
-        <p:nvSpPr>
-          <p:cNvPr id="11" name="Rectangle 10"/>
           <p:cNvSpPr/>
           <p:nvPr/>
         </p:nvSpPr>
@@ -8089,7 +8456,7 @@
       </p:sp>
       <p:sp>
         <p:nvSpPr>
-          <p:cNvPr id="12" name="TextBox 11"/>
+          <p:cNvPr id="10" name="TextBox 9"/>
           <p:cNvSpPr txBox="1"/>
           <p:nvPr/>
         </p:nvSpPr>

--- a/protected-downloads/praesentation/M03.pptx
+++ b/protected-downloads/praesentation/M03.pptx
@@ -16,6 +16,8 @@
     <p:sldId id="264" r:id="rId16"/>
     <p:sldId id="265" r:id="rId17"/>
     <p:sldId id="266" r:id="rId18"/>
+    <p:sldId id="267" r:id="rId19"/>
+    <p:sldId id="268" r:id="rId20"/>
   </p:sldIdLst>
   <p:sldSz cx="12188952" cy="6858000" type="screen4x3"/>
   <p:notesSz cx="6858000" cy="9144000"/>
@@ -512,7 +514,7 @@
           <a:lstStyle/>
           <a:p>
             <a:r>
-              <a:t>Agenda-Überblick. Timing und Pausen siehe Ablaufplan im Trainerhandbuch (Sektion 3).</a:t>
+              <a:t>Agenda aus dem Ablaufplan (Sektion 3.1). Timing und Pausen siehe Trainerhandbuch.</a:t>
             </a:r>
           </a:p>
         </p:txBody>
@@ -5284,13 +5286,13 @@
               </a:spcAft>
             </a:pPr>
             <a:r>
-              <a:rPr sz="1200">
+              <a:rPr sz="1300">
                 <a:solidFill>
                   <a:srgbClr val="3D5466"/>
                 </a:solidFill>
                 <a:latin typeface="Arial"/>
               </a:rPr>
-              <a:t>Formel Betriebsmittelbedarf: Betriebsmittelbedarf = Umsatzwachstum (EUR) × CCC (Tage) / 365</a:t>
+              <a:t>▸  Formel Betriebsmittelbedarf: Betriebsmittelbedarf = Umsatzwachstum (EUR) × CCC (Tage) / 365</a:t>
             </a:r>
           </a:p>
           <a:p>
@@ -5303,13 +5305,13 @@
               </a:spcAft>
             </a:pPr>
             <a:r>
-              <a:rPr sz="1200">
+              <a:rPr sz="1300">
                 <a:solidFill>
                   <a:srgbClr val="3D5466"/>
                 </a:solidFill>
                 <a:latin typeface="Arial"/>
               </a:rPr>
-              <a:t>Beispiel: Umsatzwachstum +3,0 Mio. EUR, CCC 58 Tage → Betriebsmittelbedarf: 3.000 TEUR × 58/365 = ca. 477 TEUR zusätzlich</a:t>
+              <a:t>▸  Beispiel: Umsatzwachstum +3,0 Mio. EUR, CCC 58 Tage → Betriebsmittelbedarf: 3.000 TEUR × 58/365 = ca. 477 TEUR zusätzlich</a:t>
             </a:r>
           </a:p>
           <a:p>
@@ -5407,6 +5409,1304 @@
                 <a:latin typeface="JetBrains Mono"/>
               </a:rPr>
               <a:t>Benedikt Zoller Coaching  ·  FKB Campus  ·  M03</a:t>
+            </a:r>
+          </a:p>
+        </p:txBody>
+      </p:sp>
+    </p:spTree>
+  </p:cSld>
+  <p:clrMapOvr>
+    <a:masterClrMapping/>
+  </p:clrMapOvr>
+</p:sld>
+</file>
+
+<file path=ppt/slides/slide12.xml><?xml version="1.0" encoding="utf-8"?>
+<p:sld xmlns:a="http://schemas.openxmlformats.org/drawingml/2006/main" xmlns:p="http://schemas.openxmlformats.org/presentationml/2006/main" xmlns:r="http://schemas.openxmlformats.org/officeDocument/2006/relationships">
+  <p:cSld>
+    <p:spTree>
+      <p:nvGrpSpPr>
+        <p:cNvPr id="1" name=""/>
+        <p:cNvGrpSpPr/>
+        <p:nvPr/>
+      </p:nvGrpSpPr>
+      <p:grpSpPr/>
+      <p:sp>
+        <p:nvSpPr>
+          <p:cNvPr id="2" name="Rectangle 1"/>
+          <p:cNvSpPr/>
+          <p:nvPr/>
+        </p:nvSpPr>
+        <p:spPr>
+          <a:xfrm>
+            <a:off x="0" y="0"/>
+            <a:ext cx="12188952" cy="6858000"/>
+          </a:xfrm>
+          <a:prstGeom prst="rect">
+            <a:avLst/>
+          </a:prstGeom>
+          <a:solidFill>
+            <a:srgbClr val="FFFFFF"/>
+          </a:solidFill>
+          <a:ln>
+            <a:noFill/>
+          </a:ln>
+        </p:spPr>
+        <p:style>
+          <a:lnRef idx="1">
+            <a:schemeClr val="accent1"/>
+          </a:lnRef>
+          <a:fillRef idx="3">
+            <a:schemeClr val="accent1"/>
+          </a:fillRef>
+          <a:effectRef idx="2">
+            <a:schemeClr val="accent1"/>
+          </a:effectRef>
+          <a:fontRef idx="minor">
+            <a:schemeClr val="lt1"/>
+          </a:fontRef>
+        </p:style>
+        <p:txBody>
+          <a:bodyPr rtlCol="0" anchor="ctr"/>
+          <a:lstStyle/>
+          <a:p>
+            <a:pPr algn="ctr"/>
+          </a:p>
+        </p:txBody>
+      </p:sp>
+      <p:sp>
+        <p:nvSpPr>
+          <p:cNvPr id="3" name="Rectangle 2"/>
+          <p:cNvSpPr/>
+          <p:nvPr/>
+        </p:nvSpPr>
+        <p:spPr>
+          <a:xfrm>
+            <a:off x="0" y="0"/>
+            <a:ext cx="12188952" cy="50292"/>
+          </a:xfrm>
+          <a:prstGeom prst="rect">
+            <a:avLst/>
+          </a:prstGeom>
+          <a:solidFill>
+            <a:srgbClr val="1F2C56"/>
+          </a:solidFill>
+          <a:ln>
+            <a:noFill/>
+          </a:ln>
+        </p:spPr>
+        <p:style>
+          <a:lnRef idx="1">
+            <a:schemeClr val="accent1"/>
+          </a:lnRef>
+          <a:fillRef idx="3">
+            <a:schemeClr val="accent1"/>
+          </a:fillRef>
+          <a:effectRef idx="2">
+            <a:schemeClr val="accent1"/>
+          </a:effectRef>
+          <a:fontRef idx="minor">
+            <a:schemeClr val="lt1"/>
+          </a:fontRef>
+        </p:style>
+        <p:txBody>
+          <a:bodyPr rtlCol="0" anchor="ctr"/>
+          <a:lstStyle/>
+          <a:p>
+            <a:pPr algn="ctr"/>
+          </a:p>
+        </p:txBody>
+      </p:sp>
+      <p:sp>
+        <p:nvSpPr>
+          <p:cNvPr id="4" name="TextBox 3"/>
+          <p:cNvSpPr txBox="1"/>
+          <p:nvPr/>
+        </p:nvSpPr>
+        <p:spPr>
+          <a:xfrm>
+            <a:off x="685800" y="109728"/>
+            <a:ext cx="10817352" cy="228600"/>
+          </a:xfrm>
+          <a:prstGeom prst="rect">
+            <a:avLst/>
+          </a:prstGeom>
+          <a:noFill/>
+        </p:spPr>
+        <p:txBody>
+          <a:bodyPr wrap="none">
+            <a:spAutoFit/>
+          </a:bodyPr>
+          <a:lstStyle/>
+          <a:p>
+            <a:pPr algn="l"/>
+            <a:r>
+              <a:rPr sz="750">
+                <a:solidFill>
+                  <a:srgbClr val="78808C"/>
+                </a:solidFill>
+                <a:latin typeface="JetBrains Mono"/>
+              </a:rPr>
+              <a:t>M03  ·  ÜBERSICHT</a:t>
+            </a:r>
+          </a:p>
+        </p:txBody>
+      </p:sp>
+      <p:sp>
+        <p:nvSpPr>
+          <p:cNvPr id="5" name="TextBox 4"/>
+          <p:cNvSpPr txBox="1"/>
+          <p:nvPr/>
+        </p:nvSpPr>
+        <p:spPr>
+          <a:xfrm>
+            <a:off x="685800" y="502920"/>
+            <a:ext cx="10817352" cy="594360"/>
+          </a:xfrm>
+          <a:prstGeom prst="rect">
+            <a:avLst/>
+          </a:prstGeom>
+          <a:noFill/>
+        </p:spPr>
+        <p:txBody>
+          <a:bodyPr wrap="square">
+            <a:spAutoFit/>
+          </a:bodyPr>
+          <a:lstStyle/>
+          <a:p>
+            <a:pPr algn="l"/>
+            <a:r>
+              <a:rPr sz="2000" b="1" i="0">
+                <a:solidFill>
+                  <a:srgbClr val="1F2C56"/>
+                </a:solidFill>
+                <a:latin typeface="Source Serif 4"/>
+              </a:rPr>
+              <a:t>Liquiditäts- und Wachstumsplanung</a:t>
+            </a:r>
+          </a:p>
+        </p:txBody>
+      </p:sp>
+      <p:sp>
+        <p:nvSpPr>
+          <p:cNvPr id="6" name="Rectangle 5"/>
+          <p:cNvSpPr/>
+          <p:nvPr/>
+        </p:nvSpPr>
+        <p:spPr>
+          <a:xfrm>
+            <a:off x="685800" y="1143000"/>
+            <a:ext cx="10817352" cy="25400"/>
+          </a:xfrm>
+          <a:prstGeom prst="rect">
+            <a:avLst/>
+          </a:prstGeom>
+          <a:solidFill>
+            <a:srgbClr val="D9C089"/>
+          </a:solidFill>
+          <a:ln>
+            <a:noFill/>
+          </a:ln>
+        </p:spPr>
+        <p:style>
+          <a:lnRef idx="1">
+            <a:schemeClr val="accent1"/>
+          </a:lnRef>
+          <a:fillRef idx="3">
+            <a:schemeClr val="accent1"/>
+          </a:fillRef>
+          <a:effectRef idx="2">
+            <a:schemeClr val="accent1"/>
+          </a:effectRef>
+          <a:fontRef idx="minor">
+            <a:schemeClr val="lt1"/>
+          </a:fontRef>
+        </p:style>
+        <p:txBody>
+          <a:bodyPr rtlCol="0" anchor="ctr"/>
+          <a:lstStyle/>
+          <a:p>
+            <a:pPr algn="ctr"/>
+          </a:p>
+        </p:txBody>
+      </p:sp>
+      <p:graphicFrame>
+        <p:nvGraphicFramePr>
+          <p:cNvPr id="7" name="Table 6"/>
+          <p:cNvGraphicFramePr>
+            <a:graphicFrameLocks noGrp="1"/>
+          </p:cNvGraphicFramePr>
+          <p:nvPr/>
+        </p:nvGraphicFramePr>
+        <p:xfrm>
+          <a:off x="685800" y="1417320"/>
+          <a:ext cx="10817352" cy="1920240"/>
+        </p:xfrm>
+        <a:graphic>
+          <a:graphicData uri="http://schemas.openxmlformats.org/drawingml/2006/table">
+            <a:tbl>
+              <a:tblPr firstRow="1" bandRow="1">
+                <a:tableStyleId>{5C22544A-7EE6-4342-B048-85BDC9FD1C3A}</a:tableStyleId>
+              </a:tblPr>
+              <a:tblGrid>
+                <a:gridCol w="3605784"/>
+                <a:gridCol w="3605784"/>
+                <a:gridCol w="3605784"/>
+              </a:tblGrid>
+              <a:tr h="384048">
+                <a:tc>
+                  <a:txBody>
+                    <a:bodyPr/>
+                    <a:lstStyle/>
+                    <a:p>
+                      <a:r>
+                        <a:rPr sz="1100" b="1">
+                          <a:solidFill>
+                            <a:srgbClr val="FFFFFF"/>
+                          </a:solidFill>
+                          <a:latin typeface="Arial"/>
+                        </a:rPr>
+                        <a:t>Komponente</a:t>
+                      </a:r>
+                    </a:p>
+                  </a:txBody>
+                  <a:tcPr>
+                    <a:solidFill>
+                      <a:srgbClr val="1F2C56"/>
+                    </a:solidFill>
+                  </a:tcPr>
+                </a:tc>
+                <a:tc>
+                  <a:txBody>
+                    <a:bodyPr/>
+                    <a:lstStyle/>
+                    <a:p>
+                      <a:r>
+                        <a:rPr sz="1100" b="1">
+                          <a:solidFill>
+                            <a:srgbClr val="FFFFFF"/>
+                          </a:solidFill>
+                          <a:latin typeface="Arial"/>
+                        </a:rPr>
+                        <a:t>Formel / Beschreibung</a:t>
+                      </a:r>
+                    </a:p>
+                  </a:txBody>
+                  <a:tcPr>
+                    <a:solidFill>
+                      <a:srgbClr val="1F2C56"/>
+                    </a:solidFill>
+                  </a:tcPr>
+                </a:tc>
+                <a:tc>
+                  <a:txBody>
+                    <a:bodyPr/>
+                    <a:lstStyle/>
+                    <a:p>
+                      <a:r>
+                        <a:rPr sz="1100" b="1">
+                          <a:solidFill>
+                            <a:srgbClr val="FFFFFF"/>
+                          </a:solidFill>
+                          <a:latin typeface="Arial"/>
+                        </a:rPr>
+                        <a:t>Optimierungsansatz</a:t>
+                      </a:r>
+                    </a:p>
+                  </a:txBody>
+                  <a:tcPr>
+                    <a:solidFill>
+                      <a:srgbClr val="1F2C56"/>
+                    </a:solidFill>
+                  </a:tcPr>
+                </a:tc>
+              </a:tr>
+              <a:tr h="384048">
+                <a:tc>
+                  <a:txBody>
+                    <a:bodyPr/>
+                    <a:lstStyle/>
+                    <a:p>
+                      <a:r>
+                        <a:rPr sz="1050">
+                          <a:solidFill>
+                            <a:srgbClr val="3D5466"/>
+                          </a:solidFill>
+                          <a:latin typeface="Arial"/>
+                        </a:rPr>
+                        <a:t>Debitorenlaufzeit (DSO)</a:t>
+                      </a:r>
+                    </a:p>
+                  </a:txBody>
+                  <a:tcPr/>
+                </a:tc>
+                <a:tc>
+                  <a:txBody>
+                    <a:bodyPr/>
+                    <a:lstStyle/>
+                    <a:p>
+                      <a:r>
+                        <a:rPr sz="1050">
+                          <a:solidFill>
+                            <a:srgbClr val="3D5466"/>
+                          </a:solidFill>
+                          <a:latin typeface="Arial"/>
+                        </a:rPr>
+                        <a:t>Forderungen / (Umsatz / 365)</a:t>
+                      </a:r>
+                    </a:p>
+                  </a:txBody>
+                  <a:tcPr/>
+                </a:tc>
+                <a:tc>
+                  <a:txBody>
+                    <a:bodyPr/>
+                    <a:lstStyle/>
+                    <a:p>
+                      <a:r>
+                        <a:rPr sz="1050">
+                          <a:solidFill>
+                            <a:srgbClr val="3D5466"/>
+                          </a:solidFill>
+                          <a:latin typeface="Arial"/>
+                        </a:rPr>
+                        <a:t>Zahlungsziele verkürzen, Factoring</a:t>
+                      </a:r>
+                    </a:p>
+                  </a:txBody>
+                  <a:tcPr/>
+                </a:tc>
+              </a:tr>
+              <a:tr h="384048">
+                <a:tc>
+                  <a:txBody>
+                    <a:bodyPr/>
+                    <a:lstStyle/>
+                    <a:p>
+                      <a:r>
+                        <a:rPr sz="1050">
+                          <a:solidFill>
+                            <a:srgbClr val="3D5466"/>
+                          </a:solidFill>
+                          <a:latin typeface="Arial"/>
+                        </a:rPr>
+                        <a:t>Kreditorenlaufzeit (DPO)</a:t>
+                      </a:r>
+                    </a:p>
+                  </a:txBody>
+                  <a:tcPr/>
+                </a:tc>
+                <a:tc>
+                  <a:txBody>
+                    <a:bodyPr/>
+                    <a:lstStyle/>
+                    <a:p>
+                      <a:r>
+                        <a:rPr sz="1050">
+                          <a:solidFill>
+                            <a:srgbClr val="3D5466"/>
+                          </a:solidFill>
+                          <a:latin typeface="Arial"/>
+                        </a:rPr>
+                        <a:t>Verbindlichkeiten / (Wareneinkauf / 365)</a:t>
+                      </a:r>
+                    </a:p>
+                  </a:txBody>
+                  <a:tcPr/>
+                </a:tc>
+                <a:tc>
+                  <a:txBody>
+                    <a:bodyPr/>
+                    <a:lstStyle/>
+                    <a:p>
+                      <a:r>
+                        <a:rPr sz="1050">
+                          <a:solidFill>
+                            <a:srgbClr val="3D5466"/>
+                          </a:solidFill>
+                          <a:latin typeface="Arial"/>
+                        </a:rPr>
+                        <a:t>Zahlungsziele bei Lieferanten verlängern</a:t>
+                      </a:r>
+                    </a:p>
+                  </a:txBody>
+                  <a:tcPr/>
+                </a:tc>
+              </a:tr>
+              <a:tr h="384048">
+                <a:tc>
+                  <a:txBody>
+                    <a:bodyPr/>
+                    <a:lstStyle/>
+                    <a:p>
+                      <a:r>
+                        <a:rPr sz="1050">
+                          <a:solidFill>
+                            <a:srgbClr val="3D5466"/>
+                          </a:solidFill>
+                          <a:latin typeface="Arial"/>
+                        </a:rPr>
+                        <a:t>Lagerdauer (DIO)</a:t>
+                      </a:r>
+                    </a:p>
+                  </a:txBody>
+                  <a:tcPr/>
+                </a:tc>
+                <a:tc>
+                  <a:txBody>
+                    <a:bodyPr/>
+                    <a:lstStyle/>
+                    <a:p>
+                      <a:r>
+                        <a:rPr sz="1050">
+                          <a:solidFill>
+                            <a:srgbClr val="3D5466"/>
+                          </a:solidFill>
+                          <a:latin typeface="Arial"/>
+                        </a:rPr>
+                        <a:t>Vorräte / (COGS / 365)</a:t>
+                      </a:r>
+                    </a:p>
+                  </a:txBody>
+                  <a:tcPr/>
+                </a:tc>
+                <a:tc>
+                  <a:txBody>
+                    <a:bodyPr/>
+                    <a:lstStyle/>
+                    <a:p>
+                      <a:r>
+                        <a:rPr sz="1050">
+                          <a:solidFill>
+                            <a:srgbClr val="3D5466"/>
+                          </a:solidFill>
+                          <a:latin typeface="Arial"/>
+                        </a:rPr>
+                        <a:t>Lagerbestand optimieren, Just-in-time</a:t>
+                      </a:r>
+                    </a:p>
+                  </a:txBody>
+                  <a:tcPr/>
+                </a:tc>
+              </a:tr>
+              <a:tr h="384048">
+                <a:tc>
+                  <a:txBody>
+                    <a:bodyPr/>
+                    <a:lstStyle/>
+                    <a:p>
+                      <a:r>
+                        <a:rPr sz="1050">
+                          <a:solidFill>
+                            <a:srgbClr val="3D5466"/>
+                          </a:solidFill>
+                          <a:latin typeface="Arial"/>
+                        </a:rPr>
+                        <a:t>Cash Conversion Cycle (CCC)</a:t>
+                      </a:r>
+                    </a:p>
+                  </a:txBody>
+                  <a:tcPr/>
+                </a:tc>
+                <a:tc>
+                  <a:txBody>
+                    <a:bodyPr/>
+                    <a:lstStyle/>
+                    <a:p>
+                      <a:r>
+                        <a:rPr sz="1050">
+                          <a:solidFill>
+                            <a:srgbClr val="3D5466"/>
+                          </a:solidFill>
+                          <a:latin typeface="Arial"/>
+                        </a:rPr>
+                        <a:t>DSO + DIO − DPO</a:t>
+                      </a:r>
+                    </a:p>
+                  </a:txBody>
+                  <a:tcPr/>
+                </a:tc>
+                <a:tc>
+                  <a:txBody>
+                    <a:bodyPr/>
+                    <a:lstStyle/>
+                    <a:p>
+                      <a:r>
+                        <a:rPr sz="1050">
+                          <a:solidFill>
+                            <a:srgbClr val="3D5466"/>
+                          </a:solidFill>
+                          <a:latin typeface="Arial"/>
+                        </a:rPr>
+                        <a:t>Ziel: CCC minimieren = Liquiditätsbedarf sinkt</a:t>
+                      </a:r>
+                    </a:p>
+                  </a:txBody>
+                  <a:tcPr/>
+                </a:tc>
+              </a:tr>
+            </a:tbl>
+          </a:graphicData>
+        </a:graphic>
+      </p:graphicFrame>
+      <p:sp>
+        <p:nvSpPr>
+          <p:cNvPr id="8" name="Rectangle 7"/>
+          <p:cNvSpPr/>
+          <p:nvPr/>
+        </p:nvSpPr>
+        <p:spPr>
+          <a:xfrm>
+            <a:off x="0" y="6510528"/>
+            <a:ext cx="12188952" cy="347472"/>
+          </a:xfrm>
+          <a:prstGeom prst="rect">
+            <a:avLst/>
+          </a:prstGeom>
+          <a:solidFill>
+            <a:srgbClr val="0A1937"/>
+          </a:solidFill>
+          <a:ln>
+            <a:noFill/>
+          </a:ln>
+        </p:spPr>
+        <p:style>
+          <a:lnRef idx="1">
+            <a:schemeClr val="accent1"/>
+          </a:lnRef>
+          <a:fillRef idx="3">
+            <a:schemeClr val="accent1"/>
+          </a:fillRef>
+          <a:effectRef idx="2">
+            <a:schemeClr val="accent1"/>
+          </a:effectRef>
+          <a:fontRef idx="minor">
+            <a:schemeClr val="lt1"/>
+          </a:fontRef>
+        </p:style>
+        <p:txBody>
+          <a:bodyPr rtlCol="0" anchor="ctr"/>
+          <a:lstStyle/>
+          <a:p>
+            <a:pPr algn="ctr"/>
+          </a:p>
+        </p:txBody>
+      </p:sp>
+      <p:sp>
+        <p:nvSpPr>
+          <p:cNvPr id="9" name="TextBox 8"/>
+          <p:cNvSpPr txBox="1"/>
+          <p:nvPr/>
+        </p:nvSpPr>
+        <p:spPr>
+          <a:xfrm>
+            <a:off x="685800" y="6583680"/>
+            <a:ext cx="6490411" cy="256032"/>
+          </a:xfrm>
+          <a:prstGeom prst="rect">
+            <a:avLst/>
+          </a:prstGeom>
+          <a:noFill/>
+        </p:spPr>
+        <p:txBody>
+          <a:bodyPr wrap="none">
+            <a:spAutoFit/>
+          </a:bodyPr>
+          <a:lstStyle/>
+          <a:p>
+            <a:pPr algn="l"/>
+            <a:r>
+              <a:rPr sz="700">
+                <a:solidFill>
+                  <a:srgbClr val="A0B4D2"/>
+                </a:solidFill>
+                <a:latin typeface="JetBrains Mono"/>
+              </a:rPr>
+              <a:t>Benedikt Zoller Coaching  ·  FKB Campus  ·  M03</a:t>
+            </a:r>
+          </a:p>
+        </p:txBody>
+      </p:sp>
+      <p:sp>
+        <p:nvSpPr>
+          <p:cNvPr id="10" name="TextBox 9"/>
+          <p:cNvSpPr txBox="1"/>
+          <p:nvPr/>
+        </p:nvSpPr>
+        <p:spPr>
+          <a:xfrm>
+            <a:off x="7176211" y="6583680"/>
+            <a:ext cx="4326940" cy="256032"/>
+          </a:xfrm>
+          <a:prstGeom prst="rect">
+            <a:avLst/>
+          </a:prstGeom>
+          <a:noFill/>
+        </p:spPr>
+        <p:txBody>
+          <a:bodyPr wrap="none">
+            <a:spAutoFit/>
+          </a:bodyPr>
+          <a:lstStyle/>
+          <a:p>
+            <a:pPr algn="r"/>
+            <a:r>
+              <a:rPr sz="700">
+                <a:solidFill>
+                  <a:srgbClr val="A0B4D2"/>
+                </a:solidFill>
+                <a:latin typeface="JetBrains Mono"/>
+              </a:rPr>
+              <a:t>Übersicht</a:t>
+            </a:r>
+          </a:p>
+        </p:txBody>
+      </p:sp>
+    </p:spTree>
+  </p:cSld>
+  <p:clrMapOvr>
+    <a:masterClrMapping/>
+  </p:clrMapOvr>
+</p:sld>
+</file>
+
+<file path=ppt/slides/slide13.xml><?xml version="1.0" encoding="utf-8"?>
+<p:sld xmlns:a="http://schemas.openxmlformats.org/drawingml/2006/main" xmlns:p="http://schemas.openxmlformats.org/presentationml/2006/main" xmlns:r="http://schemas.openxmlformats.org/officeDocument/2006/relationships">
+  <p:cSld>
+    <p:spTree>
+      <p:nvGrpSpPr>
+        <p:cNvPr id="1" name=""/>
+        <p:cNvGrpSpPr/>
+        <p:nvPr/>
+      </p:nvGrpSpPr>
+      <p:grpSpPr/>
+      <p:sp>
+        <p:nvSpPr>
+          <p:cNvPr id="2" name="Rectangle 1"/>
+          <p:cNvSpPr/>
+          <p:nvPr/>
+        </p:nvSpPr>
+        <p:spPr>
+          <a:xfrm>
+            <a:off x="0" y="0"/>
+            <a:ext cx="12188952" cy="6858000"/>
+          </a:xfrm>
+          <a:prstGeom prst="rect">
+            <a:avLst/>
+          </a:prstGeom>
+          <a:solidFill>
+            <a:srgbClr val="FFFFFF"/>
+          </a:solidFill>
+          <a:ln>
+            <a:noFill/>
+          </a:ln>
+        </p:spPr>
+        <p:style>
+          <a:lnRef idx="1">
+            <a:schemeClr val="accent1"/>
+          </a:lnRef>
+          <a:fillRef idx="3">
+            <a:schemeClr val="accent1"/>
+          </a:fillRef>
+          <a:effectRef idx="2">
+            <a:schemeClr val="accent1"/>
+          </a:effectRef>
+          <a:fontRef idx="minor">
+            <a:schemeClr val="lt1"/>
+          </a:fontRef>
+        </p:style>
+        <p:txBody>
+          <a:bodyPr rtlCol="0" anchor="ctr"/>
+          <a:lstStyle/>
+          <a:p>
+            <a:pPr algn="ctr"/>
+          </a:p>
+        </p:txBody>
+      </p:sp>
+      <p:sp>
+        <p:nvSpPr>
+          <p:cNvPr id="3" name="Rectangle 2"/>
+          <p:cNvSpPr/>
+          <p:nvPr/>
+        </p:nvSpPr>
+        <p:spPr>
+          <a:xfrm>
+            <a:off x="0" y="0"/>
+            <a:ext cx="12188952" cy="50292"/>
+          </a:xfrm>
+          <a:prstGeom prst="rect">
+            <a:avLst/>
+          </a:prstGeom>
+          <a:solidFill>
+            <a:srgbClr val="1F2C56"/>
+          </a:solidFill>
+          <a:ln>
+            <a:noFill/>
+          </a:ln>
+        </p:spPr>
+        <p:style>
+          <a:lnRef idx="1">
+            <a:schemeClr val="accent1"/>
+          </a:lnRef>
+          <a:fillRef idx="3">
+            <a:schemeClr val="accent1"/>
+          </a:fillRef>
+          <a:effectRef idx="2">
+            <a:schemeClr val="accent1"/>
+          </a:effectRef>
+          <a:fontRef idx="minor">
+            <a:schemeClr val="lt1"/>
+          </a:fontRef>
+        </p:style>
+        <p:txBody>
+          <a:bodyPr rtlCol="0" anchor="ctr"/>
+          <a:lstStyle/>
+          <a:p>
+            <a:pPr algn="ctr"/>
+          </a:p>
+        </p:txBody>
+      </p:sp>
+      <p:sp>
+        <p:nvSpPr>
+          <p:cNvPr id="4" name="TextBox 3"/>
+          <p:cNvSpPr txBox="1"/>
+          <p:nvPr/>
+        </p:nvSpPr>
+        <p:spPr>
+          <a:xfrm>
+            <a:off x="685800" y="109728"/>
+            <a:ext cx="10817352" cy="228600"/>
+          </a:xfrm>
+          <a:prstGeom prst="rect">
+            <a:avLst/>
+          </a:prstGeom>
+          <a:noFill/>
+        </p:spPr>
+        <p:txBody>
+          <a:bodyPr wrap="none">
+            <a:spAutoFit/>
+          </a:bodyPr>
+          <a:lstStyle/>
+          <a:p>
+            <a:pPr algn="l"/>
+            <a:r>
+              <a:rPr sz="750">
+                <a:solidFill>
+                  <a:srgbClr val="78808C"/>
+                </a:solidFill>
+                <a:latin typeface="JetBrains Mono"/>
+              </a:rPr>
+              <a:t>M03  ·  ÜBERSICHT</a:t>
+            </a:r>
+          </a:p>
+        </p:txBody>
+      </p:sp>
+      <p:sp>
+        <p:nvSpPr>
+          <p:cNvPr id="5" name="TextBox 4"/>
+          <p:cNvSpPr txBox="1"/>
+          <p:nvPr/>
+        </p:nvSpPr>
+        <p:spPr>
+          <a:xfrm>
+            <a:off x="685800" y="502920"/>
+            <a:ext cx="10817352" cy="594360"/>
+          </a:xfrm>
+          <a:prstGeom prst="rect">
+            <a:avLst/>
+          </a:prstGeom>
+          <a:noFill/>
+        </p:spPr>
+        <p:txBody>
+          <a:bodyPr wrap="square">
+            <a:spAutoFit/>
+          </a:bodyPr>
+          <a:lstStyle/>
+          <a:p>
+            <a:pPr algn="l"/>
+            <a:r>
+              <a:rPr sz="2000" b="1" i="0">
+                <a:solidFill>
+                  <a:srgbClr val="1F2C56"/>
+                </a:solidFill>
+                <a:latin typeface="Source Serif 4"/>
+              </a:rPr>
+              <a:t>Liquiditäts- und Wachstumsplanung</a:t>
+            </a:r>
+          </a:p>
+        </p:txBody>
+      </p:sp>
+      <p:sp>
+        <p:nvSpPr>
+          <p:cNvPr id="6" name="Rectangle 5"/>
+          <p:cNvSpPr/>
+          <p:nvPr/>
+        </p:nvSpPr>
+        <p:spPr>
+          <a:xfrm>
+            <a:off x="685800" y="1143000"/>
+            <a:ext cx="10817352" cy="25400"/>
+          </a:xfrm>
+          <a:prstGeom prst="rect">
+            <a:avLst/>
+          </a:prstGeom>
+          <a:solidFill>
+            <a:srgbClr val="D9C089"/>
+          </a:solidFill>
+          <a:ln>
+            <a:noFill/>
+          </a:ln>
+        </p:spPr>
+        <p:style>
+          <a:lnRef idx="1">
+            <a:schemeClr val="accent1"/>
+          </a:lnRef>
+          <a:fillRef idx="3">
+            <a:schemeClr val="accent1"/>
+          </a:fillRef>
+          <a:effectRef idx="2">
+            <a:schemeClr val="accent1"/>
+          </a:effectRef>
+          <a:fontRef idx="minor">
+            <a:schemeClr val="lt1"/>
+          </a:fontRef>
+        </p:style>
+        <p:txBody>
+          <a:bodyPr rtlCol="0" anchor="ctr"/>
+          <a:lstStyle/>
+          <a:p>
+            <a:pPr algn="ctr"/>
+          </a:p>
+        </p:txBody>
+      </p:sp>
+      <p:graphicFrame>
+        <p:nvGraphicFramePr>
+          <p:cNvPr id="7" name="Table 6"/>
+          <p:cNvGraphicFramePr>
+            <a:graphicFrameLocks noGrp="1"/>
+          </p:cNvGraphicFramePr>
+          <p:nvPr/>
+        </p:nvGraphicFramePr>
+        <p:xfrm>
+          <a:off x="685800" y="1417320"/>
+          <a:ext cx="10817352" cy="1920240"/>
+        </p:xfrm>
+        <a:graphic>
+          <a:graphicData uri="http://schemas.openxmlformats.org/drawingml/2006/table">
+            <a:tbl>
+              <a:tblPr firstRow="1" bandRow="1">
+                <a:tableStyleId>{5C22544A-7EE6-4342-B048-85BDC9FD1C3A}</a:tableStyleId>
+              </a:tblPr>
+              <a:tblGrid>
+                <a:gridCol w="3605784"/>
+                <a:gridCol w="3605784"/>
+                <a:gridCol w="3605784"/>
+              </a:tblGrid>
+              <a:tr h="384048">
+                <a:tc>
+                  <a:txBody>
+                    <a:bodyPr/>
+                    <a:lstStyle/>
+                    <a:p>
+                      <a:r>
+                        <a:rPr sz="1100" b="1">
+                          <a:solidFill>
+                            <a:srgbClr val="FFFFFF"/>
+                          </a:solidFill>
+                          <a:latin typeface="Arial"/>
+                        </a:rPr>
+                        <a:t>Instrument</a:t>
+                      </a:r>
+                    </a:p>
+                  </a:txBody>
+                  <a:tcPr>
+                    <a:solidFill>
+                      <a:srgbClr val="1F2C56"/>
+                    </a:solidFill>
+                  </a:tcPr>
+                </a:tc>
+                <a:tc>
+                  <a:txBody>
+                    <a:bodyPr/>
+                    <a:lstStyle/>
+                    <a:p>
+                      <a:r>
+                        <a:rPr sz="1100" b="1">
+                          <a:solidFill>
+                            <a:srgbClr val="FFFFFF"/>
+                          </a:solidFill>
+                          <a:latin typeface="Arial"/>
+                        </a:rPr>
+                        <a:t>Einsatzbereich</a:t>
+                      </a:r>
+                    </a:p>
+                  </a:txBody>
+                  <a:tcPr>
+                    <a:solidFill>
+                      <a:srgbClr val="1F2C56"/>
+                    </a:solidFill>
+                  </a:tcPr>
+                </a:tc>
+                <a:tc>
+                  <a:txBody>
+                    <a:bodyPr/>
+                    <a:lstStyle/>
+                    <a:p>
+                      <a:r>
+                        <a:rPr sz="1100" b="1">
+                          <a:solidFill>
+                            <a:srgbClr val="FFFFFF"/>
+                          </a:solidFill>
+                          <a:latin typeface="Arial"/>
+                        </a:rPr>
+                        <a:t>Typische Merkmale</a:t>
+                      </a:r>
+                    </a:p>
+                  </a:txBody>
+                  <a:tcPr>
+                    <a:solidFill>
+                      <a:srgbClr val="1F2C56"/>
+                    </a:solidFill>
+                  </a:tcPr>
+                </a:tc>
+              </a:tr>
+              <a:tr h="384048">
+                <a:tc>
+                  <a:txBody>
+                    <a:bodyPr/>
+                    <a:lstStyle/>
+                    <a:p>
+                      <a:r>
+                        <a:rPr sz="1050">
+                          <a:solidFill>
+                            <a:srgbClr val="3D5466"/>
+                          </a:solidFill>
+                          <a:latin typeface="Arial"/>
+                        </a:rPr>
+                        <a:t>Kontokorrentlinie</a:t>
+                      </a:r>
+                    </a:p>
+                  </a:txBody>
+                  <a:tcPr/>
+                </a:tc>
+                <a:tc>
+                  <a:txBody>
+                    <a:bodyPr/>
+                    <a:lstStyle/>
+                    <a:p>
+                      <a:r>
+                        <a:rPr sz="1050">
+                          <a:solidFill>
+                            <a:srgbClr val="3D5466"/>
+                          </a:solidFill>
+                          <a:latin typeface="Arial"/>
+                        </a:rPr>
+                        <a:t>Saisonale / kurzfristige Schwankungen</a:t>
+                      </a:r>
+                    </a:p>
+                  </a:txBody>
+                  <a:tcPr/>
+                </a:tc>
+                <a:tc>
+                  <a:txBody>
+                    <a:bodyPr/>
+                    <a:lstStyle/>
+                    <a:p>
+                      <a:r>
+                        <a:rPr sz="1050">
+                          <a:solidFill>
+                            <a:srgbClr val="3D5466"/>
+                          </a:solidFill>
+                          <a:latin typeface="Arial"/>
+                        </a:rPr>
+                        <a:t>Revolving, tagesgenaue Inanspruchnahme</a:t>
+                      </a:r>
+                    </a:p>
+                  </a:txBody>
+                  <a:tcPr/>
+                </a:tc>
+              </a:tr>
+              <a:tr h="384048">
+                <a:tc>
+                  <a:txBody>
+                    <a:bodyPr/>
+                    <a:lstStyle/>
+                    <a:p>
+                      <a:r>
+                        <a:rPr sz="1050">
+                          <a:solidFill>
+                            <a:srgbClr val="3D5466"/>
+                          </a:solidFill>
+                          <a:latin typeface="Arial"/>
+                        </a:rPr>
+                        <a:t>Betriebsmittelkredit</a:t>
+                      </a:r>
+                    </a:p>
+                  </a:txBody>
+                  <a:tcPr/>
+                </a:tc>
+                <a:tc>
+                  <a:txBody>
+                    <a:bodyPr/>
+                    <a:lstStyle/>
+                    <a:p>
+                      <a:r>
+                        <a:rPr sz="1050">
+                          <a:solidFill>
+                            <a:srgbClr val="3D5466"/>
+                          </a:solidFill>
+                          <a:latin typeface="Arial"/>
+                        </a:rPr>
+                        <a:t>Struktureller Working-Capital-Anstieg</a:t>
+                      </a:r>
+                    </a:p>
+                  </a:txBody>
+                  <a:tcPr/>
+                </a:tc>
+                <a:tc>
+                  <a:txBody>
+                    <a:bodyPr/>
+                    <a:lstStyle/>
+                    <a:p>
+                      <a:r>
+                        <a:rPr sz="1050">
+                          <a:solidFill>
+                            <a:srgbClr val="3D5466"/>
+                          </a:solidFill>
+                          <a:latin typeface="Arial"/>
+                        </a:rPr>
+                        <a:t>Laufzeit 1–3 Jahre, feste Tranche</a:t>
+                      </a:r>
+                    </a:p>
+                  </a:txBody>
+                  <a:tcPr/>
+                </a:tc>
+              </a:tr>
+              <a:tr h="384048">
+                <a:tc>
+                  <a:txBody>
+                    <a:bodyPr/>
+                    <a:lstStyle/>
+                    <a:p>
+                      <a:r>
+                        <a:rPr sz="1050">
+                          <a:solidFill>
+                            <a:srgbClr val="3D5466"/>
+                          </a:solidFill>
+                          <a:latin typeface="Arial"/>
+                        </a:rPr>
+                        <a:t>Factoring</a:t>
+                      </a:r>
+                    </a:p>
+                  </a:txBody>
+                  <a:tcPr/>
+                </a:tc>
+                <a:tc>
+                  <a:txBody>
+                    <a:bodyPr/>
+                    <a:lstStyle/>
+                    <a:p>
+                      <a:r>
+                        <a:rPr sz="1050">
+                          <a:solidFill>
+                            <a:srgbClr val="3D5466"/>
+                          </a:solidFill>
+                          <a:latin typeface="Arial"/>
+                        </a:rPr>
+                        <a:t>Sofortige Liquidität aus Forderungen</a:t>
+                      </a:r>
+                    </a:p>
+                  </a:txBody>
+                  <a:tcPr/>
+                </a:tc>
+                <a:tc>
+                  <a:txBody>
+                    <a:bodyPr/>
+                    <a:lstStyle/>
+                    <a:p>
+                      <a:r>
+                        <a:rPr sz="1050">
+                          <a:solidFill>
+                            <a:srgbClr val="3D5466"/>
+                          </a:solidFill>
+                          <a:latin typeface="Arial"/>
+                        </a:rPr>
+                        <a:t>DSO auf 0–2 Tage; Kosten 0,8–2,0 % p.a.</a:t>
+                      </a:r>
+                    </a:p>
+                  </a:txBody>
+                  <a:tcPr/>
+                </a:tc>
+              </a:tr>
+              <a:tr h="384048">
+                <a:tc>
+                  <a:txBody>
+                    <a:bodyPr/>
+                    <a:lstStyle/>
+                    <a:p>
+                      <a:r>
+                        <a:rPr sz="1050">
+                          <a:solidFill>
+                            <a:srgbClr val="3D5466"/>
+                          </a:solidFill>
+                          <a:latin typeface="Arial"/>
+                        </a:rPr>
+                        <a:t>Investitionskredit</a:t>
+                      </a:r>
+                    </a:p>
+                  </a:txBody>
+                  <a:tcPr/>
+                </a:tc>
+                <a:tc>
+                  <a:txBody>
+                    <a:bodyPr/>
+                    <a:lstStyle/>
+                    <a:p>
+                      <a:r>
+                        <a:rPr sz="1050">
+                          <a:solidFill>
+                            <a:srgbClr val="3D5466"/>
+                          </a:solidFill>
+                          <a:latin typeface="Arial"/>
+                        </a:rPr>
+                        <a:t>Maschinen, Anlagen, Gebäude</a:t>
+                      </a:r>
+                    </a:p>
+                  </a:txBody>
+                  <a:tcPr/>
+                </a:tc>
+                <a:tc>
+                  <a:txBody>
+                    <a:bodyPr/>
+                    <a:lstStyle/>
+                    <a:p>
+                      <a:r>
+                        <a:rPr sz="1050">
+                          <a:solidFill>
+                            <a:srgbClr val="3D5466"/>
+                          </a:solidFill>
+                          <a:latin typeface="Arial"/>
+                        </a:rPr>
+                        <a:t>Laufzeit 5–15 Jahre, ggf. Fördermittel</a:t>
+                      </a:r>
+                    </a:p>
+                  </a:txBody>
+                  <a:tcPr/>
+                </a:tc>
+              </a:tr>
+            </a:tbl>
+          </a:graphicData>
+        </a:graphic>
+      </p:graphicFrame>
+      <p:sp>
+        <p:nvSpPr>
+          <p:cNvPr id="8" name="Rectangle 7"/>
+          <p:cNvSpPr/>
+          <p:nvPr/>
+        </p:nvSpPr>
+        <p:spPr>
+          <a:xfrm>
+            <a:off x="0" y="6510528"/>
+            <a:ext cx="12188952" cy="347472"/>
+          </a:xfrm>
+          <a:prstGeom prst="rect">
+            <a:avLst/>
+          </a:prstGeom>
+          <a:solidFill>
+            <a:srgbClr val="0A1937"/>
+          </a:solidFill>
+          <a:ln>
+            <a:noFill/>
+          </a:ln>
+        </p:spPr>
+        <p:style>
+          <a:lnRef idx="1">
+            <a:schemeClr val="accent1"/>
+          </a:lnRef>
+          <a:fillRef idx="3">
+            <a:schemeClr val="accent1"/>
+          </a:fillRef>
+          <a:effectRef idx="2">
+            <a:schemeClr val="accent1"/>
+          </a:effectRef>
+          <a:fontRef idx="minor">
+            <a:schemeClr val="lt1"/>
+          </a:fontRef>
+        </p:style>
+        <p:txBody>
+          <a:bodyPr rtlCol="0" anchor="ctr"/>
+          <a:lstStyle/>
+          <a:p>
+            <a:pPr algn="ctr"/>
+          </a:p>
+        </p:txBody>
+      </p:sp>
+      <p:sp>
+        <p:nvSpPr>
+          <p:cNvPr id="9" name="TextBox 8"/>
+          <p:cNvSpPr txBox="1"/>
+          <p:nvPr/>
+        </p:nvSpPr>
+        <p:spPr>
+          <a:xfrm>
+            <a:off x="685800" y="6583680"/>
+            <a:ext cx="6490411" cy="256032"/>
+          </a:xfrm>
+          <a:prstGeom prst="rect">
+            <a:avLst/>
+          </a:prstGeom>
+          <a:noFill/>
+        </p:spPr>
+        <p:txBody>
+          <a:bodyPr wrap="none">
+            <a:spAutoFit/>
+          </a:bodyPr>
+          <a:lstStyle/>
+          <a:p>
+            <a:pPr algn="l"/>
+            <a:r>
+              <a:rPr sz="700">
+                <a:solidFill>
+                  <a:srgbClr val="A0B4D2"/>
+                </a:solidFill>
+                <a:latin typeface="JetBrains Mono"/>
+              </a:rPr>
+              <a:t>Benedikt Zoller Coaching  ·  FKB Campus  ·  M03</a:t>
+            </a:r>
+          </a:p>
+        </p:txBody>
+      </p:sp>
+      <p:sp>
+        <p:nvSpPr>
+          <p:cNvPr id="10" name="TextBox 9"/>
+          <p:cNvSpPr txBox="1"/>
+          <p:nvPr/>
+        </p:nvSpPr>
+        <p:spPr>
+          <a:xfrm>
+            <a:off x="7176211" y="6583680"/>
+            <a:ext cx="4326940" cy="256032"/>
+          </a:xfrm>
+          <a:prstGeom prst="rect">
+            <a:avLst/>
+          </a:prstGeom>
+          <a:noFill/>
+        </p:spPr>
+        <p:txBody>
+          <a:bodyPr wrap="none">
+            <a:spAutoFit/>
+          </a:bodyPr>
+          <a:lstStyle/>
+          <a:p>
+            <a:pPr algn="r"/>
+            <a:r>
+              <a:rPr sz="700">
+                <a:solidFill>
+                  <a:srgbClr val="A0B4D2"/>
+                </a:solidFill>
+                <a:latin typeface="JetBrains Mono"/>
+              </a:rPr>
+              <a:t>Übersicht</a:t>
             </a:r>
           </a:p>
         </p:txBody>
@@ -6402,7 +7702,7 @@
                 </a:solidFill>
                 <a:latin typeface="Source Serif 4"/>
               </a:rPr>
-              <a:t>Agenda</a:t>
+              <a:t>So läuft das Modul</a:t>
             </a:r>
           </a:p>
         </p:txBody>
@@ -6431,96 +7731,445 @@
           <a:p>
             <a:pPr>
               <a:spcBef>
-                <a:spcPts val="800"/>
+                <a:spcPts val="400"/>
               </a:spcBef>
               <a:spcAft>
-                <a:spcPts val="200"/>
+                <a:spcPts val="100"/>
               </a:spcAft>
             </a:pPr>
             <a:r>
-              <a:rPr sz="1500">
+              <a:rPr sz="900">
+                <a:solidFill>
+                  <a:srgbClr val="78808C"/>
+                </a:solidFill>
+                <a:latin typeface="Consolas"/>
+              </a:rPr>
+              <a:t>08:30–09:00 </a:t>
+            </a:r>
+            <a:r>
+              <a:rPr sz="1200" b="1">
                 <a:solidFill>
                   <a:srgbClr val="3D5466"/>
                 </a:solidFill>
                 <a:latin typeface="Arial"/>
               </a:rPr>
-              <a:t>01   Vom Bilanzgespräch zum Strategiegespräch</a:t>
+              <a:t>  0 – Ankommen &amp; Orientierung</a:t>
+            </a:r>
+            <a:r>
+              <a:rPr sz="900">
+                <a:solidFill>
+                  <a:srgbClr val="78808C"/>
+                </a:solidFill>
+                <a:latin typeface="Arial"/>
+              </a:rPr>
+              <a:t>  ·  Plenum</a:t>
             </a:r>
           </a:p>
           <a:p>
             <a:pPr>
               <a:spcBef>
-                <a:spcPts val="800"/>
+                <a:spcPts val="400"/>
               </a:spcBef>
               <a:spcAft>
-                <a:spcPts val="200"/>
+                <a:spcPts val="100"/>
               </a:spcAft>
             </a:pPr>
             <a:r>
-              <a:rPr sz="1500">
+              <a:rPr sz="900">
+                <a:solidFill>
+                  <a:srgbClr val="78808C"/>
+                </a:solidFill>
+                <a:latin typeface="Consolas"/>
+              </a:rPr>
+              <a:t>09:00–10:00 </a:t>
+            </a:r>
+            <a:r>
+              <a:rPr sz="1200" b="1">
                 <a:solidFill>
                   <a:srgbClr val="3D5466"/>
                 </a:solidFill>
                 <a:latin typeface="Arial"/>
               </a:rPr>
-              <a:t>02   Kapitalstruktur und Werttreiber verstehen</a:t>
+              <a:t>  1 – Strategischer Rahmen</a:t>
+            </a:r>
+            <a:r>
+              <a:rPr sz="900">
+                <a:solidFill>
+                  <a:srgbClr val="78808C"/>
+                </a:solidFill>
+                <a:latin typeface="Arial"/>
+              </a:rPr>
+              <a:t>  ·  Input + Diskussion</a:t>
             </a:r>
           </a:p>
           <a:p>
             <a:pPr>
               <a:spcBef>
-                <a:spcPts val="800"/>
+                <a:spcPts val="400"/>
               </a:spcBef>
               <a:spcAft>
-                <a:spcPts val="200"/>
+                <a:spcPts val="100"/>
               </a:spcAft>
             </a:pPr>
             <a:r>
-              <a:rPr sz="1500">
+              <a:rPr sz="900">
+                <a:solidFill>
+                  <a:srgbClr val="78808C"/>
+                </a:solidFill>
+                <a:latin typeface="Consolas"/>
+              </a:rPr>
+              <a:t>10:00–10:45 </a:t>
+            </a:r>
+            <a:r>
+              <a:rPr sz="1200" b="1">
                 <a:solidFill>
                   <a:srgbClr val="3D5466"/>
                 </a:solidFill>
                 <a:latin typeface="Arial"/>
               </a:rPr>
-              <a:t>03   Strategische Szenarien in der Beratungspraxis</a:t>
+              <a:t>  2 – Case-Analyse Teil 1</a:t>
+            </a:r>
+            <a:r>
+              <a:rPr sz="900">
+                <a:solidFill>
+                  <a:srgbClr val="78808C"/>
+                </a:solidFill>
+                <a:latin typeface="Arial"/>
+              </a:rPr>
+              <a:t>  ·  Gruppenarbeit</a:t>
             </a:r>
           </a:p>
           <a:p>
             <a:pPr>
               <a:spcBef>
-                <a:spcPts val="800"/>
+                <a:spcPts val="400"/>
               </a:spcBef>
               <a:spcAft>
-                <a:spcPts val="200"/>
+                <a:spcPts val="100"/>
               </a:spcAft>
             </a:pPr>
             <a:r>
-              <a:rPr sz="1500">
+              <a:rPr sz="900">
+                <a:solidFill>
+                  <a:srgbClr val="78808C"/>
+                </a:solidFill>
+                <a:latin typeface="Consolas"/>
+              </a:rPr>
+              <a:t>10:45–11:00 </a:t>
+            </a:r>
+            <a:r>
+              <a:rPr sz="1200" b="1">
                 <a:solidFill>
                   <a:srgbClr val="3D5466"/>
                 </a:solidFill>
                 <a:latin typeface="Arial"/>
               </a:rPr>
-              <a:t>04   Praxiscase: Habermaier Präzisionsteile GmbH &amp; Co. KG</a:t>
+              <a:t>  Pause</a:t>
+            </a:r>
+            <a:r>
+              <a:rPr sz="900">
+                <a:solidFill>
+                  <a:srgbClr val="78808C"/>
+                </a:solidFill>
+                <a:latin typeface="Arial"/>
+              </a:rPr>
+              <a:t>  ·  –</a:t>
             </a:r>
           </a:p>
           <a:p>
             <a:pPr>
               <a:spcBef>
-                <a:spcPts val="800"/>
+                <a:spcPts val="400"/>
               </a:spcBef>
               <a:spcAft>
-                <a:spcPts val="200"/>
+                <a:spcPts val="100"/>
               </a:spcAft>
             </a:pPr>
             <a:r>
-              <a:rPr sz="1500">
+              <a:rPr sz="900">
+                <a:solidFill>
+                  <a:srgbClr val="78808C"/>
+                </a:solidFill>
+                <a:latin typeface="Consolas"/>
+              </a:rPr>
+              <a:t>11:00–12:00 </a:t>
+            </a:r>
+            <a:r>
+              <a:rPr sz="1200" b="1">
                 <a:solidFill>
                   <a:srgbClr val="3D5466"/>
                 </a:solidFill>
                 <a:latin typeface="Arial"/>
               </a:rPr>
-              <a:t>05   Liquiditäts- und Wachstumsplanung</a:t>
+              <a:t>  3 – Strategische Szenarien</a:t>
+            </a:r>
+            <a:r>
+              <a:rPr sz="900">
+                <a:solidFill>
+                  <a:srgbClr val="78808C"/>
+                </a:solidFill>
+                <a:latin typeface="Arial"/>
+              </a:rPr>
+              <a:t>  ·  Gruppen + Plenum</a:t>
+            </a:r>
+          </a:p>
+          <a:p>
+            <a:pPr>
+              <a:spcBef>
+                <a:spcPts val="400"/>
+              </a:spcBef>
+              <a:spcAft>
+                <a:spcPts val="100"/>
+              </a:spcAft>
+            </a:pPr>
+            <a:r>
+              <a:rPr sz="900">
+                <a:solidFill>
+                  <a:srgbClr val="78808C"/>
+                </a:solidFill>
+                <a:latin typeface="Consolas"/>
+              </a:rPr>
+              <a:t>12:00–13:00 </a:t>
+            </a:r>
+            <a:r>
+              <a:rPr sz="1200" b="1">
+                <a:solidFill>
+                  <a:srgbClr val="3D5466"/>
+                </a:solidFill>
+                <a:latin typeface="Arial"/>
+              </a:rPr>
+              <a:t>  Mittagspause</a:t>
+            </a:r>
+            <a:r>
+              <a:rPr sz="900">
+                <a:solidFill>
+                  <a:srgbClr val="78808C"/>
+                </a:solidFill>
+                <a:latin typeface="Arial"/>
+              </a:rPr>
+              <a:t>  ·  –</a:t>
+            </a:r>
+          </a:p>
+          <a:p>
+            <a:pPr>
+              <a:spcBef>
+                <a:spcPts val="400"/>
+              </a:spcBef>
+              <a:spcAft>
+                <a:spcPts val="100"/>
+              </a:spcAft>
+            </a:pPr>
+            <a:r>
+              <a:rPr sz="900">
+                <a:solidFill>
+                  <a:srgbClr val="78808C"/>
+                </a:solidFill>
+                <a:latin typeface="Consolas"/>
+              </a:rPr>
+              <a:t>13:00–13:45 </a:t>
+            </a:r>
+            <a:r>
+              <a:rPr sz="1200" b="1">
+                <a:solidFill>
+                  <a:srgbClr val="3D5466"/>
+                </a:solidFill>
+                <a:latin typeface="Arial"/>
+              </a:rPr>
+              <a:t>  4 – SPIN-Gesprächsstrategie</a:t>
+            </a:r>
+            <a:r>
+              <a:rPr sz="900">
+                <a:solidFill>
+                  <a:srgbClr val="78808C"/>
+                </a:solidFill>
+                <a:latin typeface="Arial"/>
+              </a:rPr>
+              <a:t>  ·  Interaktiver Input + Übung</a:t>
+            </a:r>
+          </a:p>
+          <a:p>
+            <a:pPr>
+              <a:spcBef>
+                <a:spcPts val="400"/>
+              </a:spcBef>
+              <a:spcAft>
+                <a:spcPts val="100"/>
+              </a:spcAft>
+            </a:pPr>
+            <a:r>
+              <a:rPr sz="900">
+                <a:solidFill>
+                  <a:srgbClr val="78808C"/>
+                </a:solidFill>
+                <a:latin typeface="Consolas"/>
+              </a:rPr>
+              <a:t>13:45–14:30 </a:t>
+            </a:r>
+            <a:r>
+              <a:rPr sz="1200" b="1">
+                <a:solidFill>
+                  <a:srgbClr val="3D5466"/>
+                </a:solidFill>
+                <a:latin typeface="Arial"/>
+              </a:rPr>
+              <a:t>  5 – Rollenspiel Jahresgespräch</a:t>
+            </a:r>
+            <a:r>
+              <a:rPr sz="900">
+                <a:solidFill>
+                  <a:srgbClr val="78808C"/>
+                </a:solidFill>
+                <a:latin typeface="Arial"/>
+              </a:rPr>
+              <a:t>  ·  Rollenspiel</a:t>
+            </a:r>
+          </a:p>
+          <a:p>
+            <a:pPr>
+              <a:spcBef>
+                <a:spcPts val="400"/>
+              </a:spcBef>
+              <a:spcAft>
+                <a:spcPts val="100"/>
+              </a:spcAft>
+            </a:pPr>
+            <a:r>
+              <a:rPr sz="900">
+                <a:solidFill>
+                  <a:srgbClr val="78808C"/>
+                </a:solidFill>
+                <a:latin typeface="Consolas"/>
+              </a:rPr>
+              <a:t>14:30–14:45 </a:t>
+            </a:r>
+            <a:r>
+              <a:rPr sz="1200" b="1">
+                <a:solidFill>
+                  <a:srgbClr val="3D5466"/>
+                </a:solidFill>
+                <a:latin typeface="Arial"/>
+              </a:rPr>
+              <a:t>  Pause</a:t>
+            </a:r>
+            <a:r>
+              <a:rPr sz="900">
+                <a:solidFill>
+                  <a:srgbClr val="78808C"/>
+                </a:solidFill>
+                <a:latin typeface="Arial"/>
+              </a:rPr>
+              <a:t>  ·  –</a:t>
+            </a:r>
+          </a:p>
+          <a:p>
+            <a:pPr>
+              <a:spcBef>
+                <a:spcPts val="400"/>
+              </a:spcBef>
+              <a:spcAft>
+                <a:spcPts val="100"/>
+              </a:spcAft>
+            </a:pPr>
+            <a:r>
+              <a:rPr sz="900">
+                <a:solidFill>
+                  <a:srgbClr val="78808C"/>
+                </a:solidFill>
+                <a:latin typeface="Consolas"/>
+              </a:rPr>
+              <a:t>14:45–15:30 </a:t>
+            </a:r>
+            <a:r>
+              <a:rPr sz="1200" b="1">
+                <a:solidFill>
+                  <a:srgbClr val="3D5466"/>
+                </a:solidFill>
+                <a:latin typeface="Arial"/>
+              </a:rPr>
+              <a:t>  6 – Finanzierungsplan</a:t>
+            </a:r>
+            <a:r>
+              <a:rPr sz="900">
+                <a:solidFill>
+                  <a:srgbClr val="78808C"/>
+                </a:solidFill>
+                <a:latin typeface="Arial"/>
+              </a:rPr>
+              <a:t>  ·  Gruppenarbeit</a:t>
+            </a:r>
+          </a:p>
+          <a:p>
+            <a:pPr>
+              <a:spcBef>
+                <a:spcPts val="400"/>
+              </a:spcBef>
+              <a:spcAft>
+                <a:spcPts val="100"/>
+              </a:spcAft>
+            </a:pPr>
+            <a:r>
+              <a:rPr sz="900">
+                <a:solidFill>
+                  <a:srgbClr val="78808C"/>
+                </a:solidFill>
+                <a:latin typeface="Consolas"/>
+              </a:rPr>
+              <a:t>15:30–16:15 </a:t>
+            </a:r>
+            <a:r>
+              <a:rPr sz="1200" b="1">
+                <a:solidFill>
+                  <a:srgbClr val="3D5466"/>
+                </a:solidFill>
+                <a:latin typeface="Arial"/>
+              </a:rPr>
+              <a:t>  7 – Präsentation &amp; Peer-Feedback</a:t>
+            </a:r>
+            <a:r>
+              <a:rPr sz="900">
+                <a:solidFill>
+                  <a:srgbClr val="78808C"/>
+                </a:solidFill>
+                <a:latin typeface="Arial"/>
+              </a:rPr>
+              <a:t>  ·  Präsentation</a:t>
+            </a:r>
+          </a:p>
+          <a:p>
+            <a:pPr>
+              <a:spcBef>
+                <a:spcPts val="400"/>
+              </a:spcBef>
+              <a:spcAft>
+                <a:spcPts val="100"/>
+              </a:spcAft>
+            </a:pPr>
+            <a:r>
+              <a:rPr sz="900">
+                <a:solidFill>
+                  <a:srgbClr val="78808C"/>
+                </a:solidFill>
+                <a:latin typeface="Consolas"/>
+              </a:rPr>
+              <a:t>16:15–17:00 </a:t>
+            </a:r>
+            <a:r>
+              <a:rPr sz="1200" b="1">
+                <a:solidFill>
+                  <a:srgbClr val="3D5466"/>
+                </a:solidFill>
+                <a:latin typeface="Arial"/>
+              </a:rPr>
+              <a:t>  8 – Transfer &amp; Abschluss</a:t>
+            </a:r>
+            <a:r>
+              <a:rPr sz="900">
+                <a:solidFill>
+                  <a:srgbClr val="78808C"/>
+                </a:solidFill>
+                <a:latin typeface="Arial"/>
+              </a:rPr>
+              <a:t>  ·  Reflexion + Plenum</a:t>
             </a:r>
           </a:p>
         </p:txBody>
@@ -7647,13 +9296,13 @@
               </a:spcAft>
             </a:pPr>
             <a:r>
-              <a:rPr sz="1200">
+              <a:rPr sz="1300">
                 <a:solidFill>
                   <a:srgbClr val="3D5466"/>
                 </a:solidFill>
                 <a:latin typeface="Arial"/>
               </a:rPr>
-              <a:t>(vgl. )</a:t>
+              <a:t>▸  (vgl. )</a:t>
             </a:r>
           </a:p>
           <a:p>

--- a/protected-downloads/praesentation/M03.pptx
+++ b/protected-downloads/praesentation/M03.pptx
@@ -4402,7 +4402,7 @@
                 </a:solidFill>
                 <a:latin typeface="JetBrains Mono"/>
               </a:rPr>
-              <a:t>Benedikt Zoller Coaching  ·  FKB Campus  ·  2026</a:t>
+              <a:t>FKB Campus  ·  2026</a:t>
             </a:r>
           </a:p>
         </p:txBody>
@@ -4971,7 +4971,7 @@
                 </a:solidFill>
                 <a:latin typeface="JetBrains Mono"/>
               </a:rPr>
-              <a:t>Benedikt Zoller Coaching  ·  FKB Campus  ·  M03</a:t>
+              <a:t>FKB Campus  ·  M03</a:t>
             </a:r>
           </a:p>
         </p:txBody>
@@ -5408,7 +5408,7 @@
                 </a:solidFill>
                 <a:latin typeface="JetBrains Mono"/>
               </a:rPr>
-              <a:t>Benedikt Zoller Coaching  ·  FKB Campus  ·  M03</a:t>
+              <a:t>FKB Campus  ·  M03</a:t>
             </a:r>
           </a:p>
         </p:txBody>
@@ -6022,7 +6022,7 @@
                 </a:solidFill>
                 <a:latin typeface="JetBrains Mono"/>
               </a:rPr>
-              <a:t>Benedikt Zoller Coaching  ·  FKB Campus  ·  M03</a:t>
+              <a:t>FKB Campus  ·  M03</a:t>
             </a:r>
           </a:p>
         </p:txBody>
@@ -6671,7 +6671,7 @@
                 </a:solidFill>
                 <a:latin typeface="JetBrains Mono"/>
               </a:rPr>
-              <a:t>Benedikt Zoller Coaching  ·  FKB Campus  ·  M03</a:t>
+              <a:t>FKB Campus  ·  M03</a:t>
             </a:r>
           </a:p>
         </p:txBody>
@@ -7072,7 +7072,7 @@
                 </a:solidFill>
                 <a:latin typeface="JetBrains Mono"/>
               </a:rPr>
-              <a:t>Benedikt Zoller Coaching  ·  FKB Campus  ·  M03</a:t>
+              <a:t>FKB Campus  ·  M03</a:t>
             </a:r>
           </a:p>
         </p:txBody>
@@ -7485,7 +7485,7 @@
                 </a:solidFill>
                 <a:latin typeface="JetBrains Mono"/>
               </a:rPr>
-              <a:t>Benedikt Zoller Coaching  ·  FKB Campus  ·  M03</a:t>
+              <a:t>FKB Campus  ·  M03</a:t>
             </a:r>
           </a:p>
         </p:txBody>
@@ -8247,7 +8247,7 @@
                 </a:solidFill>
                 <a:latin typeface="JetBrains Mono"/>
               </a:rPr>
-              <a:t>Benedikt Zoller Coaching  ·  FKB Campus  ·  M03</a:t>
+              <a:t>FKB Campus  ·  M03</a:t>
             </a:r>
           </a:p>
         </p:txBody>
@@ -8627,7 +8627,7 @@
                 </a:solidFill>
                 <a:latin typeface="JetBrains Mono"/>
               </a:rPr>
-              <a:t>Benedikt Zoller Coaching  ·  FKB Campus  ·  M03</a:t>
+              <a:t>FKB Campus  ·  M03</a:t>
             </a:r>
           </a:p>
         </p:txBody>
@@ -8946,7 +8946,7 @@
                 </a:solidFill>
                 <a:latin typeface="JetBrains Mono"/>
               </a:rPr>
-              <a:t>Benedikt Zoller Coaching  ·  FKB Campus  ·  M03</a:t>
+              <a:t>FKB Campus  ·  M03</a:t>
             </a:r>
           </a:p>
         </p:txBody>
@@ -9399,7 +9399,7 @@
                 </a:solidFill>
                 <a:latin typeface="JetBrains Mono"/>
               </a:rPr>
-              <a:t>Benedikt Zoller Coaching  ·  FKB Campus  ·  M03</a:t>
+              <a:t>FKB Campus  ·  M03</a:t>
             </a:r>
           </a:p>
         </p:txBody>
@@ -9718,7 +9718,7 @@
                 </a:solidFill>
                 <a:latin typeface="JetBrains Mono"/>
               </a:rPr>
-              <a:t>Benedikt Zoller Coaching  ·  FKB Campus  ·  M03</a:t>
+              <a:t>FKB Campus  ·  M03</a:t>
             </a:r>
           </a:p>
         </p:txBody>
@@ -10133,7 +10133,7 @@
                 </a:solidFill>
                 <a:latin typeface="JetBrains Mono"/>
               </a:rPr>
-              <a:t>Benedikt Zoller Coaching  ·  FKB Campus  ·  M03</a:t>
+              <a:t>FKB Campus  ·  M03</a:t>
             </a:r>
           </a:p>
         </p:txBody>

--- a/protected-downloads/praesentation/M03.pptx
+++ b/protected-downloads/praesentation/M03.pptx
@@ -4324,7 +4324,7 @@
                 </a:solidFill>
                 <a:latin typeface="Arial"/>
               </a:rPr>
-              <a:t>v1.1</a:t>
+              <a:t>v1.0</a:t>
             </a:r>
           </a:p>
         </p:txBody>

--- a/protected-downloads/praesentation/M03.pptx
+++ b/protected-downloads/praesentation/M03.pptx
@@ -3999,7 +3999,7 @@
                 <a:solidFill>
                   <a:srgbClr val="C8D2E6"/>
                 </a:solidFill>
-                <a:latin typeface="JetBrains Mono"/>
+                <a:latin typeface="Consolas"/>
               </a:rPr>
               <a:t>FKB CAMPUS  ·  FIRMENKUNDENAKADEMIE  ·  M03</a:t>
             </a:r>
@@ -4034,7 +4034,7 @@
                 <a:solidFill>
                   <a:srgbClr val="FFFFFF"/>
                 </a:solidFill>
-                <a:latin typeface="Source Serif 4"/>
+                <a:latin typeface="Arial"/>
               </a:rPr>
               <a:t>Der strategische Finanzdialog</a:t>
             </a:r>
@@ -4069,7 +4069,7 @@
                 <a:solidFill>
                   <a:srgbClr val="BECDE6"/>
                 </a:solidFill>
-                <a:latin typeface="Source Serif 4"/>
+                <a:latin typeface="Arial"/>
               </a:rPr>
               <a:t>Kapitalstruktur, Werttreiber und Finanzierungsstrategien für Strategische Partner</a:t>
             </a:r>
@@ -4147,7 +4147,7 @@
                 <a:solidFill>
                   <a:srgbClr val="A0B4D2"/>
                 </a:solidFill>
-                <a:latin typeface="JetBrains Mono"/>
+                <a:latin typeface="Consolas"/>
               </a:rPr>
               <a:t>KOMPETENZFELD</a:t>
             </a:r>
@@ -4217,7 +4217,7 @@
                 <a:solidFill>
                   <a:srgbClr val="A0B4D2"/>
                 </a:solidFill>
-                <a:latin typeface="JetBrains Mono"/>
+                <a:latin typeface="Consolas"/>
               </a:rPr>
               <a:t>KOMPETENZSTUFE</a:t>
             </a:r>
@@ -4287,7 +4287,7 @@
                 <a:solidFill>
                   <a:srgbClr val="A0B4D2"/>
                 </a:solidFill>
-                <a:latin typeface="JetBrains Mono"/>
+                <a:latin typeface="Consolas"/>
               </a:rPr>
               <a:t>VERSION</a:t>
             </a:r>
@@ -4400,7 +4400,7 @@
                 <a:solidFill>
                   <a:srgbClr val="96A5BE"/>
                 </a:solidFill>
-                <a:latin typeface="JetBrains Mono"/>
+                <a:latin typeface="Consolas"/>
               </a:rPr>
               <a:t>FKB Campus  ·  2026</a:t>
             </a:r>
@@ -4435,7 +4435,7 @@
                 <a:solidFill>
                   <a:srgbClr val="96A5BE"/>
                 </a:solidFill>
-                <a:latin typeface="JetBrains Mono"/>
+                <a:latin typeface="Consolas"/>
               </a:rPr>
               <a:t>Trainer-Präsentation</a:t>
             </a:r>
@@ -4574,7 +4574,7 @@
                 <a:solidFill>
                   <a:srgbClr val="78808C"/>
                 </a:solidFill>
-                <a:latin typeface="JetBrains Mono"/>
+                <a:latin typeface="Consolas"/>
               </a:rPr>
               <a:t>M03  ·  ARBEITSBLATT</a:t>
             </a:r>
@@ -4695,7 +4695,7 @@
                 <a:solidFill>
                   <a:srgbClr val="1F2C56"/>
                 </a:solidFill>
-                <a:latin typeface="Source Serif 4"/>
+                <a:latin typeface="Arial"/>
               </a:rPr>
               <a:t>Praxiscase: Habermaier Präzisionsteile GmbH &amp; Co. KG</a:t>
             </a:r>
@@ -4724,7 +4724,7 @@
           </a:bodyPr>
           <a:lstStyle/>
           <a:p>
-            <a:pPr>
+            <a:pPr marL="190500" indent="-190500">
               <a:spcBef>
                 <a:spcPts val="400"/>
               </a:spcBef>
@@ -4743,7 +4743,7 @@
             </a:r>
           </a:p>
           <a:p>
-            <a:pPr>
+            <a:pPr marL="190500" indent="-190500">
               <a:spcBef>
                 <a:spcPts val="400"/>
               </a:spcBef>
@@ -4762,7 +4762,7 @@
             </a:r>
           </a:p>
           <a:p>
-            <a:pPr>
+            <a:pPr marL="190500" indent="-190500">
               <a:spcBef>
                 <a:spcPts val="400"/>
               </a:spcBef>
@@ -4781,7 +4781,7 @@
             </a:r>
           </a:p>
           <a:p>
-            <a:pPr>
+            <a:pPr marL="190500" indent="-190500">
               <a:spcBef>
                 <a:spcPts val="400"/>
               </a:spcBef>
@@ -4800,7 +4800,7 @@
             </a:r>
           </a:p>
           <a:p>
-            <a:pPr>
+            <a:pPr marL="190500" indent="-190500">
               <a:spcBef>
                 <a:spcPts val="400"/>
               </a:spcBef>
@@ -4969,7 +4969,7 @@
                 <a:solidFill>
                   <a:srgbClr val="A0B4D2"/>
                 </a:solidFill>
-                <a:latin typeface="JetBrains Mono"/>
+                <a:latin typeface="Consolas"/>
               </a:rPr>
               <a:t>FKB Campus  ·  M03</a:t>
             </a:r>
@@ -5108,7 +5108,7 @@
                 <a:solidFill>
                   <a:srgbClr val="78808C"/>
                 </a:solidFill>
-                <a:latin typeface="JetBrains Mono"/>
+                <a:latin typeface="Consolas"/>
               </a:rPr>
               <a:t>M03  ·  INHALT</a:t>
             </a:r>
@@ -5229,7 +5229,7 @@
                 <a:solidFill>
                   <a:srgbClr val="1F2C56"/>
                 </a:solidFill>
-                <a:latin typeface="Source Serif 4"/>
+                <a:latin typeface="Arial"/>
               </a:rPr>
               <a:t>Liquiditäts- und Wachstumsplanung</a:t>
             </a:r>
@@ -5245,7 +5245,7 @@
         <p:spPr>
           <a:xfrm>
             <a:off x="685800" y="1417320"/>
-            <a:ext cx="10817352" cy="5029200"/>
+            <a:ext cx="10817352" cy="4892040"/>
           </a:xfrm>
           <a:prstGeom prst="rect">
             <a:avLst/>
@@ -5253,7 +5253,7 @@
           <a:noFill/>
         </p:spPr>
         <p:txBody>
-          <a:bodyPr wrap="square">
+          <a:bodyPr wrap="square" anchor="ctr">
             <a:spAutoFit/>
           </a:bodyPr>
           <a:lstStyle/>
@@ -5271,13 +5271,13 @@
                 <a:solidFill>
                   <a:srgbClr val="78808C"/>
                 </a:solidFill>
-                <a:latin typeface="JetBrains Mono"/>
+                <a:latin typeface="Consolas"/>
               </a:rPr>
               <a:t>WORKING CAPITAL UND CASH CONVERSION CYCLE</a:t>
             </a:r>
           </a:p>
           <a:p>
-            <a:pPr>
+            <a:pPr marL="190500" indent="-190500">
               <a:spcBef>
                 <a:spcPts val="400"/>
               </a:spcBef>
@@ -5296,7 +5296,7 @@
             </a:r>
           </a:p>
           <a:p>
-            <a:pPr>
+            <a:pPr marL="190500" indent="-190500">
               <a:spcBef>
                 <a:spcPts val="400"/>
               </a:spcBef>
@@ -5314,25 +5314,6 @@
               <a:t>▸  Beispiel: Umsatzwachstum +3,0 Mio. EUR, CCC 58 Tage → Betriebsmittelbedarf: 3.000 TEUR × 58/365 = ca. 477 TEUR zusätzlich</a:t>
             </a:r>
           </a:p>
-          <a:p>
-            <a:pPr>
-              <a:spcBef>
-                <a:spcPts val="1000"/>
-              </a:spcBef>
-              <a:spcAft>
-                <a:spcPts val="200"/>
-              </a:spcAft>
-            </a:pPr>
-            <a:r>
-              <a:rPr sz="800" b="1">
-                <a:solidFill>
-                  <a:srgbClr val="78808C"/>
-                </a:solidFill>
-                <a:latin typeface="JetBrains Mono"/>
-              </a:rPr>
-              <a:t>INSTRUMENTE DER WACHSTUMSFINANZIERUNG</a:t>
-            </a:r>
-          </a:p>
         </p:txBody>
       </p:sp>
       <p:sp>
@@ -5406,7 +5387,7 @@
                 <a:solidFill>
                   <a:srgbClr val="A0B4D2"/>
                 </a:solidFill>
-                <a:latin typeface="JetBrains Mono"/>
+                <a:latin typeface="Consolas"/>
               </a:rPr>
               <a:t>FKB Campus  ·  M03</a:t>
             </a:r>
@@ -5545,7 +5526,7 @@
                 <a:solidFill>
                   <a:srgbClr val="78808C"/>
                 </a:solidFill>
-                <a:latin typeface="JetBrains Mono"/>
+                <a:latin typeface="Consolas"/>
               </a:rPr>
               <a:t>M03  ·  ÜBERSICHT</a:t>
             </a:r>
@@ -5580,7 +5561,7 @@
                 <a:solidFill>
                   <a:srgbClr val="1F2C56"/>
                 </a:solidFill>
-                <a:latin typeface="Source Serif 4"/>
+                <a:latin typeface="Arial"/>
               </a:rPr>
               <a:t>Liquiditäts- und Wachstumsplanung</a:t>
             </a:r>
@@ -6020,7 +6001,7 @@
                 <a:solidFill>
                   <a:srgbClr val="A0B4D2"/>
                 </a:solidFill>
-                <a:latin typeface="JetBrains Mono"/>
+                <a:latin typeface="Consolas"/>
               </a:rPr>
               <a:t>FKB Campus  ·  M03</a:t>
             </a:r>
@@ -6055,7 +6036,7 @@
                 <a:solidFill>
                   <a:srgbClr val="A0B4D2"/>
                 </a:solidFill>
-                <a:latin typeface="JetBrains Mono"/>
+                <a:latin typeface="Consolas"/>
               </a:rPr>
               <a:t>Übersicht</a:t>
             </a:r>
@@ -6194,7 +6175,7 @@
                 <a:solidFill>
                   <a:srgbClr val="78808C"/>
                 </a:solidFill>
-                <a:latin typeface="JetBrains Mono"/>
+                <a:latin typeface="Consolas"/>
               </a:rPr>
               <a:t>M03  ·  ÜBERSICHT</a:t>
             </a:r>
@@ -6229,7 +6210,7 @@
                 <a:solidFill>
                   <a:srgbClr val="1F2C56"/>
                 </a:solidFill>
-                <a:latin typeface="Source Serif 4"/>
+                <a:latin typeface="Arial"/>
               </a:rPr>
               <a:t>Liquiditäts- und Wachstumsplanung</a:t>
             </a:r>
@@ -6669,7 +6650,7 @@
                 <a:solidFill>
                   <a:srgbClr val="A0B4D2"/>
                 </a:solidFill>
-                <a:latin typeface="JetBrains Mono"/>
+                <a:latin typeface="Consolas"/>
               </a:rPr>
               <a:t>FKB Campus  ·  M03</a:t>
             </a:r>
@@ -6704,7 +6685,7 @@
                 <a:solidFill>
                   <a:srgbClr val="A0B4D2"/>
                 </a:solidFill>
-                <a:latin typeface="JetBrains Mono"/>
+                <a:latin typeface="Consolas"/>
               </a:rPr>
               <a:t>Übersicht</a:t>
             </a:r>
@@ -6843,7 +6824,7 @@
                 <a:solidFill>
                   <a:srgbClr val="78808C"/>
                 </a:solidFill>
-                <a:latin typeface="JetBrains Mono"/>
+                <a:latin typeface="Consolas"/>
               </a:rPr>
               <a:t>ÜBERBLICK  ·  M03</a:t>
             </a:r>
@@ -6921,7 +6902,7 @@
                 <a:solidFill>
                   <a:srgbClr val="1F2C56"/>
                 </a:solidFill>
-                <a:latin typeface="Source Serif 4"/>
+                <a:latin typeface="Arial"/>
               </a:rPr>
               <a:t>Worum geht es heute</a:t>
             </a:r>
@@ -7070,7 +7051,7 @@
                 <a:solidFill>
                   <a:srgbClr val="A0B4D2"/>
                 </a:solidFill>
-                <a:latin typeface="JetBrains Mono"/>
+                <a:latin typeface="Consolas"/>
               </a:rPr>
               <a:t>FKB Campus  ·  M03</a:t>
             </a:r>
@@ -7209,7 +7190,7 @@
                 <a:solidFill>
                   <a:srgbClr val="78808C"/>
                 </a:solidFill>
-                <a:latin typeface="JetBrains Mono"/>
+                <a:latin typeface="Consolas"/>
               </a:rPr>
               <a:t>LERNZIELE  ·  M03</a:t>
             </a:r>
@@ -7287,7 +7268,7 @@
                 <a:solidFill>
                   <a:srgbClr val="1F2C56"/>
                 </a:solidFill>
-                <a:latin typeface="Source Serif 4"/>
+                <a:latin typeface="Arial"/>
               </a:rPr>
               <a:t>Was Sie heute mitnehmen</a:t>
             </a:r>
@@ -7483,7 +7464,7 @@
                 <a:solidFill>
                   <a:srgbClr val="A0B4D2"/>
                 </a:solidFill>
-                <a:latin typeface="JetBrains Mono"/>
+                <a:latin typeface="Consolas"/>
               </a:rPr>
               <a:t>FKB Campus  ·  M03</a:t>
             </a:r>
@@ -7622,7 +7603,7 @@
                 <a:solidFill>
                   <a:srgbClr val="78808C"/>
                 </a:solidFill>
-                <a:latin typeface="JetBrains Mono"/>
+                <a:latin typeface="Consolas"/>
               </a:rPr>
               <a:t>AGENDA  ·  M03</a:t>
             </a:r>
@@ -7700,7 +7681,7 @@
                 <a:solidFill>
                   <a:srgbClr val="1F2C56"/>
                 </a:solidFill>
-                <a:latin typeface="Source Serif 4"/>
+                <a:latin typeface="Arial"/>
               </a:rPr>
               <a:t>So läuft das Modul</a:t>
             </a:r>
@@ -8245,7 +8226,7 @@
                 <a:solidFill>
                   <a:srgbClr val="A0B4D2"/>
                 </a:solidFill>
-                <a:latin typeface="JetBrains Mono"/>
+                <a:latin typeface="Consolas"/>
               </a:rPr>
               <a:t>FKB Campus  ·  M03</a:t>
             </a:r>
@@ -8384,7 +8365,7 @@
                 <a:solidFill>
                   <a:srgbClr val="78808C"/>
                 </a:solidFill>
-                <a:latin typeface="JetBrains Mono"/>
+                <a:latin typeface="Consolas"/>
               </a:rPr>
               <a:t>M03  ·  INHALT</a:t>
             </a:r>
@@ -8505,7 +8486,7 @@
                 <a:solidFill>
                   <a:srgbClr val="1F2C56"/>
                 </a:solidFill>
-                <a:latin typeface="Source Serif 4"/>
+                <a:latin typeface="Arial"/>
               </a:rPr>
               <a:t>Vom Bilanzgespräch zum Strategiegespräch</a:t>
             </a:r>
@@ -8521,7 +8502,7 @@
         <p:spPr>
           <a:xfrm>
             <a:off x="685800" y="1417320"/>
-            <a:ext cx="10817352" cy="5029200"/>
+            <a:ext cx="10817352" cy="4892040"/>
           </a:xfrm>
           <a:prstGeom prst="rect">
             <a:avLst/>
@@ -8529,29 +8510,11 @@
           <a:noFill/>
         </p:spPr>
         <p:txBody>
-          <a:bodyPr wrap="square">
+          <a:bodyPr wrap="square" anchor="ctr">
             <a:spAutoFit/>
           </a:bodyPr>
           <a:lstStyle/>
-          <a:p>
-            <a:pPr>
-              <a:spcBef>
-                <a:spcPts val="1000"/>
-              </a:spcBef>
-              <a:spcAft>
-                <a:spcPts val="200"/>
-              </a:spcAft>
-            </a:pPr>
-            <a:r>
-              <a:rPr sz="800" b="1">
-                <a:solidFill>
-                  <a:srgbClr val="78808C"/>
-                </a:solidFill>
-                <a:latin typeface="JetBrains Mono"/>
-              </a:rPr>
-              <a:t>DIE DREI EBENEN DES STRATEGISCHEN FINANZDIALOGS</a:t>
-            </a:r>
-          </a:p>
+          <a:p/>
         </p:txBody>
       </p:sp>
       <p:sp>
@@ -8625,7 +8588,7 @@
                 <a:solidFill>
                   <a:srgbClr val="A0B4D2"/>
                 </a:solidFill>
-                <a:latin typeface="JetBrains Mono"/>
+                <a:latin typeface="Consolas"/>
               </a:rPr>
               <a:t>FKB Campus  ·  M03</a:t>
             </a:r>
@@ -8764,7 +8727,7 @@
                 <a:solidFill>
                   <a:srgbClr val="78808C"/>
                 </a:solidFill>
-                <a:latin typeface="JetBrains Mono"/>
+                <a:latin typeface="Consolas"/>
               </a:rPr>
               <a:t>M03  ·  SCHAUBILD</a:t>
             </a:r>
@@ -8799,7 +8762,7 @@
                 <a:solidFill>
                   <a:srgbClr val="1F2C56"/>
                 </a:solidFill>
-                <a:latin typeface="Source Serif 4"/>
+                <a:latin typeface="Arial"/>
               </a:rPr>
               <a:t>Drei Gesprächsebenen des strategischen Finanzdialogs</a:t>
             </a:r>
@@ -8944,7 +8907,7 @@
                 <a:solidFill>
                   <a:srgbClr val="A0B4D2"/>
                 </a:solidFill>
-                <a:latin typeface="JetBrains Mono"/>
+                <a:latin typeface="Consolas"/>
               </a:rPr>
               <a:t>FKB Campus  ·  M03</a:t>
             </a:r>
@@ -8979,7 +8942,7 @@
                 <a:solidFill>
                   <a:srgbClr val="A0B4D2"/>
                 </a:solidFill>
-                <a:latin typeface="JetBrains Mono"/>
+                <a:latin typeface="Consolas"/>
               </a:rPr>
               <a:t>Schaubild</a:t>
             </a:r>
@@ -9118,7 +9081,7 @@
                 <a:solidFill>
                   <a:srgbClr val="78808C"/>
                 </a:solidFill>
-                <a:latin typeface="JetBrains Mono"/>
+                <a:latin typeface="Consolas"/>
               </a:rPr>
               <a:t>M03  ·  INHALT</a:t>
             </a:r>
@@ -9239,7 +9202,7 @@
                 <a:solidFill>
                   <a:srgbClr val="1F2C56"/>
                 </a:solidFill>
-                <a:latin typeface="Source Serif 4"/>
+                <a:latin typeface="Arial"/>
               </a:rPr>
               <a:t>Kapitalstruktur und Werttreiber verstehen</a:t>
             </a:r>
@@ -9255,7 +9218,7 @@
         <p:spPr>
           <a:xfrm>
             <a:off x="685800" y="1417320"/>
-            <a:ext cx="10817352" cy="5029200"/>
+            <a:ext cx="10817352" cy="4892040"/>
           </a:xfrm>
           <a:prstGeom prst="rect">
             <a:avLst/>
@@ -9263,7 +9226,7 @@
           <a:noFill/>
         </p:spPr>
         <p:txBody>
-          <a:bodyPr wrap="square">
+          <a:bodyPr wrap="square" anchor="ctr">
             <a:spAutoFit/>
           </a:bodyPr>
           <a:lstStyle/>
@@ -9281,13 +9244,13 @@
                 <a:solidFill>
                   <a:srgbClr val="78808C"/>
                 </a:solidFill>
-                <a:latin typeface="JetBrains Mono"/>
+                <a:latin typeface="Consolas"/>
               </a:rPr>
               <a:t>ZENTRALE WERTTREIBER IM MITTELSTAND</a:t>
             </a:r>
           </a:p>
           <a:p>
-            <a:pPr>
+            <a:pPr marL="190500" indent="-190500">
               <a:spcBef>
                 <a:spcPts val="400"/>
               </a:spcBef>
@@ -9305,25 +9268,6 @@
               <a:t>▸  (vgl. )</a:t>
             </a:r>
           </a:p>
-          <a:p>
-            <a:pPr>
-              <a:spcBef>
-                <a:spcPts val="1000"/>
-              </a:spcBef>
-              <a:spcAft>
-                <a:spcPts val="200"/>
-              </a:spcAft>
-            </a:pPr>
-            <a:r>
-              <a:rPr sz="800" b="1">
-                <a:solidFill>
-                  <a:srgbClr val="78808C"/>
-                </a:solidFill>
-                <a:latin typeface="JetBrains Mono"/>
-              </a:rPr>
-              <a:t>FINANZIERUNGSOPTIONEN IM STRATEGISCHEN VERGLEICH</a:t>
-            </a:r>
-          </a:p>
         </p:txBody>
       </p:sp>
       <p:sp>
@@ -9397,7 +9341,7 @@
                 <a:solidFill>
                   <a:srgbClr val="A0B4D2"/>
                 </a:solidFill>
-                <a:latin typeface="JetBrains Mono"/>
+                <a:latin typeface="Consolas"/>
               </a:rPr>
               <a:t>FKB Campus  ·  M03</a:t>
             </a:r>
@@ -9536,7 +9480,7 @@
                 <a:solidFill>
                   <a:srgbClr val="78808C"/>
                 </a:solidFill>
-                <a:latin typeface="JetBrains Mono"/>
+                <a:latin typeface="Consolas"/>
               </a:rPr>
               <a:t>M03  ·  SCHAUBILD</a:t>
             </a:r>
@@ -9571,7 +9515,7 @@
                 <a:solidFill>
                   <a:srgbClr val="1F2C56"/>
                 </a:solidFill>
-                <a:latin typeface="Source Serif 4"/>
+                <a:latin typeface="Arial"/>
               </a:rPr>
               <a:t>Werttreiberbaum für den Mittelstand</a:t>
             </a:r>
@@ -9716,7 +9660,7 @@
                 <a:solidFill>
                   <a:srgbClr val="A0B4D2"/>
                 </a:solidFill>
-                <a:latin typeface="JetBrains Mono"/>
+                <a:latin typeface="Consolas"/>
               </a:rPr>
               <a:t>FKB Campus  ·  M03</a:t>
             </a:r>
@@ -9751,7 +9695,7 @@
                 <a:solidFill>
                   <a:srgbClr val="A0B4D2"/>
                 </a:solidFill>
-                <a:latin typeface="JetBrains Mono"/>
+                <a:latin typeface="Consolas"/>
               </a:rPr>
               <a:t>Schaubild</a:t>
             </a:r>
@@ -9890,7 +9834,7 @@
                 <a:solidFill>
                   <a:srgbClr val="78808C"/>
                 </a:solidFill>
-                <a:latin typeface="JetBrains Mono"/>
+                <a:latin typeface="Consolas"/>
               </a:rPr>
               <a:t>M03  ·  INHALT</a:t>
             </a:r>
@@ -10011,7 +9955,7 @@
                 <a:solidFill>
                   <a:srgbClr val="1F2C56"/>
                 </a:solidFill>
-                <a:latin typeface="Source Serif 4"/>
+                <a:latin typeface="Arial"/>
               </a:rPr>
               <a:t>Strategische Szenarien in der Beratungspraxis</a:t>
             </a:r>
@@ -10027,7 +9971,7 @@
         <p:spPr>
           <a:xfrm>
             <a:off x="685800" y="1417320"/>
-            <a:ext cx="10817352" cy="5029200"/>
+            <a:ext cx="10817352" cy="4892040"/>
           </a:xfrm>
           <a:prstGeom prst="rect">
             <a:avLst/>
@@ -10035,29 +9979,11 @@
           <a:noFill/>
         </p:spPr>
         <p:txBody>
-          <a:bodyPr wrap="square">
+          <a:bodyPr wrap="square" anchor="ctr">
             <a:spAutoFit/>
           </a:bodyPr>
           <a:lstStyle/>
-          <a:p>
-            <a:pPr>
-              <a:spcBef>
-                <a:spcPts val="1000"/>
-              </a:spcBef>
-              <a:spcAft>
-                <a:spcPts val="200"/>
-              </a:spcAft>
-            </a:pPr>
-            <a:r>
-              <a:rPr sz="800" b="1">
-                <a:solidFill>
-                  <a:srgbClr val="78808C"/>
-                </a:solidFill>
-                <a:latin typeface="JetBrains Mono"/>
-              </a:rPr>
-              <a:t>DIE FÜNF KERNSZENARIEN</a:t>
-            </a:r>
-          </a:p>
+          <a:p/>
         </p:txBody>
       </p:sp>
       <p:sp>
@@ -10131,7 +10057,7 @@
                 <a:solidFill>
                   <a:srgbClr val="A0B4D2"/>
                 </a:solidFill>
-                <a:latin typeface="JetBrains Mono"/>
+                <a:latin typeface="Consolas"/>
               </a:rPr>
               <a:t>FKB Campus  ·  M03</a:t>
             </a:r>
